--- a/Day 2/Guerrilla AI - Day 2 - Slides.pptx
+++ b/Day 2/Guerrilla AI - Day 2 - Slides.pptx
@@ -1,27 +1,29 @@
 
 <file path=ppt/presentation.xml><?xml version="1.0" encoding="utf-8"?>
-<p:presentation xmlns:a="http://schemas.openxmlformats.org/drawingml/2006/main" xmlns:r="http://schemas.openxmlformats.org/officeDocument/2006/relationships" xmlns:p="http://schemas.openxmlformats.org/presentationml/2006/main" saveSubsetFonts="1" autoCompressPictures="0">
+<p:presentation xmlns:a="http://schemas.openxmlformats.org/drawingml/2006/main" xmlns:r="http://schemas.openxmlformats.org/officeDocument/2006/relationships" xmlns:p="http://schemas.openxmlformats.org/presentationml/2006/main">
   <p:sldMasterIdLst>
     <p:sldMasterId id="2147483648" r:id="rId1"/>
   </p:sldMasterIdLst>
+  <p:notesMasterIdLst>
+    <p:notesMasterId r:id="rId10"/>
+  </p:notesMasterIdLst>
   <p:sldIdLst>
-    <p:sldId id="256" r:id="rId7"/>
-    <p:sldId id="257" r:id="rId9"/>
-    <p:sldId id="258" r:id="rId10"/>
-    <p:sldId id="259" r:id="rId11"/>
-    <p:sldId id="260" r:id="rId12"/>
-    <p:sldId id="261" r:id="rId13"/>
-    <p:sldId id="262" r:id="rId14"/>
-    <p:sldId id="263" r:id="rId15"/>
-    <p:sldId id="264" r:id="rId16"/>
+    <p:sldId id="256" r:id="rId2"/>
+    <p:sldId id="257" r:id="rId3"/>
+    <p:sldId id="260" r:id="rId4"/>
+    <p:sldId id="258" r:id="rId5"/>
+    <p:sldId id="261" r:id="rId6"/>
+    <p:sldId id="262" r:id="rId7"/>
+    <p:sldId id="263" r:id="rId8"/>
+    <p:sldId id="264" r:id="rId9"/>
   </p:sldIdLst>
-  <p:sldSz cx="12191695" cy="6858000" type="screen4x3"/>
+  <p:sldSz cx="12192000" cy="6858000"/>
   <p:notesSz cx="6858000" cy="9144000"/>
   <p:defaultTextStyle>
     <a:defPPr>
       <a:defRPr lang="en-US"/>
     </a:defPPr>
-    <a:lvl1pPr marL="0" algn="l" defTabSz="457200" rtl="0" eaLnBrk="1" latinLnBrk="0" hangingPunct="1">
+    <a:lvl1pPr marL="0" algn="l" defTabSz="914400" rtl="0" eaLnBrk="1" latinLnBrk="0" hangingPunct="1">
       <a:defRPr sz="1800" kern="1200">
         <a:solidFill>
           <a:schemeClr val="tx1"/>
@@ -31,7 +33,7 @@
         <a:cs typeface="+mn-cs"/>
       </a:defRPr>
     </a:lvl1pPr>
-    <a:lvl2pPr marL="457200" algn="l" defTabSz="457200" rtl="0" eaLnBrk="1" latinLnBrk="0" hangingPunct="1">
+    <a:lvl2pPr marL="457200" algn="l" defTabSz="914400" rtl="0" eaLnBrk="1" latinLnBrk="0" hangingPunct="1">
       <a:defRPr sz="1800" kern="1200">
         <a:solidFill>
           <a:schemeClr val="tx1"/>
@@ -41,7 +43,7 @@
         <a:cs typeface="+mn-cs"/>
       </a:defRPr>
     </a:lvl2pPr>
-    <a:lvl3pPr marL="914400" algn="l" defTabSz="457200" rtl="0" eaLnBrk="1" latinLnBrk="0" hangingPunct="1">
+    <a:lvl3pPr marL="914400" algn="l" defTabSz="914400" rtl="0" eaLnBrk="1" latinLnBrk="0" hangingPunct="1">
       <a:defRPr sz="1800" kern="1200">
         <a:solidFill>
           <a:schemeClr val="tx1"/>
@@ -51,7 +53,7 @@
         <a:cs typeface="+mn-cs"/>
       </a:defRPr>
     </a:lvl3pPr>
-    <a:lvl4pPr marL="1371600" algn="l" defTabSz="457200" rtl="0" eaLnBrk="1" latinLnBrk="0" hangingPunct="1">
+    <a:lvl4pPr marL="1371600" algn="l" defTabSz="914400" rtl="0" eaLnBrk="1" latinLnBrk="0" hangingPunct="1">
       <a:defRPr sz="1800" kern="1200">
         <a:solidFill>
           <a:schemeClr val="tx1"/>
@@ -61,7 +63,7 @@
         <a:cs typeface="+mn-cs"/>
       </a:defRPr>
     </a:lvl4pPr>
-    <a:lvl5pPr marL="1828800" algn="l" defTabSz="457200" rtl="0" eaLnBrk="1" latinLnBrk="0" hangingPunct="1">
+    <a:lvl5pPr marL="1828800" algn="l" defTabSz="914400" rtl="0" eaLnBrk="1" latinLnBrk="0" hangingPunct="1">
       <a:defRPr sz="1800" kern="1200">
         <a:solidFill>
           <a:schemeClr val="tx1"/>
@@ -71,7 +73,7 @@
         <a:cs typeface="+mn-cs"/>
       </a:defRPr>
     </a:lvl5pPr>
-    <a:lvl6pPr marL="2286000" algn="l" defTabSz="457200" rtl="0" eaLnBrk="1" latinLnBrk="0" hangingPunct="1">
+    <a:lvl6pPr marL="2286000" algn="l" defTabSz="914400" rtl="0" eaLnBrk="1" latinLnBrk="0" hangingPunct="1">
       <a:defRPr sz="1800" kern="1200">
         <a:solidFill>
           <a:schemeClr val="tx1"/>
@@ -81,7 +83,7 @@
         <a:cs typeface="+mn-cs"/>
       </a:defRPr>
     </a:lvl6pPr>
-    <a:lvl7pPr marL="2743200" algn="l" defTabSz="457200" rtl="0" eaLnBrk="1" latinLnBrk="0" hangingPunct="1">
+    <a:lvl7pPr marL="2743200" algn="l" defTabSz="914400" rtl="0" eaLnBrk="1" latinLnBrk="0" hangingPunct="1">
       <a:defRPr sz="1800" kern="1200">
         <a:solidFill>
           <a:schemeClr val="tx1"/>
@@ -91,7 +93,7 @@
         <a:cs typeface="+mn-cs"/>
       </a:defRPr>
     </a:lvl7pPr>
-    <a:lvl8pPr marL="3200400" algn="l" defTabSz="457200" rtl="0" eaLnBrk="1" latinLnBrk="0" hangingPunct="1">
+    <a:lvl8pPr marL="3200400" algn="l" defTabSz="914400" rtl="0" eaLnBrk="1" latinLnBrk="0" hangingPunct="1">
       <a:defRPr sz="1800" kern="1200">
         <a:solidFill>
           <a:schemeClr val="tx1"/>
@@ -101,7 +103,7 @@
         <a:cs typeface="+mn-cs"/>
       </a:defRPr>
     </a:lvl8pPr>
-    <a:lvl9pPr marL="3657600" algn="l" defTabSz="457200" rtl="0" eaLnBrk="1" latinLnBrk="0" hangingPunct="1">
+    <a:lvl9pPr marL="3657600" algn="l" defTabSz="914400" rtl="0" eaLnBrk="1" latinLnBrk="0" hangingPunct="1">
       <a:defRPr sz="1800" kern="1200">
         <a:solidFill>
           <a:schemeClr val="tx1"/>
@@ -112,11 +114,16 @@
       </a:defRPr>
     </a:lvl9pPr>
   </p:defaultTextStyle>
+  <p:extLst>
+    <p:ext uri="{EFAFB233-063F-42B5-8137-9DF3F51BA10A}">
+      <p15:sldGuideLst xmlns:p15="http://schemas.microsoft.com/office/powerpoint/2012/main"/>
+    </p:ext>
+  </p:extLst>
 </p:presentation>
 </file>
 
 <file path=ppt/notesMasters/notesMaster1.xml><?xml version="1.0" encoding="utf-8"?>
-<p:notesMaster xmlns:a="http://schemas.openxmlformats.org/drawingml/2006/main" xmlns:p="http://schemas.openxmlformats.org/presentationml/2006/main" xmlns:r="http://schemas.openxmlformats.org/officeDocument/2006/relationships">
+<p:notesMaster xmlns:a="http://schemas.openxmlformats.org/drawingml/2006/main" xmlns:r="http://schemas.openxmlformats.org/officeDocument/2006/relationships" xmlns:p="http://schemas.openxmlformats.org/presentationml/2006/main">
   <p:cSld>
     <p:bg>
       <p:bgRef idx="1001">
@@ -139,7 +146,7 @@
       </p:grpSpPr>
       <p:sp>
         <p:nvSpPr>
-          <p:cNvPr id="2" name="Header Placeholder 1"/>
+          <p:cNvPr id="2" name="Header Placeholder"/>
           <p:cNvSpPr>
             <a:spLocks noGrp="1"/>
           </p:cNvSpPr>
@@ -148,64 +155,44 @@
           </p:nvPr>
         </p:nvSpPr>
         <p:spPr>
-          <a:xfrm>
-            <a:off x="0" y="0"/>
-            <a:ext cx="2971800" cy="457200"/>
-          </a:xfrm>
           <a:prstGeom prst="rect">
             <a:avLst/>
           </a:prstGeom>
         </p:spPr>
         <p:txBody>
-          <a:bodyPr vert="horz" lIns="91440" tIns="45720" rIns="91440" bIns="45720" rtlCol="0"/>
-          <a:lstStyle>
-            <a:lvl1pPr algn="l">
-              <a:defRPr sz="1200"/>
-            </a:lvl1pPr>
-          </a:lstStyle>
-          <a:p>
-            <a:endParaRPr lang="en-US"/>
-          </a:p>
-        </p:txBody>
-      </p:sp>
-      <p:sp>
-        <p:nvSpPr>
-          <p:cNvPr id="3" name="Date Placeholder 2"/>
-          <p:cNvSpPr>
-            <a:spLocks noGrp="1"/>
-          </p:cNvSpPr>
-          <p:nvPr>
-            <p:ph type="dt" idx="1"/>
+          <a:bodyPr/>
+          <a:lstStyle/>
+          <a:p>
+            <a:endParaRPr/>
+          </a:p>
+        </p:txBody>
+      </p:sp>
+      <p:sp>
+        <p:nvSpPr>
+          <p:cNvPr id="3" name="Date Placeholder"/>
+          <p:cNvSpPr>
+            <a:spLocks noGrp="1"/>
+          </p:cNvSpPr>
+          <p:nvPr>
+            <p:ph type="dt" sz="quarter" idx="1"/>
           </p:nvPr>
         </p:nvSpPr>
         <p:spPr>
-          <a:xfrm>
-            <a:off x="3884613" y="0"/>
-            <a:ext cx="2971800" cy="457200"/>
-          </a:xfrm>
           <a:prstGeom prst="rect">
             <a:avLst/>
           </a:prstGeom>
         </p:spPr>
         <p:txBody>
-          <a:bodyPr vert="horz" lIns="91440" tIns="45720" rIns="91440" bIns="45720" rtlCol="0"/>
-          <a:lstStyle>
-            <a:lvl1pPr algn="r">
-              <a:defRPr sz="1200"/>
-            </a:lvl1pPr>
-          </a:lstStyle>
-          <a:p>
-            <a:fld id="{0F89C1C7-3DCD-1040-A9CF-14679D8B5DDD}" type="datetimeFigureOut">
-              <a:rPr lang="en-US" smtClean="0"/>
-              <a:t>10/17/16</a:t>
-            </a:fld>
-            <a:endParaRPr lang="en-US"/>
-          </a:p>
-        </p:txBody>
-      </p:sp>
-      <p:sp>
-        <p:nvSpPr>
-          <p:cNvPr id="4" name="Slide Image Placeholder 3"/>
+          <a:bodyPr/>
+          <a:lstStyle/>
+          <a:p>
+            <a:endParaRPr/>
+          </a:p>
+        </p:txBody>
+      </p:sp>
+      <p:sp>
+        <p:nvSpPr>
+          <p:cNvPr id="4" name="Slide Image Placeholder"/>
           <p:cNvSpPr>
             <a:spLocks noGrp="1" noRot="1" noChangeAspect="1"/>
           </p:cNvSpPr>
@@ -214,259 +201,100 @@
           </p:nvPr>
         </p:nvSpPr>
         <p:spPr>
-          <a:xfrm>
-            <a:off x="1143000" y="685800"/>
-            <a:ext cx="4572000" cy="3429000"/>
-          </a:xfrm>
-          <a:prstGeom prst="rect">
-            <a:avLst/>
-          </a:prstGeom>
-          <a:noFill/>
-          <a:ln w="12700">
-            <a:solidFill>
-              <a:prstClr val="black"/>
-            </a:solidFill>
-          </a:ln>
-        </p:spPr>
-        <p:txBody>
-          <a:bodyPr vert="horz" lIns="91440" tIns="45720" rIns="91440" bIns="45720" rtlCol="0" anchor="ctr"/>
-          <a:lstStyle/>
-          <a:p>
-            <a:endParaRPr lang="en-US"/>
-          </a:p>
-        </p:txBody>
-      </p:sp>
-      <p:sp>
-        <p:nvSpPr>
-          <p:cNvPr id="5" name="Notes Placeholder 4"/>
-          <p:cNvSpPr>
-            <a:spLocks noGrp="1"/>
-          </p:cNvSpPr>
-          <p:nvPr>
-            <p:ph type="body" sz="quarter" idx="3"/>
-          </p:nvPr>
-        </p:nvSpPr>
-        <p:spPr>
-          <a:xfrm>
-            <a:off x="685800" y="4343400"/>
-            <a:ext cx="5486400" cy="4114800"/>
-          </a:xfrm>
           <a:prstGeom prst="rect">
             <a:avLst/>
           </a:prstGeom>
         </p:spPr>
         <p:txBody>
-          <a:bodyPr vert="horz" lIns="91440" tIns="45720" rIns="91440" bIns="45720" rtlCol="0"/>
-          <a:lstStyle/>
-          <a:p>
-            <a:pPr lvl="0"/>
-            <a:r>
-              <a:rPr lang="en-US" smtClean="0"/>
-              <a:t>Click to edit Master text styles</a:t>
-            </a:r>
-          </a:p>
-          <a:p>
-            <a:pPr lvl="1"/>
-            <a:r>
-              <a:rPr lang="en-US" smtClean="0"/>
-              <a:t>Second level</a:t>
-            </a:r>
-          </a:p>
-          <a:p>
-            <a:pPr lvl="2"/>
-            <a:r>
-              <a:rPr lang="en-US" smtClean="0"/>
-              <a:t>Third level</a:t>
-            </a:r>
-          </a:p>
-          <a:p>
-            <a:pPr lvl="3"/>
-            <a:r>
-              <a:rPr lang="en-US" smtClean="0"/>
-              <a:t>Fourth level</a:t>
-            </a:r>
-          </a:p>
-          <a:p>
-            <a:pPr lvl="4"/>
-            <a:r>
-              <a:rPr lang="en-US" smtClean="0"/>
-              <a:t>Fifth level</a:t>
-            </a:r>
-            <a:endParaRPr lang="en-US"/>
-          </a:p>
-        </p:txBody>
-      </p:sp>
-      <p:sp>
-        <p:nvSpPr>
-          <p:cNvPr id="6" name="Footer Placeholder 5"/>
-          <p:cNvSpPr>
-            <a:spLocks noGrp="1"/>
-          </p:cNvSpPr>
-          <p:nvPr>
-            <p:ph type="ftr" sz="quarter" idx="4"/>
+          <a:bodyPr/>
+          <a:lstStyle/>
+          <a:p>
+            <a:endParaRPr/>
+          </a:p>
+        </p:txBody>
+      </p:sp>
+      <p:sp>
+        <p:nvSpPr>
+          <p:cNvPr id="5" name="Notes Placeholder"/>
+          <p:cNvSpPr>
+            <a:spLocks noGrp="1"/>
+          </p:cNvSpPr>
+          <p:nvPr>
+            <p:ph type="body" sz="quarter" idx="3"/>
           </p:nvPr>
         </p:nvSpPr>
         <p:spPr>
-          <a:xfrm>
-            <a:off x="0" y="8685213"/>
-            <a:ext cx="2971800" cy="457200"/>
-          </a:xfrm>
           <a:prstGeom prst="rect">
             <a:avLst/>
           </a:prstGeom>
         </p:spPr>
         <p:txBody>
-          <a:bodyPr vert="horz" lIns="91440" tIns="45720" rIns="91440" bIns="45720" rtlCol="0" anchor="b"/>
-          <a:lstStyle>
-            <a:lvl1pPr algn="l">
-              <a:defRPr sz="1200"/>
-            </a:lvl1pPr>
-          </a:lstStyle>
-          <a:p>
-            <a:endParaRPr lang="en-US"/>
-          </a:p>
-        </p:txBody>
-      </p:sp>
-      <p:sp>
-        <p:nvSpPr>
-          <p:cNvPr id="7" name="Slide Number Placeholder 6"/>
-          <p:cNvSpPr>
-            <a:spLocks noGrp="1"/>
-          </p:cNvSpPr>
-          <p:nvPr>
-            <p:ph type="sldNum" sz="quarter" idx="5"/>
+          <a:bodyPr/>
+          <a:lstStyle/>
+          <a:p>
+            <a:endParaRPr/>
+          </a:p>
+        </p:txBody>
+      </p:sp>
+      <p:sp>
+        <p:nvSpPr>
+          <p:cNvPr id="6" name="Footer Placeholder"/>
+          <p:cNvSpPr>
+            <a:spLocks noGrp="1"/>
+          </p:cNvSpPr>
+          <p:nvPr>
+            <p:ph type="ftr" sz="quarter" idx="4"/>
           </p:nvPr>
         </p:nvSpPr>
         <p:spPr>
-          <a:xfrm>
-            <a:off x="3884613" y="8685213"/>
-            <a:ext cx="2971800" cy="457200"/>
-          </a:xfrm>
           <a:prstGeom prst="rect">
             <a:avLst/>
           </a:prstGeom>
         </p:spPr>
         <p:txBody>
-          <a:bodyPr vert="horz" lIns="91440" tIns="45720" rIns="91440" bIns="45720" rtlCol="0" anchor="b"/>
-          <a:lstStyle>
-            <a:lvl1pPr algn="r">
-              <a:defRPr sz="1200"/>
-            </a:lvl1pPr>
-          </a:lstStyle>
-          <a:p>
-            <a:fld id="{BB5E49A5-4136-284D-997B-48E1D791AD67}" type="slidenum">
-              <a:rPr lang="en-US" smtClean="0"/>
-              <a:t>‹#›</a:t>
-            </a:fld>
-            <a:endParaRPr lang="en-US"/>
+          <a:bodyPr/>
+          <a:lstStyle/>
+          <a:p>
+            <a:endParaRPr/>
+          </a:p>
+        </p:txBody>
+      </p:sp>
+      <p:sp>
+        <p:nvSpPr>
+          <p:cNvPr id="7" name="Slide Number Placeholder"/>
+          <p:cNvSpPr>
+            <a:spLocks noGrp="1"/>
+          </p:cNvSpPr>
+          <p:nvPr>
+            <p:ph type="sldNum" sz="quarter" idx="5"/>
+          </p:nvPr>
+        </p:nvSpPr>
+        <p:spPr>
+          <a:prstGeom prst="rect">
+            <a:avLst/>
+          </a:prstGeom>
+        </p:spPr>
+        <p:txBody>
+          <a:bodyPr/>
+          <a:lstStyle/>
+          <a:p>
+            <a:endParaRPr/>
           </a:p>
         </p:txBody>
       </p:sp>
     </p:spTree>
-    <p:extLst>
-      <p:ext uri="{BB962C8B-B14F-4D97-AF65-F5344CB8AC3E}">
-        <p14:creationId xmlns:p14="http://schemas.microsoft.com/office/powerpoint/2010/main" val="2623252185"/>
-      </p:ext>
-    </p:extLst>
   </p:cSld>
   <p:clrMap bg1="lt1" tx1="dk1" bg2="lt2" tx2="dk2" accent1="accent1" accent2="accent2" accent3="accent3" accent4="accent4" accent5="accent5" accent6="accent6" hlink="hlink" folHlink="folHlink"/>
   <p:notesStyle>
-    <a:lvl1pPr marL="0" algn="l" defTabSz="457200" rtl="0" eaLnBrk="1" latinLnBrk="0" hangingPunct="1">
-      <a:defRPr sz="1200" kern="1200">
-        <a:solidFill>
-          <a:schemeClr val="tx1"/>
-        </a:solidFill>
-        <a:latin typeface="+mn-lt"/>
-        <a:ea typeface="+mn-ea"/>
-        <a:cs typeface="+mn-cs"/>
-      </a:defRPr>
+    <a:lvl1pPr marL="0" algn="l" defTabSz="914400" rtl="0" eaLnBrk="1" latinLnBrk="0" hangingPunct="1">
+      <a:defRPr sz="1200" kern="1200"/>
     </a:lvl1pPr>
-    <a:lvl2pPr marL="457200" algn="l" defTabSz="457200" rtl="0" eaLnBrk="1" latinLnBrk="0" hangingPunct="1">
-      <a:defRPr sz="1200" kern="1200">
-        <a:solidFill>
-          <a:schemeClr val="tx1"/>
-        </a:solidFill>
-        <a:latin typeface="+mn-lt"/>
-        <a:ea typeface="+mn-ea"/>
-        <a:cs typeface="+mn-cs"/>
-      </a:defRPr>
-    </a:lvl2pPr>
-    <a:lvl3pPr marL="914400" algn="l" defTabSz="457200" rtl="0" eaLnBrk="1" latinLnBrk="0" hangingPunct="1">
-      <a:defRPr sz="1200" kern="1200">
-        <a:solidFill>
-          <a:schemeClr val="tx1"/>
-        </a:solidFill>
-        <a:latin typeface="+mn-lt"/>
-        <a:ea typeface="+mn-ea"/>
-        <a:cs typeface="+mn-cs"/>
-      </a:defRPr>
-    </a:lvl3pPr>
-    <a:lvl4pPr marL="1371600" algn="l" defTabSz="457200" rtl="0" eaLnBrk="1" latinLnBrk="0" hangingPunct="1">
-      <a:defRPr sz="1200" kern="1200">
-        <a:solidFill>
-          <a:schemeClr val="tx1"/>
-        </a:solidFill>
-        <a:latin typeface="+mn-lt"/>
-        <a:ea typeface="+mn-ea"/>
-        <a:cs typeface="+mn-cs"/>
-      </a:defRPr>
-    </a:lvl4pPr>
-    <a:lvl5pPr marL="1828800" algn="l" defTabSz="457200" rtl="0" eaLnBrk="1" latinLnBrk="0" hangingPunct="1">
-      <a:defRPr sz="1200" kern="1200">
-        <a:solidFill>
-          <a:schemeClr val="tx1"/>
-        </a:solidFill>
-        <a:latin typeface="+mn-lt"/>
-        <a:ea typeface="+mn-ea"/>
-        <a:cs typeface="+mn-cs"/>
-      </a:defRPr>
-    </a:lvl5pPr>
-    <a:lvl6pPr marL="2286000" algn="l" defTabSz="457200" rtl="0" eaLnBrk="1" latinLnBrk="0" hangingPunct="1">
-      <a:defRPr sz="1200" kern="1200">
-        <a:solidFill>
-          <a:schemeClr val="tx1"/>
-        </a:solidFill>
-        <a:latin typeface="+mn-lt"/>
-        <a:ea typeface="+mn-ea"/>
-        <a:cs typeface="+mn-cs"/>
-      </a:defRPr>
-    </a:lvl6pPr>
-    <a:lvl7pPr marL="2743200" algn="l" defTabSz="457200" rtl="0" eaLnBrk="1" latinLnBrk="0" hangingPunct="1">
-      <a:defRPr sz="1200" kern="1200">
-        <a:solidFill>
-          <a:schemeClr val="tx1"/>
-        </a:solidFill>
-        <a:latin typeface="+mn-lt"/>
-        <a:ea typeface="+mn-ea"/>
-        <a:cs typeface="+mn-cs"/>
-      </a:defRPr>
-    </a:lvl7pPr>
-    <a:lvl8pPr marL="3200400" algn="l" defTabSz="457200" rtl="0" eaLnBrk="1" latinLnBrk="0" hangingPunct="1">
-      <a:defRPr sz="1200" kern="1200">
-        <a:solidFill>
-          <a:schemeClr val="tx1"/>
-        </a:solidFill>
-        <a:latin typeface="+mn-lt"/>
-        <a:ea typeface="+mn-ea"/>
-        <a:cs typeface="+mn-cs"/>
-      </a:defRPr>
-    </a:lvl8pPr>
-    <a:lvl9pPr marL="3657600" algn="l" defTabSz="457200" rtl="0" eaLnBrk="1" latinLnBrk="0" hangingPunct="1">
-      <a:defRPr sz="1200" kern="1200">
-        <a:solidFill>
-          <a:schemeClr val="tx1"/>
-        </a:solidFill>
-        <a:latin typeface="+mn-lt"/>
-        <a:ea typeface="+mn-ea"/>
-        <a:cs typeface="+mn-cs"/>
-      </a:defRPr>
-    </a:lvl9pPr>
   </p:notesStyle>
 </p:notesMaster>
 </file>
 
 <file path=ppt/notesSlides/notesSlide1.xml><?xml version="1.0" encoding="utf-8"?>
-<p:notes xmlns:a="http://schemas.openxmlformats.org/drawingml/2006/main" xmlns:p="http://schemas.openxmlformats.org/presentationml/2006/main" xmlns:r="http://schemas.openxmlformats.org/officeDocument/2006/relationships">
+<p:notes xmlns:a="http://schemas.openxmlformats.org/drawingml/2006/main" xmlns:r="http://schemas.openxmlformats.org/officeDocument/2006/relationships" xmlns:p="http://schemas.openxmlformats.org/presentationml/2006/main">
   <p:cSld>
     <p:spTree>
       <p:nvGrpSpPr>
@@ -486,10 +314,10 @@
         <p:nvSpPr>
           <p:cNvPr id="2" name="Slide Image Placeholder 1"/>
           <p:cNvSpPr>
-            <a:spLocks noGrp="1"/>
-          </p:cNvSpPr>
-          <p:nvPr>
-            <p:ph type="sldImg" idx="2"/>
+            <a:spLocks noGrp="1" noRot="1" noChangeAspect="1"/>
+          </p:cNvSpPr>
+          <p:nvPr>
+            <p:ph type="sldImg"/>
           </p:nvPr>
         </p:nvSpPr>
         <p:spPr/>
@@ -501,7 +329,7 @@
             <a:spLocks noGrp="1"/>
           </p:cNvSpPr>
           <p:nvPr>
-            <p:ph type="body" idx="3" sz="quarter"/>
+            <p:ph type="body" idx="1"/>
           </p:nvPr>
         </p:nvSpPr>
         <p:spPr/>
@@ -510,7 +338,48 @@
           <a:lstStyle/>
           <a:p>
             <a:r>
-              <a:t>Welcome, everyone. This is Guerrilla AI for Excel, day 2 of 5. I'm George Mount from Stringfest Analytics. Here is the idea behind this whole series. You do not need a Copilot license, a budget line, or IT's permission to work like an AI-powered analyst. Guerrilla AI means being crafty with what is already installed on your machine: the machine learning Excel has quietly shipped for years, the structural habits that make any AI dramatically better at reading your work, and the free tools that close the gap. Today's twenty-minute win: making your data machine-readable with nothing but Control T and a good name. We have one live demo block and then two or three things you can do at your own desk this afternoon. Let's go. Yesterday you saw smart tools stumble over a messy range. Today you see the same tools get noticeably sharper because of one habit.</a:t>
+              <a:t>Welcome back. Today's win is making an Excel table and giving it a useful name. If you missed yesterday, you can start here. We use the same sales export, and I will do the clicking.</a:t>
+            </a:r>
+          </a:p>
+          <a:p>
+            <a:endParaRPr/>
+          </a:p>
+          <a:p>
+            <a:r>
+              <a:t>CHAT CUE (about 0:30; budget 15 seconds total)</a:t>
+            </a:r>
+          </a:p>
+          <a:p>
+            <a:r>
+              <a:t>SAY: One word in chat to get us started: do you use Excel tables already, YES or NO? No explanation needed. Watching is welcome too.</a:t>
+            </a:r>
+          </a:p>
+          <a:p>
+            <a:r>
+              <a:t>PAUSE: Wait silently for 8 seconds. Do not repeat the request.</a:t>
+            </a:r>
+          </a:p>
+          <a:p>
+            <a:r>
+              <a:t>IF SOMEONE REPLIES: Acknowledge an actual answer. 'I'll show the shortcut and the naming step, so either way you can follow.'</a:t>
+            </a:r>
+          </a:p>
+          <a:p>
+            <a:r>
+              <a:t>IF CHAT IS QUIET: Say, "I'll show it from the beginning." Then continue. Never imply that somebody replied.</a:t>
+            </a:r>
+          </a:p>
+          <a:p>
+            <a:r>
+              <a:t>FACILITATION: Acknowledge at most two actual replies, without calling on anyone by name. Accept a letter, a word, or a longer question. If a reply arrives later, acknowledge it at the next natural pause.</a:t>
+            </a:r>
+          </a:p>
+          <a:p>
+            <a:endParaRPr/>
+          </a:p>
+          <a:p>
+            <a:r>
+              <a:t>Keep the opening to 60 seconds. Participation is optional. The learning continues even with no chat replies.</a:t>
             </a:r>
           </a:p>
         </p:txBody>
@@ -522,10 +391,17 @@
             <a:spLocks noGrp="1"/>
           </p:cNvSpPr>
           <p:nvPr>
-            <p:ph type="sldNum" idx="5" sz="quarter"/>
+            <p:ph type="sldNum" idx="5"/>
           </p:nvPr>
         </p:nvSpPr>
         <p:spPr/>
+        <p:txBody>
+          <a:bodyPr/>
+          <a:lstStyle/>
+          <a:p>
+            <a:endParaRPr/>
+          </a:p>
+        </p:txBody>
       </p:sp>
     </p:spTree>
   </p:cSld>
@@ -536,7 +412,7 @@
 </file>
 
 <file path=ppt/notesSlides/notesSlide2.xml><?xml version="1.0" encoding="utf-8"?>
-<p:notes xmlns:a="http://schemas.openxmlformats.org/drawingml/2006/main" xmlns:p="http://schemas.openxmlformats.org/presentationml/2006/main" xmlns:r="http://schemas.openxmlformats.org/officeDocument/2006/relationships">
+<p:notes xmlns:a="http://schemas.openxmlformats.org/drawingml/2006/main" xmlns:r="http://schemas.openxmlformats.org/officeDocument/2006/relationships" xmlns:p="http://schemas.openxmlformats.org/presentationml/2006/main">
   <p:cSld>
     <p:spTree>
       <p:nvGrpSpPr>
@@ -556,10 +432,10 @@
         <p:nvSpPr>
           <p:cNvPr id="2" name="Slide Image Placeholder 1"/>
           <p:cNvSpPr>
-            <a:spLocks noGrp="1"/>
-          </p:cNvSpPr>
-          <p:nvPr>
-            <p:ph type="sldImg" idx="2"/>
+            <a:spLocks noGrp="1" noRot="1" noChangeAspect="1"/>
+          </p:cNvSpPr>
+          <p:nvPr>
+            <p:ph type="sldImg"/>
           </p:nvPr>
         </p:nvSpPr>
         <p:spPr/>
@@ -571,7 +447,7 @@
             <a:spLocks noGrp="1"/>
           </p:cNvSpPr>
           <p:nvPr>
-            <p:ph type="body" idx="3" sz="quarter"/>
+            <p:ph type="body" idx="1"/>
           </p:nvPr>
         </p:nvSpPr>
         <p:spPr/>
@@ -580,7 +456,7 @@
           <a:lstStyle/>
           <a:p>
             <a:r>
-              <a:t>Thirty-second recap for anyone just joining. Yesterday was the AI already hiding in your Excel: Flash Fill learned a pattern from one example, and Analyze Data answered a plain-English question with a PivotTable. The takeaway was to exhaust the AI you already have before asking for budget. But we also caught the tools being confidently wrong, seven regions instead of four, because the data underneath was a mess. Today we start fixing the underneath. Same Lakeshore export, one new habit.</a:t>
+              <a:t>Thirty-second recap for anyone just joining. Yesterday was the AI already hiding in your Excel: Flash Fill learned a pattern from one example, and Analyze Data answered a plain-English question with a PivotTable. The takeaway was to exhaust the AI you already have before asking for budget. But we also caught the tools being confidently wrong, inconsistent labels for four intended regions, because the data underneath was a mess. Today we start fixing the underneath. Same Lakeshore export, one new habit.</a:t>
             </a:r>
           </a:p>
         </p:txBody>
@@ -592,10 +468,17 @@
             <a:spLocks noGrp="1"/>
           </p:cNvSpPr>
           <p:nvPr>
-            <p:ph type="sldNum" idx="5" sz="quarter"/>
+            <p:ph type="sldNum" idx="5"/>
           </p:nvPr>
         </p:nvSpPr>
         <p:spPr/>
+        <p:txBody>
+          <a:bodyPr/>
+          <a:lstStyle/>
+          <a:p>
+            <a:endParaRPr/>
+          </a:p>
+        </p:txBody>
       </p:sp>
     </p:spTree>
   </p:cSld>
@@ -606,7 +489,7 @@
 </file>
 
 <file path=ppt/notesSlides/notesSlide3.xml><?xml version="1.0" encoding="utf-8"?>
-<p:notes xmlns:a="http://schemas.openxmlformats.org/drawingml/2006/main" xmlns:p="http://schemas.openxmlformats.org/presentationml/2006/main" xmlns:r="http://schemas.openxmlformats.org/officeDocument/2006/relationships">
+<p:notes xmlns:a="http://schemas.openxmlformats.org/drawingml/2006/main" xmlns:r="http://schemas.openxmlformats.org/officeDocument/2006/relationships" xmlns:p="http://schemas.openxmlformats.org/presentationml/2006/main">
   <p:cSld>
     <p:spTree>
       <p:nvGrpSpPr>
@@ -626,10 +509,10 @@
         <p:nvSpPr>
           <p:cNvPr id="2" name="Slide Image Placeholder 1"/>
           <p:cNvSpPr>
-            <a:spLocks noGrp="1"/>
-          </p:cNvSpPr>
-          <p:nvPr>
-            <p:ph type="sldImg" idx="2"/>
+            <a:spLocks noGrp="1" noRot="1" noChangeAspect="1"/>
+          </p:cNvSpPr>
+          <p:nvPr>
+            <p:ph type="sldImg"/>
           </p:nvPr>
         </p:nvSpPr>
         <p:spPr/>
@@ -641,7 +524,7 @@
             <a:spLocks noGrp="1"/>
           </p:cNvSpPr>
           <p:nvPr>
-            <p:ph type="body" idx="3" sz="quarter"/>
+            <p:ph type="body" idx="1"/>
           </p:nvPr>
         </p:nvSpPr>
         <p:spPr/>
@@ -650,7 +533,53 @@
           <a:lstStyle/>
           <a:p>
             <a:r>
-              <a:t>Today's guerrilla hook. Tables sound like the least exciting feature in Excel, so here is the reframe: every AI tool you will touch performs dramatically better on a table than on a raw range. That is true of Analyze Data, which you saw yesterday, and it is just as true of Copilot and of the Python we will run on Thursday. A table gives the machine named columns, a defined boundary, and one data type per field. On top of that, structured references make your formulas read like sentences, so a colleague, or an AI asked to audit your workbook, can tell what a formula means without decoding cell addresses. Here is the guerrilla part: while other teams wait for licenses to arrive, the analyst who makes data machine-readable today gets the payoff from every tool the moment it lands. The AI-ready workbook is a craft skill, not a purchase.</a:t>
+              <a:t>CHAT CUE (about 6:00; budget 15 seconds total)</a:t>
+            </a:r>
+          </a:p>
+          <a:p>
+            <a:r>
+              <a:t>SAY: Quick vote: which name tells you more, A for Table1 or B for SalesData? Just the letter.</a:t>
+            </a:r>
+          </a:p>
+          <a:p>
+            <a:r>
+              <a:t>PAUSE: Wait silently for 8 seconds. Do not repeat the request.</a:t>
+            </a:r>
+          </a:p>
+          <a:p>
+            <a:r>
+              <a:t>IF SOMEONE REPLIES: B. SalesData tells us what the table contains. Show the Table Name box, then read SUM(SalesData[Amount]) out loud.</a:t>
+            </a:r>
+          </a:p>
+          <a:p>
+            <a:r>
+              <a:t>IF CHAT IS QUIET: Say, "I'll use B, SalesData, so the formula tells us what it is adding up." Then continue. Never imply that somebody replied.</a:t>
+            </a:r>
+          </a:p>
+          <a:p>
+            <a:r>
+              <a:t>FACILITATION: Acknowledge at most two actual replies, without calling on anyone by name. Accept a letter, a word, or a longer question. If a reply arrives later, acknowledge it at the next natural pause.</a:t>
+            </a:r>
+          </a:p>
+          <a:p>
+            <a:endParaRPr/>
+          </a:p>
+          <a:p>
+            <a:r>
+              <a:t>Use this cue at the indicated demo pause. Keep the Excel window visible when the prompt refers to its result.</a:t>
+            </a:r>
+          </a:p>
+          <a:p>
+            <a:endParaRPr/>
+          </a:p>
+          <a:p>
+            <a:r>
+              <a:t>ORIGINAL TEACHING SCRIPT</a:t>
+            </a:r>
+          </a:p>
+          <a:p>
+            <a:r>
+              <a:t>Into the workbook. First, ten seconds of tidying: those two TOTAL rows and the blank row from yesterday, I am deleting them by hand, and notice that it is manual and annoying, because tomorrow we automate exactly this. Now I click anywhere in the data and press Control T. Excel finds the edges, I confirm my data has headers, and we have a table. Here is the step almost everyone skips: go to Table Design and name it. Table1 means nothing. I am typing SalesData. Now watch what that name buys us. In a spare cell I type equals SUM, open paren, and click the Amount column header. The formula writes itself: sum of SalesData Amount. Read that out loud. It documents itself. No dollar signs, no H2 colon H58, no archaeology six months from now.</a:t>
             </a:r>
           </a:p>
         </p:txBody>
@@ -662,10 +591,17 @@
             <a:spLocks noGrp="1"/>
           </p:cNvSpPr>
           <p:nvPr>
-            <p:ph type="sldNum" idx="5" sz="quarter"/>
+            <p:ph type="sldNum" idx="5"/>
           </p:nvPr>
         </p:nvSpPr>
         <p:spPr/>
+        <p:txBody>
+          <a:bodyPr/>
+          <a:lstStyle/>
+          <a:p>
+            <a:endParaRPr/>
+          </a:p>
+        </p:txBody>
       </p:sp>
     </p:spTree>
   </p:cSld>
@@ -676,7 +612,7 @@
 </file>
 
 <file path=ppt/notesSlides/notesSlide4.xml><?xml version="1.0" encoding="utf-8"?>
-<p:notes xmlns:a="http://schemas.openxmlformats.org/drawingml/2006/main" xmlns:p="http://schemas.openxmlformats.org/presentationml/2006/main" xmlns:r="http://schemas.openxmlformats.org/officeDocument/2006/relationships">
+<p:notes xmlns:a="http://schemas.openxmlformats.org/drawingml/2006/main" xmlns:r="http://schemas.openxmlformats.org/officeDocument/2006/relationships" xmlns:p="http://schemas.openxmlformats.org/presentationml/2006/main">
   <p:cSld>
     <p:spTree>
       <p:nvGrpSpPr>
@@ -696,10 +632,10 @@
         <p:nvSpPr>
           <p:cNvPr id="2" name="Slide Image Placeholder 1"/>
           <p:cNvSpPr>
-            <a:spLocks noGrp="1"/>
-          </p:cNvSpPr>
-          <p:nvPr>
-            <p:ph type="sldImg" idx="2"/>
+            <a:spLocks noGrp="1" noRot="1" noChangeAspect="1"/>
+          </p:cNvSpPr>
+          <p:nvPr>
+            <p:ph type="sldImg"/>
           </p:nvPr>
         </p:nvSpPr>
         <p:spPr/>
@@ -711,7 +647,7 @@
             <a:spLocks noGrp="1"/>
           </p:cNvSpPr>
           <p:nvPr>
-            <p:ph type="body" idx="3" sz="quarter"/>
+            <p:ph type="body" idx="1"/>
           </p:nvPr>
         </p:nvSpPr>
         <p:spPr/>
@@ -720,7 +656,7 @@
           <a:lstStyle/>
           <a:p>
             <a:r>
-              <a:t>Before I demo it, here is what pressing Control T actually buys you, because it is more than formatting stripes. First, named columns: the machine can point at Amount instead of guessing that column H probably means money. Second, a defined boundary with one data type per column, which is exactly the shape every model expects data to arrive in. Third, structured references: sum of SalesData Amount reads like a sentence, and formulas that read like sentences are formulas AI tools and new teammates can interpret. Fourth, tables grow. Paste new rows at the bottom and every formula, pivot, and AI answer that points at the table picks them up. Two-part demo: convert and name, then rerun Monday's question and compare.</a:t>
+              <a:t>Today's guerrilla hook. Tables sound like the least exciting feature in Excel, so here is the reframe: named tables give tools clear column names and data boundaries. That is true of Analyze Data, which you saw yesterday, and it is just as true of Copilot and of the Python we will run on Thursday. A table gives the machine named columns, a defined boundary, and one data type per field. On top of that, structured references make your formulas read like sentences, so a colleague, or an AI asked to audit your workbook, can tell what a formula means without decoding cell addresses. Here is the guerrilla part: while other teams wait for licenses to arrive, the analyst who makes data machine-readable today gets the payoff from every tool the moment it lands. The AI-ready workbook is a craft skill, not a purchase.</a:t>
             </a:r>
           </a:p>
         </p:txBody>
@@ -732,10 +668,17 @@
             <a:spLocks noGrp="1"/>
           </p:cNvSpPr>
           <p:nvPr>
-            <p:ph type="sldNum" idx="5" sz="quarter"/>
+            <p:ph type="sldNum" idx="5"/>
           </p:nvPr>
         </p:nvSpPr>
         <p:spPr/>
+        <p:txBody>
+          <a:bodyPr/>
+          <a:lstStyle/>
+          <a:p>
+            <a:endParaRPr/>
+          </a:p>
+        </p:txBody>
       </p:sp>
     </p:spTree>
   </p:cSld>
@@ -746,7 +689,7 @@
 </file>
 
 <file path=ppt/notesSlides/notesSlide5.xml><?xml version="1.0" encoding="utf-8"?>
-<p:notes xmlns:a="http://schemas.openxmlformats.org/drawingml/2006/main" xmlns:p="http://schemas.openxmlformats.org/presentationml/2006/main" xmlns:r="http://schemas.openxmlformats.org/officeDocument/2006/relationships">
+<p:notes xmlns:a="http://schemas.openxmlformats.org/drawingml/2006/main" xmlns:r="http://schemas.openxmlformats.org/officeDocument/2006/relationships" xmlns:p="http://schemas.openxmlformats.org/presentationml/2006/main">
   <p:cSld>
     <p:spTree>
       <p:nvGrpSpPr>
@@ -766,10 +709,10 @@
         <p:nvSpPr>
           <p:cNvPr id="2" name="Slide Image Placeholder 1"/>
           <p:cNvSpPr>
-            <a:spLocks noGrp="1"/>
-          </p:cNvSpPr>
-          <p:nvPr>
-            <p:ph type="sldImg" idx="2"/>
+            <a:spLocks noGrp="1" noRot="1" noChangeAspect="1"/>
+          </p:cNvSpPr>
+          <p:nvPr>
+            <p:ph type="sldImg"/>
           </p:nvPr>
         </p:nvSpPr>
         <p:spPr/>
@@ -781,7 +724,7 @@
             <a:spLocks noGrp="1"/>
           </p:cNvSpPr>
           <p:nvPr>
-            <p:ph type="body" idx="3" sz="quarter"/>
+            <p:ph type="body" idx="1"/>
           </p:nvPr>
         </p:nvSpPr>
         <p:spPr/>
@@ -790,7 +733,53 @@
           <a:lstStyle/>
           <a:p>
             <a:r>
-              <a:t>Into the workbook. First, ten seconds of tidying: those two TOTAL rows and the blank row from yesterday, I am deleting them by hand, and notice that it is manual and annoying, because tomorrow we automate exactly this. Now I click anywhere in the data and press Control T. Excel finds the edges, I confirm my data has headers, and we have a table. Here is the step almost everyone skips: go to Table Design and name it. Table1 means nothing. I am typing SalesData. Now watch what that name buys us. In a spare cell I type equals SUM, open paren, and click the Amount column header. The formula writes itself: sum of SalesData Amount. Read that out loud. It documents itself. No dollar signs, no H2 colon H58, no archaeology six months from now.</a:t>
+              <a:t>CHAT CUE (about 11:00; budget 15 seconds total)</a:t>
+            </a:r>
+          </a:p>
+          <a:p>
+            <a:r>
+              <a:t>SAY: We made a table. Did that fix the region typos, YES or NO? You can read the labels on my screen.</a:t>
+            </a:r>
+          </a:p>
+          <a:p>
+            <a:r>
+              <a:t>PAUSE: Wait silently for 8 seconds. Do not repeat the request.</a:t>
+            </a:r>
+          </a:p>
+          <a:p>
+            <a:r>
+              <a:t>IF SOMEONE REPLIES: NO. Ctrl+T adds table structure, not data cleanup. Point to a remaining inconsistent Region label. Tomorrow's Power Query steps address that.</a:t>
+            </a:r>
+          </a:p>
+          <a:p>
+            <a:r>
+              <a:t>IF CHAT IS QUIET: Say, "The answer is NO. The table still contains the labels we put into it." Then continue. Never imply that somebody replied.</a:t>
+            </a:r>
+          </a:p>
+          <a:p>
+            <a:r>
+              <a:t>FACILITATION: Acknowledge at most two actual replies, without calling on anyone by name. Accept a letter, a word, or a longer question. If a reply arrives later, acknowledge it at the next natural pause.</a:t>
+            </a:r>
+          </a:p>
+          <a:p>
+            <a:endParaRPr/>
+          </a:p>
+          <a:p>
+            <a:r>
+              <a:t>Use this cue at the indicated demo pause. Keep the Excel window visible when the prompt refers to its result.</a:t>
+            </a:r>
+          </a:p>
+          <a:p>
+            <a:endParaRPr/>
+          </a:p>
+          <a:p>
+            <a:r>
+              <a:t>ORIGINAL TEACHING SCRIPT</a:t>
+            </a:r>
+          </a:p>
+          <a:p>
+            <a:r>
+              <a:t>Part two, and this is the before-and-after that makes the whole day. Click inside SalesData, Home tab, Analyze Data, and I ask the exact question from Monday: total Amount by Region. Compare. No junk rows polluting the totals, because the TOTAL rows are gone. The suggestions reference SalesData and its column names instead of vague ranges. The pane is faster to useful answers because it is no longer guessing where the data starts and stops. The region typos are still there, we fix those tomorrow, but the structural confusion is gone. Same tool, same twenty seconds of effort, dramatically better output. That is what machine-readable buys, and it cost you one keyboard shortcut and a name.</a:t>
             </a:r>
           </a:p>
         </p:txBody>
@@ -802,10 +791,17 @@
             <a:spLocks noGrp="1"/>
           </p:cNvSpPr>
           <p:nvPr>
-            <p:ph type="sldNum" idx="5" sz="quarter"/>
+            <p:ph type="sldNum" idx="5"/>
           </p:nvPr>
         </p:nvSpPr>
         <p:spPr/>
+        <p:txBody>
+          <a:bodyPr/>
+          <a:lstStyle/>
+          <a:p>
+            <a:endParaRPr/>
+          </a:p>
+        </p:txBody>
       </p:sp>
     </p:spTree>
   </p:cSld>
@@ -816,7 +812,7 @@
 </file>
 
 <file path=ppt/notesSlides/notesSlide6.xml><?xml version="1.0" encoding="utf-8"?>
-<p:notes xmlns:a="http://schemas.openxmlformats.org/drawingml/2006/main" xmlns:p="http://schemas.openxmlformats.org/presentationml/2006/main" xmlns:r="http://schemas.openxmlformats.org/officeDocument/2006/relationships">
+<p:notes xmlns:a="http://schemas.openxmlformats.org/drawingml/2006/main" xmlns:r="http://schemas.openxmlformats.org/officeDocument/2006/relationships" xmlns:p="http://schemas.openxmlformats.org/presentationml/2006/main">
   <p:cSld>
     <p:spTree>
       <p:nvGrpSpPr>
@@ -836,10 +832,10 @@
         <p:nvSpPr>
           <p:cNvPr id="2" name="Slide Image Placeholder 1"/>
           <p:cNvSpPr>
-            <a:spLocks noGrp="1"/>
-          </p:cNvSpPr>
-          <p:nvPr>
-            <p:ph type="sldImg" idx="2"/>
+            <a:spLocks noGrp="1" noRot="1" noChangeAspect="1"/>
+          </p:cNvSpPr>
+          <p:nvPr>
+            <p:ph type="sldImg"/>
           </p:nvPr>
         </p:nvSpPr>
         <p:spPr/>
@@ -851,7 +847,7 @@
             <a:spLocks noGrp="1"/>
           </p:cNvSpPr>
           <p:nvPr>
-            <p:ph type="body" idx="3" sz="quarter"/>
+            <p:ph type="body" idx="1"/>
           </p:nvPr>
         </p:nvSpPr>
         <p:spPr/>
@@ -860,7 +856,54 @@
           <a:lstStyle/>
           <a:p>
             <a:r>
-              <a:t>Part two, and this is the before-and-after that makes the whole day. Click inside SalesData, Home tab, Analyze Data, and I ask the exact question from Monday: total Amount by Region. Compare. No junk rows polluting the totals, because the TOTAL rows are gone. The suggestions reference SalesData and its column names instead of vague ranges. The pane is faster to useful answers because it is no longer guessing where the data starts and stops. The region typos are still there, we fix those tomorrow, but the structural confusion is gone. Same tool, same twenty seconds of effort, dramatically better output. That is what machine-readable buys, and it cost you one keyboard shortcut and a name.</a:t>
+              <a:t>CHAT CUE (about 16:30; budget 15 seconds total)</a:t>
+            </a:r>
+          </a:p>
+          <a:p>
+            <a:r>
+              <a:t>SAY: For your own workbook, which table name would fit: SALES, EXPENSES, or OTHER? One word is enough.</a:t>
+            </a:r>
+          </a:p>
+          <a:p>
+            <a:r>
+              <a:t>PAUSE: Wait silently for 8 seconds. Do not repeat the request.</a:t>
+            </a:r>
+          </a:p>
+          <a:p>
+            <a:r>
+              <a:t>IF SOMEONE REPLIES: Acknowledge an actual choice. Give the main range a table name that describes its contents. This is the one desk action to prioritize.</a:t>
+            </a:r>
+          </a:p>
+          <a:p>
+            <a:r>
+              <a:t>IF CHAT IS QUIET: Say, "I'll use SalesData for this example. You can choose a name from your own work." Then continue. Never imply that somebody replied.</a:t>
+            </a:r>
+          </a:p>
+          <a:p>
+            <a:r>
+              <a:t>FACILITATION: Acknowledge at most two actual replies, without calling on anyone by name. Accept a letter, a word, or a longer question. If a reply arrives later, acknowledge it at the next natural pause.</a:t>
+            </a:r>
+          </a:p>
+          <a:p>
+            <a:endParaRPr/>
+          </a:p>
+          <a:p>
+            <a:r>
+              <a:t>Use this cue before reading the remaining notes.</a:t>
+            </a:r>
+          </a:p>
+          <a:p>
+            <a:endParaRPr/>
+          </a:p>
+          <a:p>
+            <a:r>
+              <a:t>TEACHING SCRIPT
+Pick one small next action. You do not need to complete every option. Pick one range you use often. Remove subtotal rows and blanks. Press Ctrl+T, confirm headers, and give the table a useful name. Optional: try =SUM(YourTable[Amount]) with your own table and column names.</a:t>
+            </a:r>
+          </a:p>
+          <a:p>
+            <a:r>
+              <a:t>Desk actions, three again. One: open the workbook you live in and press Control T on its main range, then give the table a real name, not Table1. Two: take one fragile formula, the kind with dollar signs and mystery ranges, rewrite it with structured references, and read it out loud. If it reads like a sentence, you did it right. Three: rerun the Analyze Data question you tried Monday and compare the answers side by side. That comparison is the proof you can show a skeptical coworker.</a:t>
             </a:r>
           </a:p>
         </p:txBody>
@@ -872,10 +915,17 @@
             <a:spLocks noGrp="1"/>
           </p:cNvSpPr>
           <p:nvPr>
-            <p:ph type="sldNum" idx="5" sz="quarter"/>
+            <p:ph type="sldNum" idx="5"/>
           </p:nvPr>
         </p:nvSpPr>
         <p:spPr/>
+        <p:txBody>
+          <a:bodyPr/>
+          <a:lstStyle/>
+          <a:p>
+            <a:endParaRPr/>
+          </a:p>
+        </p:txBody>
       </p:sp>
     </p:spTree>
   </p:cSld>
@@ -886,7 +936,7 @@
 </file>
 
 <file path=ppt/notesSlides/notesSlide7.xml><?xml version="1.0" encoding="utf-8"?>
-<p:notes xmlns:a="http://schemas.openxmlformats.org/drawingml/2006/main" xmlns:p="http://schemas.openxmlformats.org/presentationml/2006/main" xmlns:r="http://schemas.openxmlformats.org/officeDocument/2006/relationships">
+<p:notes xmlns:a="http://schemas.openxmlformats.org/drawingml/2006/main" xmlns:r="http://schemas.openxmlformats.org/officeDocument/2006/relationships" xmlns:p="http://schemas.openxmlformats.org/presentationml/2006/main">
   <p:cSld>
     <p:spTree>
       <p:nvGrpSpPr>
@@ -906,10 +956,10 @@
         <p:nvSpPr>
           <p:cNvPr id="2" name="Slide Image Placeholder 1"/>
           <p:cNvSpPr>
-            <a:spLocks noGrp="1"/>
-          </p:cNvSpPr>
-          <p:nvPr>
-            <p:ph type="sldImg" idx="2"/>
+            <a:spLocks noGrp="1" noRot="1" noChangeAspect="1"/>
+          </p:cNvSpPr>
+          <p:nvPr>
+            <p:ph type="sldImg"/>
           </p:nvPr>
         </p:nvSpPr>
         <p:spPr/>
@@ -921,7 +971,7 @@
             <a:spLocks noGrp="1"/>
           </p:cNvSpPr>
           <p:nvPr>
-            <p:ph type="body" idx="3" sz="quarter"/>
+            <p:ph type="body" idx="1"/>
           </p:nvPr>
         </p:nvSpPr>
         <p:spPr/>
@@ -930,7 +980,7 @@
           <a:lstStyle/>
           <a:p>
             <a:r>
-              <a:t>Desk actions, three again. One: open the workbook you live in and press Control T on its main range, then give the table a real name, not Table1. Two: take one fragile formula, the kind with dollar signs and mystery ranges, rewrite it with structured references, and read it out loud. If it reads like a sentence, you did it right. Three: rerun the Analyze Data question you tried Monday and compare the answers side by side. That comparison is the proof you can show a skeptical coworker.</a:t>
+              <a:t>Tomorrow is the day the region-label problem dies. Power Query records a cleanup once and replays it forever, which is the automated data prep people assume requires AI, delivered with zero AI. We will check the refreshed result on screen. Noon Eastern, twenty minutes, bring the export you hate cleaning.</a:t>
             </a:r>
           </a:p>
         </p:txBody>
@@ -942,10 +992,17 @@
             <a:spLocks noGrp="1"/>
           </p:cNvSpPr>
           <p:nvPr>
-            <p:ph type="sldNum" idx="5" sz="quarter"/>
+            <p:ph type="sldNum" idx="5"/>
           </p:nvPr>
         </p:nvSpPr>
         <p:spPr/>
+        <p:txBody>
+          <a:bodyPr/>
+          <a:lstStyle/>
+          <a:p>
+            <a:endParaRPr/>
+          </a:p>
+        </p:txBody>
       </p:sp>
     </p:spTree>
   </p:cSld>
@@ -956,7 +1013,7 @@
 </file>
 
 <file path=ppt/notesSlides/notesSlide8.xml><?xml version="1.0" encoding="utf-8"?>
-<p:notes xmlns:a="http://schemas.openxmlformats.org/drawingml/2006/main" xmlns:p="http://schemas.openxmlformats.org/presentationml/2006/main" xmlns:r="http://schemas.openxmlformats.org/officeDocument/2006/relationships">
+<p:notes xmlns:a="http://schemas.openxmlformats.org/drawingml/2006/main" xmlns:r="http://schemas.openxmlformats.org/officeDocument/2006/relationships" xmlns:p="http://schemas.openxmlformats.org/presentationml/2006/main">
   <p:cSld>
     <p:spTree>
       <p:nvGrpSpPr>
@@ -976,10 +1033,10 @@
         <p:nvSpPr>
           <p:cNvPr id="2" name="Slide Image Placeholder 1"/>
           <p:cNvSpPr>
-            <a:spLocks noGrp="1"/>
-          </p:cNvSpPr>
-          <p:nvPr>
-            <p:ph type="sldImg" idx="2"/>
+            <a:spLocks noGrp="1" noRot="1" noChangeAspect="1"/>
+          </p:cNvSpPr>
+          <p:nvPr>
+            <p:ph type="sldImg"/>
           </p:nvPr>
         </p:nvSpPr>
         <p:spPr/>
@@ -991,7 +1048,7 @@
             <a:spLocks noGrp="1"/>
           </p:cNvSpPr>
           <p:nvPr>
-            <p:ph type="body" idx="3" sz="quarter"/>
+            <p:ph type="body" idx="1"/>
           </p:nvPr>
         </p:nvSpPr>
         <p:spPr/>
@@ -1000,7 +1057,53 @@
           <a:lstStyle/>
           <a:p>
             <a:r>
-              <a:t>Tomorrow is the day the seven-region lie dies. Power Query records a cleanup once and replays it forever, which is the automated data prep people assume requires AI, delivered with zero AI. It is the applause-line demo of the week. Noon Eastern, twenty minutes, bring the export you hate cleaning.</a:t>
+              <a:t>CHAT CUE (about 18:30; budget 15 seconds total)</a:t>
+            </a:r>
+          </a:p>
+          <a:p>
+            <a:r>
+              <a:t>SAY: Type CREATE, NAME, or FORMULA if you would like that step again. You do not need to write a whole question.</a:t>
+            </a:r>
+          </a:p>
+          <a:p>
+            <a:r>
+              <a:t>PAUSE: Wait silently for 8 seconds. Do not repeat the request.</a:t>
+            </a:r>
+          </a:p>
+          <a:p>
+            <a:r>
+              <a:t>IF SOMEONE REPLIES: Answer one actual request. CREATE: select the range and press Ctrl+T. NAME: Table Design, Table Name. FORMULA: =SUM(SalesData[Amount]).</a:t>
+            </a:r>
+          </a:p>
+          <a:p>
+            <a:r>
+              <a:t>IF CHAT IS QUIET: Say, "The step I would double-check is the name: look in Table Design before writing the formula." Then continue. Never imply that somebody replied.</a:t>
+            </a:r>
+          </a:p>
+          <a:p>
+            <a:r>
+              <a:t>FACILITATION: Acknowledge at most two actual replies, without calling on anyone by name. Accept a letter, a word, or a longer question. If a reply arrives later, acknowledge it at the next natural pause.</a:t>
+            </a:r>
+          </a:p>
+          <a:p>
+            <a:endParaRPr/>
+          </a:p>
+          <a:p>
+            <a:r>
+              <a:t>Use this cue before reading the remaining notes.</a:t>
+            </a:r>
+          </a:p>
+          <a:p>
+            <a:endParaRPr/>
+          </a:p>
+          <a:p>
+            <a:r>
+              <a:t>ORIGINAL TEACHING SCRIPT</a:t>
+            </a:r>
+          </a:p>
+          <a:p>
+            <a:r>
+              <a:t>That is day 2. Recap: Control T plus a real name makes data machine-readable, structured references make formulas self-documenting, and every AI tool this week gets sharper because of it. Replay is in the membership vault.  Thanks, everyone. Tomorrow we try the Refresh button.</a:t>
             </a:r>
           </a:p>
         </p:txBody>
@@ -1012,80 +1115,17 @@
             <a:spLocks noGrp="1"/>
           </p:cNvSpPr>
           <p:nvPr>
-            <p:ph type="sldNum" idx="5" sz="quarter"/>
+            <p:ph type="sldNum" idx="5"/>
           </p:nvPr>
         </p:nvSpPr>
         <p:spPr/>
-      </p:sp>
-    </p:spTree>
-  </p:cSld>
-  <p:clrMapOvr>
-    <a:masterClrMapping/>
-  </p:clrMapOvr>
-</p:notes>
-</file>
-
-<file path=ppt/notesSlides/notesSlide9.xml><?xml version="1.0" encoding="utf-8"?>
-<p:notes xmlns:a="http://schemas.openxmlformats.org/drawingml/2006/main" xmlns:p="http://schemas.openxmlformats.org/presentationml/2006/main" xmlns:r="http://schemas.openxmlformats.org/officeDocument/2006/relationships">
-  <p:cSld>
-    <p:spTree>
-      <p:nvGrpSpPr>
-        <p:cNvPr id="1" name=""/>
-        <p:cNvGrpSpPr/>
-        <p:nvPr/>
-      </p:nvGrpSpPr>
-      <p:grpSpPr>
-        <a:xfrm>
-          <a:off x="0" y="0"/>
-          <a:ext cx="0" cy="0"/>
-          <a:chOff x="0" y="0"/>
-          <a:chExt cx="0" cy="0"/>
-        </a:xfrm>
-      </p:grpSpPr>
-      <p:sp>
-        <p:nvSpPr>
-          <p:cNvPr id="2" name="Slide Image Placeholder 1"/>
-          <p:cNvSpPr>
-            <a:spLocks noGrp="1"/>
-          </p:cNvSpPr>
-          <p:nvPr>
-            <p:ph type="sldImg" idx="2"/>
-          </p:nvPr>
-        </p:nvSpPr>
-        <p:spPr/>
-      </p:sp>
-      <p:sp>
-        <p:nvSpPr>
-          <p:cNvPr id="3" name="Notes Placeholder 2"/>
-          <p:cNvSpPr>
-            <a:spLocks noGrp="1"/>
-          </p:cNvSpPr>
-          <p:nvPr>
-            <p:ph type="body" idx="3" sz="quarter"/>
-          </p:nvPr>
-        </p:nvSpPr>
-        <p:spPr/>
         <p:txBody>
           <a:bodyPr/>
           <a:lstStyle/>
           <a:p>
-            <a:r>
-              <a:t>That is day 2. Recap: Control T plus a real name makes data machine-readable, structured references make formulas self-documenting, and every AI tool this week gets sharper because of it. Replay is in the membership vault. One question if time allows, otherwise chat or email. Thanks, everyone. Tomorrow the Refresh button gets a round of applause.</a:t>
-            </a:r>
-          </a:p>
-        </p:txBody>
-      </p:sp>
-      <p:sp>
-        <p:nvSpPr>
-          <p:cNvPr id="4" name="Slide Number Placeholder 3"/>
-          <p:cNvSpPr>
-            <a:spLocks noGrp="1"/>
-          </p:cNvSpPr>
-          <p:nvPr>
-            <p:ph type="sldNum" idx="5" sz="quarter"/>
-          </p:nvPr>
-        </p:nvSpPr>
-        <p:spPr/>
+            <a:endParaRPr/>
+          </a:p>
+        </p:txBody>
       </p:sp>
     </p:spTree>
   </p:cSld>
@@ -1114,7 +1154,13 @@
       </p:grpSpPr>
       <p:sp>
         <p:nvSpPr>
-          <p:cNvPr id="2" name="Title 1"/>
+          <p:cNvPr id="2" name="Title 1">
+            <a:extLst>
+              <a:ext uri="{FF2B5EF4-FFF2-40B4-BE49-F238E27FC236}">
+                <a16:creationId xmlns:a16="http://schemas.microsoft.com/office/drawing/2014/main" id="{4B0B1F72-14BB-4C72-BB2C-073E4809A305}"/>
+              </a:ext>
+            </a:extLst>
+          </p:cNvPr>
           <p:cNvSpPr>
             <a:spLocks noGrp="1"/>
           </p:cNvSpPr>
@@ -1133,16 +1179,20 @@
           <a:lstStyle/>
           <a:p>
             <a:r>
-              <a:rPr lang="en-US" smtClean="0"/>
               <a:t>Click to edit Master title style</a:t>
             </a:r>
-            <a:endParaRPr lang="en-US"/>
-          </a:p>
-        </p:txBody>
-      </p:sp>
-      <p:sp>
-        <p:nvSpPr>
-          <p:cNvPr id="3" name="Subtitle 2"/>
+          </a:p>
+        </p:txBody>
+      </p:sp>
+      <p:sp>
+        <p:nvSpPr>
+          <p:cNvPr id="3" name="Subtitle 2">
+            <a:extLst>
+              <a:ext uri="{FF2B5EF4-FFF2-40B4-BE49-F238E27FC236}">
+                <a16:creationId xmlns:a16="http://schemas.microsoft.com/office/drawing/2014/main" id="{324C1883-09B3-40E2-A456-77FA7C569222}"/>
+              </a:ext>
+            </a:extLst>
+          </p:cNvPr>
           <p:cNvSpPr>
             <a:spLocks noGrp="1"/>
           </p:cNvSpPr>
@@ -1252,21 +1302,25 @@
           </a:lstStyle>
           <a:p>
             <a:r>
-              <a:rPr lang="en-US" smtClean="0"/>
               <a:t>Click to edit Master subtitle style</a:t>
             </a:r>
-            <a:endParaRPr lang="en-US"/>
-          </a:p>
-        </p:txBody>
-      </p:sp>
-      <p:sp>
-        <p:nvSpPr>
-          <p:cNvPr id="4" name="Date Placeholder 3"/>
-          <p:cNvSpPr>
-            <a:spLocks noGrp="1"/>
-          </p:cNvSpPr>
-          <p:nvPr>
-            <p:ph type="dt" sz="half" idx="10"/>
+          </a:p>
+        </p:txBody>
+      </p:sp>
+      <p:sp>
+        <p:nvSpPr>
+          <p:cNvPr id="4" name="Date Placeholder 3">
+            <a:extLst>
+              <a:ext uri="{FF2B5EF4-FFF2-40B4-BE49-F238E27FC236}">
+                <a16:creationId xmlns:a16="http://schemas.microsoft.com/office/drawing/2014/main" id="{5E7D60AD-AACB-4881-AFED-C2D6BAE888E4}"/>
+              </a:ext>
+            </a:extLst>
+          </p:cNvPr>
+          <p:cNvSpPr>
+            <a:spLocks noGrp="1"/>
+          </p:cNvSpPr>
+          <p:nvPr>
+            <p:ph type="dt" idx="10"/>
           </p:nvPr>
         </p:nvSpPr>
         <p:spPr/>
@@ -1275,21 +1329,26 @@
           <a:lstStyle/>
           <a:p>
             <a:fld id="{5BCAD085-E8A6-8845-BD4E-CB4CCA059FC4}" type="datetimeFigureOut">
-              <a:rPr lang="en-US" smtClean="0"/>
-              <a:t>1/27/13</a:t>
+              <a:t>9/27/2026</a:t>
             </a:fld>
-            <a:endParaRPr lang="en-US"/>
-          </a:p>
-        </p:txBody>
-      </p:sp>
-      <p:sp>
-        <p:nvSpPr>
-          <p:cNvPr id="5" name="Footer Placeholder 4"/>
-          <p:cNvSpPr>
-            <a:spLocks noGrp="1"/>
-          </p:cNvSpPr>
-          <p:nvPr>
-            <p:ph type="ftr" sz="quarter" idx="11"/>
+            <a:endParaRPr/>
+          </a:p>
+        </p:txBody>
+      </p:sp>
+      <p:sp>
+        <p:nvSpPr>
+          <p:cNvPr id="5" name="Footer Placeholder 4">
+            <a:extLst>
+              <a:ext uri="{FF2B5EF4-FFF2-40B4-BE49-F238E27FC236}">
+                <a16:creationId xmlns:a16="http://schemas.microsoft.com/office/drawing/2014/main" id="{81C8CE50-6BF9-4EBC-8031-1B58DF5A7A84}"/>
+              </a:ext>
+            </a:extLst>
+          </p:cNvPr>
+          <p:cNvSpPr>
+            <a:spLocks noGrp="1"/>
+          </p:cNvSpPr>
+          <p:nvPr>
+            <p:ph type="ftr" idx="11"/>
           </p:nvPr>
         </p:nvSpPr>
         <p:spPr/>
@@ -1297,18 +1356,24 @@
           <a:bodyPr/>
           <a:lstStyle/>
           <a:p>
-            <a:endParaRPr lang="en-US"/>
-          </a:p>
-        </p:txBody>
-      </p:sp>
-      <p:sp>
-        <p:nvSpPr>
-          <p:cNvPr id="6" name="Slide Number Placeholder 5"/>
-          <p:cNvSpPr>
-            <a:spLocks noGrp="1"/>
-          </p:cNvSpPr>
-          <p:nvPr>
-            <p:ph type="sldNum" sz="quarter" idx="12"/>
+            <a:endParaRPr/>
+          </a:p>
+        </p:txBody>
+      </p:sp>
+      <p:sp>
+        <p:nvSpPr>
+          <p:cNvPr id="6" name="Slide Number Placeholder 5">
+            <a:extLst>
+              <a:ext uri="{FF2B5EF4-FFF2-40B4-BE49-F238E27FC236}">
+                <a16:creationId xmlns:a16="http://schemas.microsoft.com/office/drawing/2014/main" id="{316ED835-CD05-4847-BE00-327ABD2C8E86}"/>
+              </a:ext>
+            </a:extLst>
+          </p:cNvPr>
+          <p:cNvSpPr>
+            <a:spLocks noGrp="1"/>
+          </p:cNvSpPr>
+          <p:nvPr>
+            <p:ph type="sldNum" idx="12"/>
           </p:nvPr>
         </p:nvSpPr>
         <p:spPr/>
@@ -1317,19 +1382,13 @@
           <a:lstStyle/>
           <a:p>
             <a:fld id="{C1FF6DA9-008F-8B48-92A6-B652298478BF}" type="slidenum">
-              <a:rPr lang="en-US" smtClean="0"/>
               <a:t>‹#›</a:t>
             </a:fld>
-            <a:endParaRPr lang="en-US"/>
+            <a:endParaRPr/>
           </a:p>
         </p:txBody>
       </p:sp>
     </p:spTree>
-    <p:extLst>
-      <p:ext uri="{BB962C8B-B14F-4D97-AF65-F5344CB8AC3E}">
-        <p14:creationId xmlns:p14="http://schemas.microsoft.com/office/powerpoint/2010/main" val="3168075583"/>
-      </p:ext>
-    </p:extLst>
   </p:cSld>
   <p:clrMapOvr>
     <a:masterClrMapping/>
@@ -1356,7 +1415,13 @@
       </p:grpSpPr>
       <p:sp>
         <p:nvSpPr>
-          <p:cNvPr id="2" name="Title 1"/>
+          <p:cNvPr id="2" name="Title 1">
+            <a:extLst>
+              <a:ext uri="{FF2B5EF4-FFF2-40B4-BE49-F238E27FC236}">
+                <a16:creationId xmlns:a16="http://schemas.microsoft.com/office/drawing/2014/main" id="{DAE3BD48-BD78-472D-BDFF-73F30D941441}"/>
+              </a:ext>
+            </a:extLst>
+          </p:cNvPr>
           <p:cNvSpPr>
             <a:spLocks noGrp="1"/>
           </p:cNvSpPr>
@@ -1370,21 +1435,25 @@
           <a:lstStyle/>
           <a:p>
             <a:r>
-              <a:rPr lang="en-US" smtClean="0"/>
               <a:t>Click to edit Master title style</a:t>
             </a:r>
-            <a:endParaRPr lang="en-US"/>
-          </a:p>
-        </p:txBody>
-      </p:sp>
-      <p:sp>
-        <p:nvSpPr>
-          <p:cNvPr id="3" name="Vertical Text Placeholder 2"/>
-          <p:cNvSpPr>
-            <a:spLocks noGrp="1"/>
-          </p:cNvSpPr>
-          <p:nvPr>
-            <p:ph type="body" orient="vert" idx="1"/>
+          </a:p>
+        </p:txBody>
+      </p:sp>
+      <p:sp>
+        <p:nvSpPr>
+          <p:cNvPr id="3" name="Vertical Text Placeholder 2">
+            <a:extLst>
+              <a:ext uri="{FF2B5EF4-FFF2-40B4-BE49-F238E27FC236}">
+                <a16:creationId xmlns:a16="http://schemas.microsoft.com/office/drawing/2014/main" id="{635E93A0-4479-4B0F-8490-7474D02C0212}"/>
+              </a:ext>
+            </a:extLst>
+          </p:cNvPr>
+          <p:cNvSpPr>
+            <a:spLocks noGrp="1"/>
+          </p:cNvSpPr>
+          <p:nvPr>
+            <p:ph type="body" idx="1"/>
           </p:nvPr>
         </p:nvSpPr>
         <p:spPr/>
@@ -1392,51 +1461,61 @@
           <a:bodyPr vert="eaVert"/>
           <a:lstStyle/>
           <a:p>
-            <a:pPr lvl="0"/>
-            <a:r>
-              <a:rPr lang="en-US" smtClean="0"/>
+            <a:pPr lvl="0">
+              <a:buNone/>
+            </a:pPr>
+            <a:r>
               <a:t>Click to edit Master text styles</a:t>
             </a:r>
           </a:p>
           <a:p>
-            <a:pPr lvl="1"/>
-            <a:r>
-              <a:rPr lang="en-US" smtClean="0"/>
+            <a:pPr lvl="1">
+              <a:buNone/>
+            </a:pPr>
+            <a:r>
               <a:t>Second level</a:t>
             </a:r>
           </a:p>
           <a:p>
-            <a:pPr lvl="2"/>
-            <a:r>
-              <a:rPr lang="en-US" smtClean="0"/>
+            <a:pPr lvl="2">
+              <a:buNone/>
+            </a:pPr>
+            <a:r>
               <a:t>Third level</a:t>
             </a:r>
           </a:p>
           <a:p>
-            <a:pPr lvl="3"/>
-            <a:r>
-              <a:rPr lang="en-US" smtClean="0"/>
+            <a:pPr lvl="3">
+              <a:buNone/>
+            </a:pPr>
+            <a:r>
               <a:t>Fourth level</a:t>
             </a:r>
           </a:p>
           <a:p>
-            <a:pPr lvl="4"/>
-            <a:r>
-              <a:rPr lang="en-US" smtClean="0"/>
+            <a:pPr lvl="4">
+              <a:buNone/>
+            </a:pPr>
+            <a:r>
               <a:t>Fifth level</a:t>
             </a:r>
-            <a:endParaRPr lang="en-US"/>
-          </a:p>
-        </p:txBody>
-      </p:sp>
-      <p:sp>
-        <p:nvSpPr>
-          <p:cNvPr id="4" name="Date Placeholder 3"/>
-          <p:cNvSpPr>
-            <a:spLocks noGrp="1"/>
-          </p:cNvSpPr>
-          <p:nvPr>
-            <p:ph type="dt" sz="half" idx="10"/>
+          </a:p>
+        </p:txBody>
+      </p:sp>
+      <p:sp>
+        <p:nvSpPr>
+          <p:cNvPr id="4" name="Date Placeholder 3">
+            <a:extLst>
+              <a:ext uri="{FF2B5EF4-FFF2-40B4-BE49-F238E27FC236}">
+                <a16:creationId xmlns:a16="http://schemas.microsoft.com/office/drawing/2014/main" id="{351ACFA6-FD46-4E74-AE4D-EB4286114CBA}"/>
+              </a:ext>
+            </a:extLst>
+          </p:cNvPr>
+          <p:cNvSpPr>
+            <a:spLocks noGrp="1"/>
+          </p:cNvSpPr>
+          <p:nvPr>
+            <p:ph type="dt" idx="10"/>
           </p:nvPr>
         </p:nvSpPr>
         <p:spPr/>
@@ -1445,21 +1524,26 @@
           <a:lstStyle/>
           <a:p>
             <a:fld id="{5BCAD085-E8A6-8845-BD4E-CB4CCA059FC4}" type="datetimeFigureOut">
-              <a:rPr lang="en-US" smtClean="0"/>
-              <a:t>1/27/13</a:t>
+              <a:t>9/27/2026</a:t>
             </a:fld>
-            <a:endParaRPr lang="en-US"/>
-          </a:p>
-        </p:txBody>
-      </p:sp>
-      <p:sp>
-        <p:nvSpPr>
-          <p:cNvPr id="5" name="Footer Placeholder 4"/>
-          <p:cNvSpPr>
-            <a:spLocks noGrp="1"/>
-          </p:cNvSpPr>
-          <p:nvPr>
-            <p:ph type="ftr" sz="quarter" idx="11"/>
+            <a:endParaRPr/>
+          </a:p>
+        </p:txBody>
+      </p:sp>
+      <p:sp>
+        <p:nvSpPr>
+          <p:cNvPr id="5" name="Footer Placeholder 4">
+            <a:extLst>
+              <a:ext uri="{FF2B5EF4-FFF2-40B4-BE49-F238E27FC236}">
+                <a16:creationId xmlns:a16="http://schemas.microsoft.com/office/drawing/2014/main" id="{09F1F79B-4384-465B-9276-CA0B2226E54D}"/>
+              </a:ext>
+            </a:extLst>
+          </p:cNvPr>
+          <p:cNvSpPr>
+            <a:spLocks noGrp="1"/>
+          </p:cNvSpPr>
+          <p:nvPr>
+            <p:ph type="ftr" idx="11"/>
           </p:nvPr>
         </p:nvSpPr>
         <p:spPr/>
@@ -1467,18 +1551,24 @@
           <a:bodyPr/>
           <a:lstStyle/>
           <a:p>
-            <a:endParaRPr lang="en-US"/>
-          </a:p>
-        </p:txBody>
-      </p:sp>
-      <p:sp>
-        <p:nvSpPr>
-          <p:cNvPr id="6" name="Slide Number Placeholder 5"/>
-          <p:cNvSpPr>
-            <a:spLocks noGrp="1"/>
-          </p:cNvSpPr>
-          <p:nvPr>
-            <p:ph type="sldNum" sz="quarter" idx="12"/>
+            <a:endParaRPr/>
+          </a:p>
+        </p:txBody>
+      </p:sp>
+      <p:sp>
+        <p:nvSpPr>
+          <p:cNvPr id="6" name="Slide Number Placeholder 5">
+            <a:extLst>
+              <a:ext uri="{FF2B5EF4-FFF2-40B4-BE49-F238E27FC236}">
+                <a16:creationId xmlns:a16="http://schemas.microsoft.com/office/drawing/2014/main" id="{E3B88999-2413-42A5-8F14-9E4684DFF8F9}"/>
+              </a:ext>
+            </a:extLst>
+          </p:cNvPr>
+          <p:cNvSpPr>
+            <a:spLocks noGrp="1"/>
+          </p:cNvSpPr>
+          <p:nvPr>
+            <p:ph type="sldNum" idx="12"/>
           </p:nvPr>
         </p:nvSpPr>
         <p:spPr/>
@@ -1487,19 +1577,13 @@
           <a:lstStyle/>
           <a:p>
             <a:fld id="{C1FF6DA9-008F-8B48-92A6-B652298478BF}" type="slidenum">
-              <a:rPr lang="en-US" smtClean="0"/>
               <a:t>‹#›</a:t>
             </a:fld>
-            <a:endParaRPr lang="en-US"/>
+            <a:endParaRPr/>
           </a:p>
         </p:txBody>
       </p:sp>
     </p:spTree>
-    <p:extLst>
-      <p:ext uri="{BB962C8B-B14F-4D97-AF65-F5344CB8AC3E}">
-        <p14:creationId xmlns:p14="http://schemas.microsoft.com/office/powerpoint/2010/main" val="2910927964"/>
-      </p:ext>
-    </p:extLst>
   </p:cSld>
   <p:clrMapOvr>
     <a:masterClrMapping/>
@@ -1526,12 +1610,18 @@
       </p:grpSpPr>
       <p:sp>
         <p:nvSpPr>
-          <p:cNvPr id="2" name="Vertical Title 1"/>
-          <p:cNvSpPr>
-            <a:spLocks noGrp="1"/>
-          </p:cNvSpPr>
-          <p:nvPr>
-            <p:ph type="title" orient="vert"/>
+          <p:cNvPr id="2" name="Vertical Title 1">
+            <a:extLst>
+              <a:ext uri="{FF2B5EF4-FFF2-40B4-BE49-F238E27FC236}">
+                <a16:creationId xmlns:a16="http://schemas.microsoft.com/office/drawing/2014/main" id="{35F896AD-439E-40E6-9C6B-E5B801873397}"/>
+              </a:ext>
+            </a:extLst>
+          </p:cNvPr>
+          <p:cNvSpPr>
+            <a:spLocks noGrp="1"/>
+          </p:cNvSpPr>
+          <p:nvPr>
+            <p:ph type="title"/>
           </p:nvPr>
         </p:nvSpPr>
         <p:spPr>
@@ -1545,21 +1635,25 @@
           <a:lstStyle/>
           <a:p>
             <a:r>
-              <a:rPr lang="en-US" smtClean="0"/>
               <a:t>Click to edit Master title style</a:t>
             </a:r>
-            <a:endParaRPr lang="en-US"/>
-          </a:p>
-        </p:txBody>
-      </p:sp>
-      <p:sp>
-        <p:nvSpPr>
-          <p:cNvPr id="3" name="Vertical Text Placeholder 2"/>
-          <p:cNvSpPr>
-            <a:spLocks noGrp="1"/>
-          </p:cNvSpPr>
-          <p:nvPr>
-            <p:ph type="body" orient="vert" idx="1"/>
+          </a:p>
+        </p:txBody>
+      </p:sp>
+      <p:sp>
+        <p:nvSpPr>
+          <p:cNvPr id="3" name="Vertical Text Placeholder 2">
+            <a:extLst>
+              <a:ext uri="{FF2B5EF4-FFF2-40B4-BE49-F238E27FC236}">
+                <a16:creationId xmlns:a16="http://schemas.microsoft.com/office/drawing/2014/main" id="{0C82AC73-F837-4892-86F2-68CF39360947}"/>
+              </a:ext>
+            </a:extLst>
+          </p:cNvPr>
+          <p:cNvSpPr>
+            <a:spLocks noGrp="1"/>
+          </p:cNvSpPr>
+          <p:nvPr>
+            <p:ph type="body" idx="1"/>
           </p:nvPr>
         </p:nvSpPr>
         <p:spPr>
@@ -1572,51 +1666,61 @@
           <a:bodyPr vert="eaVert"/>
           <a:lstStyle/>
           <a:p>
-            <a:pPr lvl="0"/>
-            <a:r>
-              <a:rPr lang="en-US" smtClean="0"/>
+            <a:pPr lvl="0">
+              <a:buNone/>
+            </a:pPr>
+            <a:r>
               <a:t>Click to edit Master text styles</a:t>
             </a:r>
           </a:p>
           <a:p>
-            <a:pPr lvl="1"/>
-            <a:r>
-              <a:rPr lang="en-US" smtClean="0"/>
+            <a:pPr lvl="1">
+              <a:buNone/>
+            </a:pPr>
+            <a:r>
               <a:t>Second level</a:t>
             </a:r>
           </a:p>
           <a:p>
-            <a:pPr lvl="2"/>
-            <a:r>
-              <a:rPr lang="en-US" smtClean="0"/>
+            <a:pPr lvl="2">
+              <a:buNone/>
+            </a:pPr>
+            <a:r>
               <a:t>Third level</a:t>
             </a:r>
           </a:p>
           <a:p>
-            <a:pPr lvl="3"/>
-            <a:r>
-              <a:rPr lang="en-US" smtClean="0"/>
+            <a:pPr lvl="3">
+              <a:buNone/>
+            </a:pPr>
+            <a:r>
               <a:t>Fourth level</a:t>
             </a:r>
           </a:p>
           <a:p>
-            <a:pPr lvl="4"/>
-            <a:r>
-              <a:rPr lang="en-US" smtClean="0"/>
+            <a:pPr lvl="4">
+              <a:buNone/>
+            </a:pPr>
+            <a:r>
               <a:t>Fifth level</a:t>
             </a:r>
-            <a:endParaRPr lang="en-US"/>
-          </a:p>
-        </p:txBody>
-      </p:sp>
-      <p:sp>
-        <p:nvSpPr>
-          <p:cNvPr id="4" name="Date Placeholder 3"/>
-          <p:cNvSpPr>
-            <a:spLocks noGrp="1"/>
-          </p:cNvSpPr>
-          <p:nvPr>
-            <p:ph type="dt" sz="half" idx="10"/>
+          </a:p>
+        </p:txBody>
+      </p:sp>
+      <p:sp>
+        <p:nvSpPr>
+          <p:cNvPr id="4" name="Date Placeholder 3">
+            <a:extLst>
+              <a:ext uri="{FF2B5EF4-FFF2-40B4-BE49-F238E27FC236}">
+                <a16:creationId xmlns:a16="http://schemas.microsoft.com/office/drawing/2014/main" id="{7A69C3B7-B87D-4C29-A533-8ACFC3AB23EA}"/>
+              </a:ext>
+            </a:extLst>
+          </p:cNvPr>
+          <p:cNvSpPr>
+            <a:spLocks noGrp="1"/>
+          </p:cNvSpPr>
+          <p:nvPr>
+            <p:ph type="dt" idx="10"/>
           </p:nvPr>
         </p:nvSpPr>
         <p:spPr/>
@@ -1625,21 +1729,26 @@
           <a:lstStyle/>
           <a:p>
             <a:fld id="{5BCAD085-E8A6-8845-BD4E-CB4CCA059FC4}" type="datetimeFigureOut">
-              <a:rPr lang="en-US" smtClean="0"/>
-              <a:t>1/27/13</a:t>
+              <a:t>9/27/2026</a:t>
             </a:fld>
-            <a:endParaRPr lang="en-US"/>
-          </a:p>
-        </p:txBody>
-      </p:sp>
-      <p:sp>
-        <p:nvSpPr>
-          <p:cNvPr id="5" name="Footer Placeholder 4"/>
-          <p:cNvSpPr>
-            <a:spLocks noGrp="1"/>
-          </p:cNvSpPr>
-          <p:nvPr>
-            <p:ph type="ftr" sz="quarter" idx="11"/>
+            <a:endParaRPr/>
+          </a:p>
+        </p:txBody>
+      </p:sp>
+      <p:sp>
+        <p:nvSpPr>
+          <p:cNvPr id="5" name="Footer Placeholder 4">
+            <a:extLst>
+              <a:ext uri="{FF2B5EF4-FFF2-40B4-BE49-F238E27FC236}">
+                <a16:creationId xmlns:a16="http://schemas.microsoft.com/office/drawing/2014/main" id="{25031327-0BD0-4735-860D-806DCFD17BE3}"/>
+              </a:ext>
+            </a:extLst>
+          </p:cNvPr>
+          <p:cNvSpPr>
+            <a:spLocks noGrp="1"/>
+          </p:cNvSpPr>
+          <p:nvPr>
+            <p:ph type="ftr" idx="11"/>
           </p:nvPr>
         </p:nvSpPr>
         <p:spPr/>
@@ -1647,18 +1756,24 @@
           <a:bodyPr/>
           <a:lstStyle/>
           <a:p>
-            <a:endParaRPr lang="en-US"/>
-          </a:p>
-        </p:txBody>
-      </p:sp>
-      <p:sp>
-        <p:nvSpPr>
-          <p:cNvPr id="6" name="Slide Number Placeholder 5"/>
-          <p:cNvSpPr>
-            <a:spLocks noGrp="1"/>
-          </p:cNvSpPr>
-          <p:nvPr>
-            <p:ph type="sldNum" sz="quarter" idx="12"/>
+            <a:endParaRPr/>
+          </a:p>
+        </p:txBody>
+      </p:sp>
+      <p:sp>
+        <p:nvSpPr>
+          <p:cNvPr id="6" name="Slide Number Placeholder 5">
+            <a:extLst>
+              <a:ext uri="{FF2B5EF4-FFF2-40B4-BE49-F238E27FC236}">
+                <a16:creationId xmlns:a16="http://schemas.microsoft.com/office/drawing/2014/main" id="{029E7187-D74B-45B4-81F7-68DD59A1415F}"/>
+              </a:ext>
+            </a:extLst>
+          </p:cNvPr>
+          <p:cNvSpPr>
+            <a:spLocks noGrp="1"/>
+          </p:cNvSpPr>
+          <p:nvPr>
+            <p:ph type="sldNum" idx="12"/>
           </p:nvPr>
         </p:nvSpPr>
         <p:spPr/>
@@ -1667,19 +1782,13 @@
           <a:lstStyle/>
           <a:p>
             <a:fld id="{C1FF6DA9-008F-8B48-92A6-B652298478BF}" type="slidenum">
-              <a:rPr lang="en-US" smtClean="0"/>
               <a:t>‹#›</a:t>
             </a:fld>
-            <a:endParaRPr lang="en-US"/>
+            <a:endParaRPr/>
           </a:p>
         </p:txBody>
       </p:sp>
     </p:spTree>
-    <p:extLst>
-      <p:ext uri="{BB962C8B-B14F-4D97-AF65-F5344CB8AC3E}">
-        <p14:creationId xmlns:p14="http://schemas.microsoft.com/office/powerpoint/2010/main" val="3612223792"/>
-      </p:ext>
-    </p:extLst>
   </p:cSld>
   <p:clrMapOvr>
     <a:masterClrMapping/>
@@ -1706,7 +1815,13 @@
       </p:grpSpPr>
       <p:sp>
         <p:nvSpPr>
-          <p:cNvPr id="2" name="Title 1"/>
+          <p:cNvPr id="2" name="Title 1">
+            <a:extLst>
+              <a:ext uri="{FF2B5EF4-FFF2-40B4-BE49-F238E27FC236}">
+                <a16:creationId xmlns:a16="http://schemas.microsoft.com/office/drawing/2014/main" id="{72B44A95-B435-4305-AAD2-9BC99D43CFA3}"/>
+              </a:ext>
+            </a:extLst>
+          </p:cNvPr>
           <p:cNvSpPr>
             <a:spLocks noGrp="1"/>
           </p:cNvSpPr>
@@ -1720,16 +1835,20 @@
           <a:lstStyle/>
           <a:p>
             <a:r>
-              <a:rPr lang="en-US" smtClean="0"/>
               <a:t>Click to edit Master title style</a:t>
             </a:r>
-            <a:endParaRPr lang="en-US"/>
-          </a:p>
-        </p:txBody>
-      </p:sp>
-      <p:sp>
-        <p:nvSpPr>
-          <p:cNvPr id="3" name="Content Placeholder 2"/>
+          </a:p>
+        </p:txBody>
+      </p:sp>
+      <p:sp>
+        <p:nvSpPr>
+          <p:cNvPr id="3" name="Content Placeholder 2">
+            <a:extLst>
+              <a:ext uri="{FF2B5EF4-FFF2-40B4-BE49-F238E27FC236}">
+                <a16:creationId xmlns:a16="http://schemas.microsoft.com/office/drawing/2014/main" id="{DADB17A7-E1F5-42DD-A225-8C9CA3E619B6}"/>
+              </a:ext>
+            </a:extLst>
+          </p:cNvPr>
           <p:cNvSpPr>
             <a:spLocks noGrp="1"/>
           </p:cNvSpPr>
@@ -1742,51 +1861,61 @@
           <a:bodyPr/>
           <a:lstStyle/>
           <a:p>
-            <a:pPr lvl="0"/>
-            <a:r>
-              <a:rPr lang="en-US" smtClean="0"/>
+            <a:pPr lvl="0">
+              <a:buNone/>
+            </a:pPr>
+            <a:r>
               <a:t>Click to edit Master text styles</a:t>
             </a:r>
           </a:p>
           <a:p>
-            <a:pPr lvl="1"/>
-            <a:r>
-              <a:rPr lang="en-US" smtClean="0"/>
+            <a:pPr lvl="1">
+              <a:buNone/>
+            </a:pPr>
+            <a:r>
               <a:t>Second level</a:t>
             </a:r>
           </a:p>
           <a:p>
-            <a:pPr lvl="2"/>
-            <a:r>
-              <a:rPr lang="en-US" smtClean="0"/>
+            <a:pPr lvl="2">
+              <a:buNone/>
+            </a:pPr>
+            <a:r>
               <a:t>Third level</a:t>
             </a:r>
           </a:p>
           <a:p>
-            <a:pPr lvl="3"/>
-            <a:r>
-              <a:rPr lang="en-US" smtClean="0"/>
+            <a:pPr lvl="3">
+              <a:buNone/>
+            </a:pPr>
+            <a:r>
               <a:t>Fourth level</a:t>
             </a:r>
           </a:p>
           <a:p>
-            <a:pPr lvl="4"/>
-            <a:r>
-              <a:rPr lang="en-US" smtClean="0"/>
+            <a:pPr lvl="4">
+              <a:buNone/>
+            </a:pPr>
+            <a:r>
               <a:t>Fifth level</a:t>
             </a:r>
-            <a:endParaRPr lang="en-US"/>
-          </a:p>
-        </p:txBody>
-      </p:sp>
-      <p:sp>
-        <p:nvSpPr>
-          <p:cNvPr id="4" name="Date Placeholder 3"/>
-          <p:cNvSpPr>
-            <a:spLocks noGrp="1"/>
-          </p:cNvSpPr>
-          <p:nvPr>
-            <p:ph type="dt" sz="half" idx="10"/>
+          </a:p>
+        </p:txBody>
+      </p:sp>
+      <p:sp>
+        <p:nvSpPr>
+          <p:cNvPr id="4" name="Date Placeholder 3">
+            <a:extLst>
+              <a:ext uri="{FF2B5EF4-FFF2-40B4-BE49-F238E27FC236}">
+                <a16:creationId xmlns:a16="http://schemas.microsoft.com/office/drawing/2014/main" id="{EEA99CE0-E060-42B2-B5B5-2B3236E256F1}"/>
+              </a:ext>
+            </a:extLst>
+          </p:cNvPr>
+          <p:cNvSpPr>
+            <a:spLocks noGrp="1"/>
+          </p:cNvSpPr>
+          <p:nvPr>
+            <p:ph type="dt" idx="10"/>
           </p:nvPr>
         </p:nvSpPr>
         <p:spPr/>
@@ -1795,21 +1924,26 @@
           <a:lstStyle/>
           <a:p>
             <a:fld id="{5BCAD085-E8A6-8845-BD4E-CB4CCA059FC4}" type="datetimeFigureOut">
-              <a:rPr lang="en-US" smtClean="0"/>
-              <a:t>1/27/13</a:t>
+              <a:t>9/27/2026</a:t>
             </a:fld>
-            <a:endParaRPr lang="en-US"/>
-          </a:p>
-        </p:txBody>
-      </p:sp>
-      <p:sp>
-        <p:nvSpPr>
-          <p:cNvPr id="5" name="Footer Placeholder 4"/>
-          <p:cNvSpPr>
-            <a:spLocks noGrp="1"/>
-          </p:cNvSpPr>
-          <p:nvPr>
-            <p:ph type="ftr" sz="quarter" idx="11"/>
+            <a:endParaRPr/>
+          </a:p>
+        </p:txBody>
+      </p:sp>
+      <p:sp>
+        <p:nvSpPr>
+          <p:cNvPr id="5" name="Footer Placeholder 4">
+            <a:extLst>
+              <a:ext uri="{FF2B5EF4-FFF2-40B4-BE49-F238E27FC236}">
+                <a16:creationId xmlns:a16="http://schemas.microsoft.com/office/drawing/2014/main" id="{534A8D8F-543F-49FF-9843-EB6CEDF92BA2}"/>
+              </a:ext>
+            </a:extLst>
+          </p:cNvPr>
+          <p:cNvSpPr>
+            <a:spLocks noGrp="1"/>
+          </p:cNvSpPr>
+          <p:nvPr>
+            <p:ph type="ftr" idx="11"/>
           </p:nvPr>
         </p:nvSpPr>
         <p:spPr/>
@@ -1817,18 +1951,24 @@
           <a:bodyPr/>
           <a:lstStyle/>
           <a:p>
-            <a:endParaRPr lang="en-US"/>
-          </a:p>
-        </p:txBody>
-      </p:sp>
-      <p:sp>
-        <p:nvSpPr>
-          <p:cNvPr id="6" name="Slide Number Placeholder 5"/>
-          <p:cNvSpPr>
-            <a:spLocks noGrp="1"/>
-          </p:cNvSpPr>
-          <p:nvPr>
-            <p:ph type="sldNum" sz="quarter" idx="12"/>
+            <a:endParaRPr/>
+          </a:p>
+        </p:txBody>
+      </p:sp>
+      <p:sp>
+        <p:nvSpPr>
+          <p:cNvPr id="6" name="Slide Number Placeholder 5">
+            <a:extLst>
+              <a:ext uri="{FF2B5EF4-FFF2-40B4-BE49-F238E27FC236}">
+                <a16:creationId xmlns:a16="http://schemas.microsoft.com/office/drawing/2014/main" id="{5F4C03B3-0628-4733-ACB9-955787D592A9}"/>
+              </a:ext>
+            </a:extLst>
+          </p:cNvPr>
+          <p:cNvSpPr>
+            <a:spLocks noGrp="1"/>
+          </p:cNvSpPr>
+          <p:nvPr>
+            <p:ph type="sldNum" idx="12"/>
           </p:nvPr>
         </p:nvSpPr>
         <p:spPr/>
@@ -1837,19 +1977,13 @@
           <a:lstStyle/>
           <a:p>
             <a:fld id="{C1FF6DA9-008F-8B48-92A6-B652298478BF}" type="slidenum">
-              <a:rPr lang="en-US" smtClean="0"/>
               <a:t>‹#›</a:t>
             </a:fld>
-            <a:endParaRPr lang="en-US"/>
+            <a:endParaRPr/>
           </a:p>
         </p:txBody>
       </p:sp>
     </p:spTree>
-    <p:extLst>
-      <p:ext uri="{BB962C8B-B14F-4D97-AF65-F5344CB8AC3E}">
-        <p14:creationId xmlns:p14="http://schemas.microsoft.com/office/powerpoint/2010/main" val="2614314258"/>
-      </p:ext>
-    </p:extLst>
   </p:cSld>
   <p:clrMapOvr>
     <a:masterClrMapping/>
@@ -1876,7 +2010,13 @@
       </p:grpSpPr>
       <p:sp>
         <p:nvSpPr>
-          <p:cNvPr id="2" name="Title 1"/>
+          <p:cNvPr id="2" name="Title 1">
+            <a:extLst>
+              <a:ext uri="{FF2B5EF4-FFF2-40B4-BE49-F238E27FC236}">
+                <a16:creationId xmlns:a16="http://schemas.microsoft.com/office/drawing/2014/main" id="{BE26F3EA-5700-4E0F-B096-73E22495E118}"/>
+              </a:ext>
+            </a:extLst>
+          </p:cNvPr>
           <p:cNvSpPr>
             <a:spLocks noGrp="1"/>
           </p:cNvSpPr>
@@ -1894,21 +2034,26 @@
           <a:bodyPr anchor="t"/>
           <a:lstStyle>
             <a:lvl1pPr algn="l">
+              <a:buNone/>
               <a:defRPr sz="4000" b="1" cap="all"/>
             </a:lvl1pPr>
           </a:lstStyle>
           <a:p>
             <a:r>
-              <a:rPr lang="en-US" smtClean="0"/>
               <a:t>Click to edit Master title style</a:t>
             </a:r>
-            <a:endParaRPr lang="en-US"/>
-          </a:p>
-        </p:txBody>
-      </p:sp>
-      <p:sp>
-        <p:nvSpPr>
-          <p:cNvPr id="3" name="Text Placeholder 2"/>
+          </a:p>
+        </p:txBody>
+      </p:sp>
+      <p:sp>
+        <p:nvSpPr>
+          <p:cNvPr id="3" name="Text Placeholder 2">
+            <a:extLst>
+              <a:ext uri="{FF2B5EF4-FFF2-40B4-BE49-F238E27FC236}">
+                <a16:creationId xmlns:a16="http://schemas.microsoft.com/office/drawing/2014/main" id="{C7DE7995-3D7F-4664-8747-EF0630FD18D5}"/>
+              </a:ext>
+            </a:extLst>
+          </p:cNvPr>
           <p:cNvSpPr>
             <a:spLocks noGrp="1"/>
           </p:cNvSpPr>
@@ -2017,9 +2162,10 @@
             </a:lvl9pPr>
           </a:lstStyle>
           <a:p>
-            <a:pPr lvl="0"/>
-            <a:r>
-              <a:rPr lang="en-US" smtClean="0"/>
+            <a:pPr lvl="0">
+              <a:buNone/>
+            </a:pPr>
+            <a:r>
               <a:t>Click to edit Master text styles</a:t>
             </a:r>
           </a:p>
@@ -2027,12 +2173,18 @@
       </p:sp>
       <p:sp>
         <p:nvSpPr>
-          <p:cNvPr id="4" name="Date Placeholder 3"/>
-          <p:cNvSpPr>
-            <a:spLocks noGrp="1"/>
-          </p:cNvSpPr>
-          <p:nvPr>
-            <p:ph type="dt" sz="half" idx="10"/>
+          <p:cNvPr id="4" name="Date Placeholder 3">
+            <a:extLst>
+              <a:ext uri="{FF2B5EF4-FFF2-40B4-BE49-F238E27FC236}">
+                <a16:creationId xmlns:a16="http://schemas.microsoft.com/office/drawing/2014/main" id="{A99967FE-06BC-4AF9-8899-8740BB950166}"/>
+              </a:ext>
+            </a:extLst>
+          </p:cNvPr>
+          <p:cNvSpPr>
+            <a:spLocks noGrp="1"/>
+          </p:cNvSpPr>
+          <p:nvPr>
+            <p:ph type="dt" idx="10"/>
           </p:nvPr>
         </p:nvSpPr>
         <p:spPr/>
@@ -2041,21 +2193,26 @@
           <a:lstStyle/>
           <a:p>
             <a:fld id="{5BCAD085-E8A6-8845-BD4E-CB4CCA059FC4}" type="datetimeFigureOut">
-              <a:rPr lang="en-US" smtClean="0"/>
-              <a:t>1/27/13</a:t>
+              <a:t>9/27/2026</a:t>
             </a:fld>
-            <a:endParaRPr lang="en-US"/>
-          </a:p>
-        </p:txBody>
-      </p:sp>
-      <p:sp>
-        <p:nvSpPr>
-          <p:cNvPr id="5" name="Footer Placeholder 4"/>
-          <p:cNvSpPr>
-            <a:spLocks noGrp="1"/>
-          </p:cNvSpPr>
-          <p:nvPr>
-            <p:ph type="ftr" sz="quarter" idx="11"/>
+            <a:endParaRPr/>
+          </a:p>
+        </p:txBody>
+      </p:sp>
+      <p:sp>
+        <p:nvSpPr>
+          <p:cNvPr id="5" name="Footer Placeholder 4">
+            <a:extLst>
+              <a:ext uri="{FF2B5EF4-FFF2-40B4-BE49-F238E27FC236}">
+                <a16:creationId xmlns:a16="http://schemas.microsoft.com/office/drawing/2014/main" id="{4E8E6B28-FAD7-4DB2-ABFC-CB75E72B7ECE}"/>
+              </a:ext>
+            </a:extLst>
+          </p:cNvPr>
+          <p:cNvSpPr>
+            <a:spLocks noGrp="1"/>
+          </p:cNvSpPr>
+          <p:nvPr>
+            <p:ph type="ftr" idx="11"/>
           </p:nvPr>
         </p:nvSpPr>
         <p:spPr/>
@@ -2063,18 +2220,24 @@
           <a:bodyPr/>
           <a:lstStyle/>
           <a:p>
-            <a:endParaRPr lang="en-US"/>
-          </a:p>
-        </p:txBody>
-      </p:sp>
-      <p:sp>
-        <p:nvSpPr>
-          <p:cNvPr id="6" name="Slide Number Placeholder 5"/>
-          <p:cNvSpPr>
-            <a:spLocks noGrp="1"/>
-          </p:cNvSpPr>
-          <p:nvPr>
-            <p:ph type="sldNum" sz="quarter" idx="12"/>
+            <a:endParaRPr/>
+          </a:p>
+        </p:txBody>
+      </p:sp>
+      <p:sp>
+        <p:nvSpPr>
+          <p:cNvPr id="6" name="Slide Number Placeholder 5">
+            <a:extLst>
+              <a:ext uri="{FF2B5EF4-FFF2-40B4-BE49-F238E27FC236}">
+                <a16:creationId xmlns:a16="http://schemas.microsoft.com/office/drawing/2014/main" id="{15B4F6C8-2D89-49B9-95A3-7B1D7A1471DE}"/>
+              </a:ext>
+            </a:extLst>
+          </p:cNvPr>
+          <p:cNvSpPr>
+            <a:spLocks noGrp="1"/>
+          </p:cNvSpPr>
+          <p:nvPr>
+            <p:ph type="sldNum" idx="12"/>
           </p:nvPr>
         </p:nvSpPr>
         <p:spPr/>
@@ -2083,19 +2246,13 @@
           <a:lstStyle/>
           <a:p>
             <a:fld id="{C1FF6DA9-008F-8B48-92A6-B652298478BF}" type="slidenum">
-              <a:rPr lang="en-US" smtClean="0"/>
               <a:t>‹#›</a:t>
             </a:fld>
-            <a:endParaRPr lang="en-US"/>
+            <a:endParaRPr/>
           </a:p>
         </p:txBody>
       </p:sp>
     </p:spTree>
-    <p:extLst>
-      <p:ext uri="{BB962C8B-B14F-4D97-AF65-F5344CB8AC3E}">
-        <p14:creationId xmlns:p14="http://schemas.microsoft.com/office/powerpoint/2010/main" val="960648375"/>
-      </p:ext>
-    </p:extLst>
   </p:cSld>
   <p:clrMapOvr>
     <a:masterClrMapping/>
@@ -2122,7 +2279,13 @@
       </p:grpSpPr>
       <p:sp>
         <p:nvSpPr>
-          <p:cNvPr id="2" name="Title 1"/>
+          <p:cNvPr id="2" name="Title 1">
+            <a:extLst>
+              <a:ext uri="{FF2B5EF4-FFF2-40B4-BE49-F238E27FC236}">
+                <a16:creationId xmlns:a16="http://schemas.microsoft.com/office/drawing/2014/main" id="{FAB2A4C2-2F5C-4A8D-A83A-C7EFBA95844C}"/>
+              </a:ext>
+            </a:extLst>
+          </p:cNvPr>
           <p:cNvSpPr>
             <a:spLocks noGrp="1"/>
           </p:cNvSpPr>
@@ -2136,21 +2299,25 @@
           <a:lstStyle/>
           <a:p>
             <a:r>
-              <a:rPr lang="en-US" smtClean="0"/>
               <a:t>Click to edit Master title style</a:t>
             </a:r>
-            <a:endParaRPr lang="en-US"/>
-          </a:p>
-        </p:txBody>
-      </p:sp>
-      <p:sp>
-        <p:nvSpPr>
-          <p:cNvPr id="3" name="Content Placeholder 2"/>
-          <p:cNvSpPr>
-            <a:spLocks noGrp="1"/>
-          </p:cNvSpPr>
-          <p:nvPr>
-            <p:ph sz="half" idx="1"/>
+          </a:p>
+        </p:txBody>
+      </p:sp>
+      <p:sp>
+        <p:nvSpPr>
+          <p:cNvPr id="3" name="Content Placeholder 2">
+            <a:extLst>
+              <a:ext uri="{FF2B5EF4-FFF2-40B4-BE49-F238E27FC236}">
+                <a16:creationId xmlns:a16="http://schemas.microsoft.com/office/drawing/2014/main" id="{B6C8F385-F50D-4E93-8FBD-7F5894872803}"/>
+              </a:ext>
+            </a:extLst>
+          </p:cNvPr>
+          <p:cNvSpPr>
+            <a:spLocks noGrp="1"/>
+          </p:cNvSpPr>
+          <p:nvPr>
+            <p:ph idx="1"/>
           </p:nvPr>
         </p:nvSpPr>
         <p:spPr>
@@ -2163,79 +2330,98 @@
           <a:bodyPr/>
           <a:lstStyle>
             <a:lvl1pPr>
+              <a:buNone/>
               <a:defRPr sz="2800"/>
             </a:lvl1pPr>
             <a:lvl2pPr>
+              <a:buNone/>
               <a:defRPr sz="2400"/>
             </a:lvl2pPr>
             <a:lvl3pPr>
+              <a:buNone/>
               <a:defRPr sz="2000"/>
             </a:lvl3pPr>
             <a:lvl4pPr>
+              <a:buNone/>
               <a:defRPr sz="1800"/>
             </a:lvl4pPr>
             <a:lvl5pPr>
+              <a:buNone/>
               <a:defRPr sz="1800"/>
             </a:lvl5pPr>
             <a:lvl6pPr>
+              <a:buNone/>
               <a:defRPr sz="1800"/>
             </a:lvl6pPr>
             <a:lvl7pPr>
+              <a:buNone/>
               <a:defRPr sz="1800"/>
             </a:lvl7pPr>
             <a:lvl8pPr>
+              <a:buNone/>
               <a:defRPr sz="1800"/>
             </a:lvl8pPr>
             <a:lvl9pPr>
+              <a:buNone/>
               <a:defRPr sz="1800"/>
             </a:lvl9pPr>
           </a:lstStyle>
           <a:p>
-            <a:pPr lvl="0"/>
-            <a:r>
-              <a:rPr lang="en-US" smtClean="0"/>
+            <a:pPr lvl="0">
+              <a:buNone/>
+            </a:pPr>
+            <a:r>
               <a:t>Click to edit Master text styles</a:t>
             </a:r>
           </a:p>
           <a:p>
-            <a:pPr lvl="1"/>
-            <a:r>
-              <a:rPr lang="en-US" smtClean="0"/>
+            <a:pPr lvl="1">
+              <a:buNone/>
+            </a:pPr>
+            <a:r>
               <a:t>Second level</a:t>
             </a:r>
           </a:p>
           <a:p>
-            <a:pPr lvl="2"/>
-            <a:r>
-              <a:rPr lang="en-US" smtClean="0"/>
+            <a:pPr lvl="2">
+              <a:buNone/>
+            </a:pPr>
+            <a:r>
               <a:t>Third level</a:t>
             </a:r>
           </a:p>
           <a:p>
-            <a:pPr lvl="3"/>
-            <a:r>
-              <a:rPr lang="en-US" smtClean="0"/>
+            <a:pPr lvl="3">
+              <a:buNone/>
+            </a:pPr>
+            <a:r>
               <a:t>Fourth level</a:t>
             </a:r>
           </a:p>
           <a:p>
-            <a:pPr lvl="4"/>
-            <a:r>
-              <a:rPr lang="en-US" smtClean="0"/>
+            <a:pPr lvl="4">
+              <a:buNone/>
+            </a:pPr>
+            <a:r>
               <a:t>Fifth level</a:t>
             </a:r>
-            <a:endParaRPr lang="en-US"/>
-          </a:p>
-        </p:txBody>
-      </p:sp>
-      <p:sp>
-        <p:nvSpPr>
-          <p:cNvPr id="4" name="Content Placeholder 3"/>
-          <p:cNvSpPr>
-            <a:spLocks noGrp="1"/>
-          </p:cNvSpPr>
-          <p:nvPr>
-            <p:ph sz="half" idx="2"/>
+          </a:p>
+        </p:txBody>
+      </p:sp>
+      <p:sp>
+        <p:nvSpPr>
+          <p:cNvPr id="4" name="Content Placeholder 3">
+            <a:extLst>
+              <a:ext uri="{FF2B5EF4-FFF2-40B4-BE49-F238E27FC236}">
+                <a16:creationId xmlns:a16="http://schemas.microsoft.com/office/drawing/2014/main" id="{F647193B-D40B-4C61-B22C-9ED7DF6A6F3A}"/>
+              </a:ext>
+            </a:extLst>
+          </p:cNvPr>
+          <p:cNvSpPr>
+            <a:spLocks noGrp="1"/>
+          </p:cNvSpPr>
+          <p:nvPr>
+            <p:ph idx="2"/>
           </p:nvPr>
         </p:nvSpPr>
         <p:spPr>
@@ -2248,79 +2434,98 @@
           <a:bodyPr/>
           <a:lstStyle>
             <a:lvl1pPr>
+              <a:buNone/>
               <a:defRPr sz="2800"/>
             </a:lvl1pPr>
             <a:lvl2pPr>
+              <a:buNone/>
               <a:defRPr sz="2400"/>
             </a:lvl2pPr>
             <a:lvl3pPr>
+              <a:buNone/>
               <a:defRPr sz="2000"/>
             </a:lvl3pPr>
             <a:lvl4pPr>
+              <a:buNone/>
               <a:defRPr sz="1800"/>
             </a:lvl4pPr>
             <a:lvl5pPr>
+              <a:buNone/>
               <a:defRPr sz="1800"/>
             </a:lvl5pPr>
             <a:lvl6pPr>
+              <a:buNone/>
               <a:defRPr sz="1800"/>
             </a:lvl6pPr>
             <a:lvl7pPr>
+              <a:buNone/>
               <a:defRPr sz="1800"/>
             </a:lvl7pPr>
             <a:lvl8pPr>
+              <a:buNone/>
               <a:defRPr sz="1800"/>
             </a:lvl8pPr>
             <a:lvl9pPr>
+              <a:buNone/>
               <a:defRPr sz="1800"/>
             </a:lvl9pPr>
           </a:lstStyle>
           <a:p>
-            <a:pPr lvl="0"/>
-            <a:r>
-              <a:rPr lang="en-US" smtClean="0"/>
+            <a:pPr lvl="0">
+              <a:buNone/>
+            </a:pPr>
+            <a:r>
               <a:t>Click to edit Master text styles</a:t>
             </a:r>
           </a:p>
           <a:p>
-            <a:pPr lvl="1"/>
-            <a:r>
-              <a:rPr lang="en-US" smtClean="0"/>
+            <a:pPr lvl="1">
+              <a:buNone/>
+            </a:pPr>
+            <a:r>
               <a:t>Second level</a:t>
             </a:r>
           </a:p>
           <a:p>
-            <a:pPr lvl="2"/>
-            <a:r>
-              <a:rPr lang="en-US" smtClean="0"/>
+            <a:pPr lvl="2">
+              <a:buNone/>
+            </a:pPr>
+            <a:r>
               <a:t>Third level</a:t>
             </a:r>
           </a:p>
           <a:p>
-            <a:pPr lvl="3"/>
-            <a:r>
-              <a:rPr lang="en-US" smtClean="0"/>
+            <a:pPr lvl="3">
+              <a:buNone/>
+            </a:pPr>
+            <a:r>
               <a:t>Fourth level</a:t>
             </a:r>
           </a:p>
           <a:p>
-            <a:pPr lvl="4"/>
-            <a:r>
-              <a:rPr lang="en-US" smtClean="0"/>
+            <a:pPr lvl="4">
+              <a:buNone/>
+            </a:pPr>
+            <a:r>
               <a:t>Fifth level</a:t>
             </a:r>
-            <a:endParaRPr lang="en-US"/>
-          </a:p>
-        </p:txBody>
-      </p:sp>
-      <p:sp>
-        <p:nvSpPr>
-          <p:cNvPr id="5" name="Date Placeholder 4"/>
-          <p:cNvSpPr>
-            <a:spLocks noGrp="1"/>
-          </p:cNvSpPr>
-          <p:nvPr>
-            <p:ph type="dt" sz="half" idx="10"/>
+          </a:p>
+        </p:txBody>
+      </p:sp>
+      <p:sp>
+        <p:nvSpPr>
+          <p:cNvPr id="5" name="Date Placeholder 4">
+            <a:extLst>
+              <a:ext uri="{FF2B5EF4-FFF2-40B4-BE49-F238E27FC236}">
+                <a16:creationId xmlns:a16="http://schemas.microsoft.com/office/drawing/2014/main" id="{5975E68D-7382-4B94-BC7C-4F91DD6CFE1F}"/>
+              </a:ext>
+            </a:extLst>
+          </p:cNvPr>
+          <p:cNvSpPr>
+            <a:spLocks noGrp="1"/>
+          </p:cNvSpPr>
+          <p:nvPr>
+            <p:ph type="dt" idx="10"/>
           </p:nvPr>
         </p:nvSpPr>
         <p:spPr/>
@@ -2329,21 +2534,26 @@
           <a:lstStyle/>
           <a:p>
             <a:fld id="{5BCAD085-E8A6-8845-BD4E-CB4CCA059FC4}" type="datetimeFigureOut">
-              <a:rPr lang="en-US" smtClean="0"/>
-              <a:t>1/27/13</a:t>
+              <a:t>9/27/2026</a:t>
             </a:fld>
-            <a:endParaRPr lang="en-US"/>
-          </a:p>
-        </p:txBody>
-      </p:sp>
-      <p:sp>
-        <p:nvSpPr>
-          <p:cNvPr id="6" name="Footer Placeholder 5"/>
-          <p:cNvSpPr>
-            <a:spLocks noGrp="1"/>
-          </p:cNvSpPr>
-          <p:nvPr>
-            <p:ph type="ftr" sz="quarter" idx="11"/>
+            <a:endParaRPr/>
+          </a:p>
+        </p:txBody>
+      </p:sp>
+      <p:sp>
+        <p:nvSpPr>
+          <p:cNvPr id="6" name="Footer Placeholder 5">
+            <a:extLst>
+              <a:ext uri="{FF2B5EF4-FFF2-40B4-BE49-F238E27FC236}">
+                <a16:creationId xmlns:a16="http://schemas.microsoft.com/office/drawing/2014/main" id="{D454F9AD-0F09-4FB0-8947-CA3B3DA54795}"/>
+              </a:ext>
+            </a:extLst>
+          </p:cNvPr>
+          <p:cNvSpPr>
+            <a:spLocks noGrp="1"/>
+          </p:cNvSpPr>
+          <p:nvPr>
+            <p:ph type="ftr" idx="11"/>
           </p:nvPr>
         </p:nvSpPr>
         <p:spPr/>
@@ -2351,18 +2561,24 @@
           <a:bodyPr/>
           <a:lstStyle/>
           <a:p>
-            <a:endParaRPr lang="en-US"/>
-          </a:p>
-        </p:txBody>
-      </p:sp>
-      <p:sp>
-        <p:nvSpPr>
-          <p:cNvPr id="7" name="Slide Number Placeholder 6"/>
-          <p:cNvSpPr>
-            <a:spLocks noGrp="1"/>
-          </p:cNvSpPr>
-          <p:nvPr>
-            <p:ph type="sldNum" sz="quarter" idx="12"/>
+            <a:endParaRPr/>
+          </a:p>
+        </p:txBody>
+      </p:sp>
+      <p:sp>
+        <p:nvSpPr>
+          <p:cNvPr id="7" name="Slide Number Placeholder 6">
+            <a:extLst>
+              <a:ext uri="{FF2B5EF4-FFF2-40B4-BE49-F238E27FC236}">
+                <a16:creationId xmlns:a16="http://schemas.microsoft.com/office/drawing/2014/main" id="{6D909F6B-54E6-48D7-9979-A3F93102001E}"/>
+              </a:ext>
+            </a:extLst>
+          </p:cNvPr>
+          <p:cNvSpPr>
+            <a:spLocks noGrp="1"/>
+          </p:cNvSpPr>
+          <p:nvPr>
+            <p:ph type="sldNum" idx="12"/>
           </p:nvPr>
         </p:nvSpPr>
         <p:spPr/>
@@ -2371,19 +2587,13 @@
           <a:lstStyle/>
           <a:p>
             <a:fld id="{C1FF6DA9-008F-8B48-92A6-B652298478BF}" type="slidenum">
-              <a:rPr lang="en-US" smtClean="0"/>
               <a:t>‹#›</a:t>
             </a:fld>
-            <a:endParaRPr lang="en-US"/>
+            <a:endParaRPr/>
           </a:p>
         </p:txBody>
       </p:sp>
     </p:spTree>
-    <p:extLst>
-      <p:ext uri="{BB962C8B-B14F-4D97-AF65-F5344CB8AC3E}">
-        <p14:creationId xmlns:p14="http://schemas.microsoft.com/office/powerpoint/2010/main" val="2782244947"/>
-      </p:ext>
-    </p:extLst>
   </p:cSld>
   <p:clrMapOvr>
     <a:masterClrMapping/>
@@ -2410,7 +2620,13 @@
       </p:grpSpPr>
       <p:sp>
         <p:nvSpPr>
-          <p:cNvPr id="2" name="Title 1"/>
+          <p:cNvPr id="2" name="Title 1">
+            <a:extLst>
+              <a:ext uri="{FF2B5EF4-FFF2-40B4-BE49-F238E27FC236}">
+                <a16:creationId xmlns:a16="http://schemas.microsoft.com/office/drawing/2014/main" id="{829A607B-FA6C-42C8-A681-436819136DA0}"/>
+              </a:ext>
+            </a:extLst>
+          </p:cNvPr>
           <p:cNvSpPr>
             <a:spLocks noGrp="1"/>
           </p:cNvSpPr>
@@ -2423,21 +2639,26 @@
           <a:bodyPr/>
           <a:lstStyle>
             <a:lvl1pPr>
+              <a:buNone/>
               <a:defRPr/>
             </a:lvl1pPr>
           </a:lstStyle>
           <a:p>
             <a:r>
-              <a:rPr lang="en-US" smtClean="0"/>
               <a:t>Click to edit Master title style</a:t>
             </a:r>
-            <a:endParaRPr lang="en-US"/>
-          </a:p>
-        </p:txBody>
-      </p:sp>
-      <p:sp>
-        <p:nvSpPr>
-          <p:cNvPr id="3" name="Text Placeholder 2"/>
+          </a:p>
+        </p:txBody>
+      </p:sp>
+      <p:sp>
+        <p:nvSpPr>
+          <p:cNvPr id="3" name="Text Placeholder 2">
+            <a:extLst>
+              <a:ext uri="{FF2B5EF4-FFF2-40B4-BE49-F238E27FC236}">
+                <a16:creationId xmlns:a16="http://schemas.microsoft.com/office/drawing/2014/main" id="{3FB141AF-A0DA-499C-A8F4-8462317C96FF}"/>
+              </a:ext>
+            </a:extLst>
+          </p:cNvPr>
           <p:cNvSpPr>
             <a:spLocks noGrp="1"/>
           </p:cNvSpPr>
@@ -2492,9 +2713,10 @@
             </a:lvl9pPr>
           </a:lstStyle>
           <a:p>
-            <a:pPr lvl="0"/>
-            <a:r>
-              <a:rPr lang="en-US" smtClean="0"/>
+            <a:pPr lvl="0">
+              <a:buNone/>
+            </a:pPr>
+            <a:r>
               <a:t>Click to edit Master text styles</a:t>
             </a:r>
           </a:p>
@@ -2502,12 +2724,18 @@
       </p:sp>
       <p:sp>
         <p:nvSpPr>
-          <p:cNvPr id="4" name="Content Placeholder 3"/>
-          <p:cNvSpPr>
-            <a:spLocks noGrp="1"/>
-          </p:cNvSpPr>
-          <p:nvPr>
-            <p:ph sz="half" idx="2"/>
+          <p:cNvPr id="4" name="Content Placeholder 3">
+            <a:extLst>
+              <a:ext uri="{FF2B5EF4-FFF2-40B4-BE49-F238E27FC236}">
+                <a16:creationId xmlns:a16="http://schemas.microsoft.com/office/drawing/2014/main" id="{B5AF7CA5-DB32-4C1D-A57A-2478B2DA2325}"/>
+              </a:ext>
+            </a:extLst>
+          </p:cNvPr>
+          <p:cNvSpPr>
+            <a:spLocks noGrp="1"/>
+          </p:cNvSpPr>
+          <p:nvPr>
+            <p:ph idx="2"/>
           </p:nvPr>
         </p:nvSpPr>
         <p:spPr>
@@ -2520,79 +2748,98 @@
           <a:bodyPr/>
           <a:lstStyle>
             <a:lvl1pPr>
+              <a:buNone/>
               <a:defRPr sz="2400"/>
             </a:lvl1pPr>
             <a:lvl2pPr>
+              <a:buNone/>
               <a:defRPr sz="2000"/>
             </a:lvl2pPr>
             <a:lvl3pPr>
+              <a:buNone/>
               <a:defRPr sz="1800"/>
             </a:lvl3pPr>
             <a:lvl4pPr>
+              <a:buNone/>
               <a:defRPr sz="1600"/>
             </a:lvl4pPr>
             <a:lvl5pPr>
+              <a:buNone/>
               <a:defRPr sz="1600"/>
             </a:lvl5pPr>
             <a:lvl6pPr>
+              <a:buNone/>
               <a:defRPr sz="1600"/>
             </a:lvl6pPr>
             <a:lvl7pPr>
+              <a:buNone/>
               <a:defRPr sz="1600"/>
             </a:lvl7pPr>
             <a:lvl8pPr>
+              <a:buNone/>
               <a:defRPr sz="1600"/>
             </a:lvl8pPr>
             <a:lvl9pPr>
+              <a:buNone/>
               <a:defRPr sz="1600"/>
             </a:lvl9pPr>
           </a:lstStyle>
           <a:p>
-            <a:pPr lvl="0"/>
-            <a:r>
-              <a:rPr lang="en-US" smtClean="0"/>
+            <a:pPr lvl="0">
+              <a:buNone/>
+            </a:pPr>
+            <a:r>
               <a:t>Click to edit Master text styles</a:t>
             </a:r>
           </a:p>
           <a:p>
-            <a:pPr lvl="1"/>
-            <a:r>
-              <a:rPr lang="en-US" smtClean="0"/>
+            <a:pPr lvl="1">
+              <a:buNone/>
+            </a:pPr>
+            <a:r>
               <a:t>Second level</a:t>
             </a:r>
           </a:p>
           <a:p>
-            <a:pPr lvl="2"/>
-            <a:r>
-              <a:rPr lang="en-US" smtClean="0"/>
+            <a:pPr lvl="2">
+              <a:buNone/>
+            </a:pPr>
+            <a:r>
               <a:t>Third level</a:t>
             </a:r>
           </a:p>
           <a:p>
-            <a:pPr lvl="3"/>
-            <a:r>
-              <a:rPr lang="en-US" smtClean="0"/>
+            <a:pPr lvl="3">
+              <a:buNone/>
+            </a:pPr>
+            <a:r>
               <a:t>Fourth level</a:t>
             </a:r>
           </a:p>
           <a:p>
-            <a:pPr lvl="4"/>
-            <a:r>
-              <a:rPr lang="en-US" smtClean="0"/>
+            <a:pPr lvl="4">
+              <a:buNone/>
+            </a:pPr>
+            <a:r>
               <a:t>Fifth level</a:t>
             </a:r>
-            <a:endParaRPr lang="en-US"/>
-          </a:p>
-        </p:txBody>
-      </p:sp>
-      <p:sp>
-        <p:nvSpPr>
-          <p:cNvPr id="5" name="Text Placeholder 4"/>
-          <p:cNvSpPr>
-            <a:spLocks noGrp="1"/>
-          </p:cNvSpPr>
-          <p:nvPr>
-            <p:ph type="body" sz="quarter" idx="3"/>
+          </a:p>
+        </p:txBody>
+      </p:sp>
+      <p:sp>
+        <p:nvSpPr>
+          <p:cNvPr id="5" name="Text Placeholder 4">
+            <a:extLst>
+              <a:ext uri="{FF2B5EF4-FFF2-40B4-BE49-F238E27FC236}">
+                <a16:creationId xmlns:a16="http://schemas.microsoft.com/office/drawing/2014/main" id="{BE3DFA2D-880B-410F-A0BB-B9A33A878E55}"/>
+              </a:ext>
+            </a:extLst>
+          </p:cNvPr>
+          <p:cNvSpPr>
+            <a:spLocks noGrp="1"/>
+          </p:cNvSpPr>
+          <p:nvPr>
+            <p:ph type="body" idx="3"/>
           </p:nvPr>
         </p:nvSpPr>
         <p:spPr>
@@ -2642,9 +2889,10 @@
             </a:lvl9pPr>
           </a:lstStyle>
           <a:p>
-            <a:pPr lvl="0"/>
-            <a:r>
-              <a:rPr lang="en-US" smtClean="0"/>
+            <a:pPr lvl="0">
+              <a:buNone/>
+            </a:pPr>
+            <a:r>
               <a:t>Click to edit Master text styles</a:t>
             </a:r>
           </a:p>
@@ -2652,12 +2900,18 @@
       </p:sp>
       <p:sp>
         <p:nvSpPr>
-          <p:cNvPr id="6" name="Content Placeholder 5"/>
-          <p:cNvSpPr>
-            <a:spLocks noGrp="1"/>
-          </p:cNvSpPr>
-          <p:nvPr>
-            <p:ph sz="quarter" idx="4"/>
+          <p:cNvPr id="6" name="Content Placeholder 5">
+            <a:extLst>
+              <a:ext uri="{FF2B5EF4-FFF2-40B4-BE49-F238E27FC236}">
+                <a16:creationId xmlns:a16="http://schemas.microsoft.com/office/drawing/2014/main" id="{3C90C135-EABC-40BC-B83F-7946596F68AE}"/>
+              </a:ext>
+            </a:extLst>
+          </p:cNvPr>
+          <p:cNvSpPr>
+            <a:spLocks noGrp="1"/>
+          </p:cNvSpPr>
+          <p:nvPr>
+            <p:ph idx="4"/>
           </p:nvPr>
         </p:nvSpPr>
         <p:spPr>
@@ -2670,79 +2924,98 @@
           <a:bodyPr/>
           <a:lstStyle>
             <a:lvl1pPr>
+              <a:buNone/>
               <a:defRPr sz="2400"/>
             </a:lvl1pPr>
             <a:lvl2pPr>
+              <a:buNone/>
               <a:defRPr sz="2000"/>
             </a:lvl2pPr>
             <a:lvl3pPr>
+              <a:buNone/>
               <a:defRPr sz="1800"/>
             </a:lvl3pPr>
             <a:lvl4pPr>
+              <a:buNone/>
               <a:defRPr sz="1600"/>
             </a:lvl4pPr>
             <a:lvl5pPr>
+              <a:buNone/>
               <a:defRPr sz="1600"/>
             </a:lvl5pPr>
             <a:lvl6pPr>
+              <a:buNone/>
               <a:defRPr sz="1600"/>
             </a:lvl6pPr>
             <a:lvl7pPr>
+              <a:buNone/>
               <a:defRPr sz="1600"/>
             </a:lvl7pPr>
             <a:lvl8pPr>
+              <a:buNone/>
               <a:defRPr sz="1600"/>
             </a:lvl8pPr>
             <a:lvl9pPr>
+              <a:buNone/>
               <a:defRPr sz="1600"/>
             </a:lvl9pPr>
           </a:lstStyle>
           <a:p>
-            <a:pPr lvl="0"/>
-            <a:r>
-              <a:rPr lang="en-US" smtClean="0"/>
+            <a:pPr lvl="0">
+              <a:buNone/>
+            </a:pPr>
+            <a:r>
               <a:t>Click to edit Master text styles</a:t>
             </a:r>
           </a:p>
           <a:p>
-            <a:pPr lvl="1"/>
-            <a:r>
-              <a:rPr lang="en-US" smtClean="0"/>
+            <a:pPr lvl="1">
+              <a:buNone/>
+            </a:pPr>
+            <a:r>
               <a:t>Second level</a:t>
             </a:r>
           </a:p>
           <a:p>
-            <a:pPr lvl="2"/>
-            <a:r>
-              <a:rPr lang="en-US" smtClean="0"/>
+            <a:pPr lvl="2">
+              <a:buNone/>
+            </a:pPr>
+            <a:r>
               <a:t>Third level</a:t>
             </a:r>
           </a:p>
           <a:p>
-            <a:pPr lvl="3"/>
-            <a:r>
-              <a:rPr lang="en-US" smtClean="0"/>
+            <a:pPr lvl="3">
+              <a:buNone/>
+            </a:pPr>
+            <a:r>
               <a:t>Fourth level</a:t>
             </a:r>
           </a:p>
           <a:p>
-            <a:pPr lvl="4"/>
-            <a:r>
-              <a:rPr lang="en-US" smtClean="0"/>
+            <a:pPr lvl="4">
+              <a:buNone/>
+            </a:pPr>
+            <a:r>
               <a:t>Fifth level</a:t>
             </a:r>
-            <a:endParaRPr lang="en-US"/>
-          </a:p>
-        </p:txBody>
-      </p:sp>
-      <p:sp>
-        <p:nvSpPr>
-          <p:cNvPr id="7" name="Date Placeholder 6"/>
-          <p:cNvSpPr>
-            <a:spLocks noGrp="1"/>
-          </p:cNvSpPr>
-          <p:nvPr>
-            <p:ph type="dt" sz="half" idx="10"/>
+          </a:p>
+        </p:txBody>
+      </p:sp>
+      <p:sp>
+        <p:nvSpPr>
+          <p:cNvPr id="7" name="Date Placeholder 6">
+            <a:extLst>
+              <a:ext uri="{FF2B5EF4-FFF2-40B4-BE49-F238E27FC236}">
+                <a16:creationId xmlns:a16="http://schemas.microsoft.com/office/drawing/2014/main" id="{5DB5CFD7-E840-42FB-8E28-35FB9D21850A}"/>
+              </a:ext>
+            </a:extLst>
+          </p:cNvPr>
+          <p:cNvSpPr>
+            <a:spLocks noGrp="1"/>
+          </p:cNvSpPr>
+          <p:nvPr>
+            <p:ph type="dt" idx="10"/>
           </p:nvPr>
         </p:nvSpPr>
         <p:spPr/>
@@ -2751,21 +3024,26 @@
           <a:lstStyle/>
           <a:p>
             <a:fld id="{5BCAD085-E8A6-8845-BD4E-CB4CCA059FC4}" type="datetimeFigureOut">
-              <a:rPr lang="en-US" smtClean="0"/>
-              <a:t>1/27/13</a:t>
+              <a:t>9/27/2026</a:t>
             </a:fld>
-            <a:endParaRPr lang="en-US"/>
-          </a:p>
-        </p:txBody>
-      </p:sp>
-      <p:sp>
-        <p:nvSpPr>
-          <p:cNvPr id="8" name="Footer Placeholder 7"/>
-          <p:cNvSpPr>
-            <a:spLocks noGrp="1"/>
-          </p:cNvSpPr>
-          <p:nvPr>
-            <p:ph type="ftr" sz="quarter" idx="11"/>
+            <a:endParaRPr/>
+          </a:p>
+        </p:txBody>
+      </p:sp>
+      <p:sp>
+        <p:nvSpPr>
+          <p:cNvPr id="8" name="Footer Placeholder 7">
+            <a:extLst>
+              <a:ext uri="{FF2B5EF4-FFF2-40B4-BE49-F238E27FC236}">
+                <a16:creationId xmlns:a16="http://schemas.microsoft.com/office/drawing/2014/main" id="{3FC83153-2DEF-499D-82B3-AC83028D3385}"/>
+              </a:ext>
+            </a:extLst>
+          </p:cNvPr>
+          <p:cNvSpPr>
+            <a:spLocks noGrp="1"/>
+          </p:cNvSpPr>
+          <p:nvPr>
+            <p:ph type="ftr" idx="11"/>
           </p:nvPr>
         </p:nvSpPr>
         <p:spPr/>
@@ -2773,18 +3051,24 @@
           <a:bodyPr/>
           <a:lstStyle/>
           <a:p>
-            <a:endParaRPr lang="en-US"/>
-          </a:p>
-        </p:txBody>
-      </p:sp>
-      <p:sp>
-        <p:nvSpPr>
-          <p:cNvPr id="9" name="Slide Number Placeholder 8"/>
-          <p:cNvSpPr>
-            <a:spLocks noGrp="1"/>
-          </p:cNvSpPr>
-          <p:nvPr>
-            <p:ph type="sldNum" sz="quarter" idx="12"/>
+            <a:endParaRPr/>
+          </a:p>
+        </p:txBody>
+      </p:sp>
+      <p:sp>
+        <p:nvSpPr>
+          <p:cNvPr id="9" name="Slide Number Placeholder 8">
+            <a:extLst>
+              <a:ext uri="{FF2B5EF4-FFF2-40B4-BE49-F238E27FC236}">
+                <a16:creationId xmlns:a16="http://schemas.microsoft.com/office/drawing/2014/main" id="{A6709CDE-F399-424C-8010-6E447030EFD5}"/>
+              </a:ext>
+            </a:extLst>
+          </p:cNvPr>
+          <p:cNvSpPr>
+            <a:spLocks noGrp="1"/>
+          </p:cNvSpPr>
+          <p:nvPr>
+            <p:ph type="sldNum" idx="12"/>
           </p:nvPr>
         </p:nvSpPr>
         <p:spPr/>
@@ -2793,19 +3077,13 @@
           <a:lstStyle/>
           <a:p>
             <a:fld id="{C1FF6DA9-008F-8B48-92A6-B652298478BF}" type="slidenum">
-              <a:rPr lang="en-US" smtClean="0"/>
               <a:t>‹#›</a:t>
             </a:fld>
-            <a:endParaRPr lang="en-US"/>
+            <a:endParaRPr/>
           </a:p>
         </p:txBody>
       </p:sp>
     </p:spTree>
-    <p:extLst>
-      <p:ext uri="{BB962C8B-B14F-4D97-AF65-F5344CB8AC3E}">
-        <p14:creationId xmlns:p14="http://schemas.microsoft.com/office/powerpoint/2010/main" val="990158736"/>
-      </p:ext>
-    </p:extLst>
   </p:cSld>
   <p:clrMapOvr>
     <a:masterClrMapping/>
@@ -2832,7 +3110,13 @@
       </p:grpSpPr>
       <p:sp>
         <p:nvSpPr>
-          <p:cNvPr id="2" name="Title 1"/>
+          <p:cNvPr id="2" name="Title 1">
+            <a:extLst>
+              <a:ext uri="{FF2B5EF4-FFF2-40B4-BE49-F238E27FC236}">
+                <a16:creationId xmlns:a16="http://schemas.microsoft.com/office/drawing/2014/main" id="{6A7407DA-9C3E-4DB6-8859-F37B07B9BF11}"/>
+              </a:ext>
+            </a:extLst>
+          </p:cNvPr>
           <p:cNvSpPr>
             <a:spLocks noGrp="1"/>
           </p:cNvSpPr>
@@ -2846,21 +3130,25 @@
           <a:lstStyle/>
           <a:p>
             <a:r>
-              <a:rPr lang="en-US" smtClean="0"/>
               <a:t>Click to edit Master title style</a:t>
             </a:r>
-            <a:endParaRPr lang="en-US"/>
-          </a:p>
-        </p:txBody>
-      </p:sp>
-      <p:sp>
-        <p:nvSpPr>
-          <p:cNvPr id="3" name="Date Placeholder 2"/>
-          <p:cNvSpPr>
-            <a:spLocks noGrp="1"/>
-          </p:cNvSpPr>
-          <p:nvPr>
-            <p:ph type="dt" sz="half" idx="10"/>
+          </a:p>
+        </p:txBody>
+      </p:sp>
+      <p:sp>
+        <p:nvSpPr>
+          <p:cNvPr id="3" name="Date Placeholder 2">
+            <a:extLst>
+              <a:ext uri="{FF2B5EF4-FFF2-40B4-BE49-F238E27FC236}">
+                <a16:creationId xmlns:a16="http://schemas.microsoft.com/office/drawing/2014/main" id="{6AA27B1C-9FF2-4D32-86F9-2365EAC98C10}"/>
+              </a:ext>
+            </a:extLst>
+          </p:cNvPr>
+          <p:cNvSpPr>
+            <a:spLocks noGrp="1"/>
+          </p:cNvSpPr>
+          <p:nvPr>
+            <p:ph type="dt" idx="10"/>
           </p:nvPr>
         </p:nvSpPr>
         <p:spPr/>
@@ -2869,21 +3157,26 @@
           <a:lstStyle/>
           <a:p>
             <a:fld id="{5BCAD085-E8A6-8845-BD4E-CB4CCA059FC4}" type="datetimeFigureOut">
-              <a:rPr lang="en-US" smtClean="0"/>
-              <a:t>1/27/13</a:t>
+              <a:t>9/27/2026</a:t>
             </a:fld>
-            <a:endParaRPr lang="en-US"/>
-          </a:p>
-        </p:txBody>
-      </p:sp>
-      <p:sp>
-        <p:nvSpPr>
-          <p:cNvPr id="4" name="Footer Placeholder 3"/>
-          <p:cNvSpPr>
-            <a:spLocks noGrp="1"/>
-          </p:cNvSpPr>
-          <p:nvPr>
-            <p:ph type="ftr" sz="quarter" idx="11"/>
+            <a:endParaRPr/>
+          </a:p>
+        </p:txBody>
+      </p:sp>
+      <p:sp>
+        <p:nvSpPr>
+          <p:cNvPr id="4" name="Footer Placeholder 3">
+            <a:extLst>
+              <a:ext uri="{FF2B5EF4-FFF2-40B4-BE49-F238E27FC236}">
+                <a16:creationId xmlns:a16="http://schemas.microsoft.com/office/drawing/2014/main" id="{F92D451A-13B2-4E76-85F5-0AEF597D2FCA}"/>
+              </a:ext>
+            </a:extLst>
+          </p:cNvPr>
+          <p:cNvSpPr>
+            <a:spLocks noGrp="1"/>
+          </p:cNvSpPr>
+          <p:nvPr>
+            <p:ph type="ftr" idx="11"/>
           </p:nvPr>
         </p:nvSpPr>
         <p:spPr/>
@@ -2891,18 +3184,24 @@
           <a:bodyPr/>
           <a:lstStyle/>
           <a:p>
-            <a:endParaRPr lang="en-US"/>
-          </a:p>
-        </p:txBody>
-      </p:sp>
-      <p:sp>
-        <p:nvSpPr>
-          <p:cNvPr id="5" name="Slide Number Placeholder 4"/>
-          <p:cNvSpPr>
-            <a:spLocks noGrp="1"/>
-          </p:cNvSpPr>
-          <p:nvPr>
-            <p:ph type="sldNum" sz="quarter" idx="12"/>
+            <a:endParaRPr/>
+          </a:p>
+        </p:txBody>
+      </p:sp>
+      <p:sp>
+        <p:nvSpPr>
+          <p:cNvPr id="5" name="Slide Number Placeholder 4">
+            <a:extLst>
+              <a:ext uri="{FF2B5EF4-FFF2-40B4-BE49-F238E27FC236}">
+                <a16:creationId xmlns:a16="http://schemas.microsoft.com/office/drawing/2014/main" id="{8E349656-82E8-4D91-AAA6-9BD0DC677BD3}"/>
+              </a:ext>
+            </a:extLst>
+          </p:cNvPr>
+          <p:cNvSpPr>
+            <a:spLocks noGrp="1"/>
+          </p:cNvSpPr>
+          <p:nvPr>
+            <p:ph type="sldNum" idx="12"/>
           </p:nvPr>
         </p:nvSpPr>
         <p:spPr/>
@@ -2911,19 +3210,13 @@
           <a:lstStyle/>
           <a:p>
             <a:fld id="{C1FF6DA9-008F-8B48-92A6-B652298478BF}" type="slidenum">
-              <a:rPr lang="en-US" smtClean="0"/>
               <a:t>‹#›</a:t>
             </a:fld>
-            <a:endParaRPr lang="en-US"/>
+            <a:endParaRPr/>
           </a:p>
         </p:txBody>
       </p:sp>
     </p:spTree>
-    <p:extLst>
-      <p:ext uri="{BB962C8B-B14F-4D97-AF65-F5344CB8AC3E}">
-        <p14:creationId xmlns:p14="http://schemas.microsoft.com/office/powerpoint/2010/main" val="727027711"/>
-      </p:ext>
-    </p:extLst>
   </p:cSld>
   <p:clrMapOvr>
     <a:masterClrMapping/>
@@ -2950,12 +3243,18 @@
       </p:grpSpPr>
       <p:sp>
         <p:nvSpPr>
-          <p:cNvPr id="2" name="Date Placeholder 1"/>
-          <p:cNvSpPr>
-            <a:spLocks noGrp="1"/>
-          </p:cNvSpPr>
-          <p:nvPr>
-            <p:ph type="dt" sz="half" idx="10"/>
+          <p:cNvPr id="2" name="Date Placeholder 1">
+            <a:extLst>
+              <a:ext uri="{FF2B5EF4-FFF2-40B4-BE49-F238E27FC236}">
+                <a16:creationId xmlns:a16="http://schemas.microsoft.com/office/drawing/2014/main" id="{2B14F211-67F9-4E73-98B7-CF183AC2741A}"/>
+              </a:ext>
+            </a:extLst>
+          </p:cNvPr>
+          <p:cNvSpPr>
+            <a:spLocks noGrp="1"/>
+          </p:cNvSpPr>
+          <p:nvPr>
+            <p:ph type="dt" idx="10"/>
           </p:nvPr>
         </p:nvSpPr>
         <p:spPr/>
@@ -2964,21 +3263,26 @@
           <a:lstStyle/>
           <a:p>
             <a:fld id="{5BCAD085-E8A6-8845-BD4E-CB4CCA059FC4}" type="datetimeFigureOut">
-              <a:rPr lang="en-US" smtClean="0"/>
-              <a:t>1/27/13</a:t>
+              <a:t>9/27/2026</a:t>
             </a:fld>
-            <a:endParaRPr lang="en-US"/>
-          </a:p>
-        </p:txBody>
-      </p:sp>
-      <p:sp>
-        <p:nvSpPr>
-          <p:cNvPr id="3" name="Footer Placeholder 2"/>
-          <p:cNvSpPr>
-            <a:spLocks noGrp="1"/>
-          </p:cNvSpPr>
-          <p:nvPr>
-            <p:ph type="ftr" sz="quarter" idx="11"/>
+            <a:endParaRPr/>
+          </a:p>
+        </p:txBody>
+      </p:sp>
+      <p:sp>
+        <p:nvSpPr>
+          <p:cNvPr id="3" name="Footer Placeholder 2">
+            <a:extLst>
+              <a:ext uri="{FF2B5EF4-FFF2-40B4-BE49-F238E27FC236}">
+                <a16:creationId xmlns:a16="http://schemas.microsoft.com/office/drawing/2014/main" id="{59E1A435-8F9B-441D-AD3D-D69449F114CE}"/>
+              </a:ext>
+            </a:extLst>
+          </p:cNvPr>
+          <p:cNvSpPr>
+            <a:spLocks noGrp="1"/>
+          </p:cNvSpPr>
+          <p:nvPr>
+            <p:ph type="ftr" idx="11"/>
           </p:nvPr>
         </p:nvSpPr>
         <p:spPr/>
@@ -2986,18 +3290,24 @@
           <a:bodyPr/>
           <a:lstStyle/>
           <a:p>
-            <a:endParaRPr lang="en-US"/>
-          </a:p>
-        </p:txBody>
-      </p:sp>
-      <p:sp>
-        <p:nvSpPr>
-          <p:cNvPr id="4" name="Slide Number Placeholder 3"/>
-          <p:cNvSpPr>
-            <a:spLocks noGrp="1"/>
-          </p:cNvSpPr>
-          <p:nvPr>
-            <p:ph type="sldNum" sz="quarter" idx="12"/>
+            <a:endParaRPr/>
+          </a:p>
+        </p:txBody>
+      </p:sp>
+      <p:sp>
+        <p:nvSpPr>
+          <p:cNvPr id="4" name="Slide Number Placeholder 3">
+            <a:extLst>
+              <a:ext uri="{FF2B5EF4-FFF2-40B4-BE49-F238E27FC236}">
+                <a16:creationId xmlns:a16="http://schemas.microsoft.com/office/drawing/2014/main" id="{C34DCB35-1CD2-4119-9530-40FF3AF0D2A1}"/>
+              </a:ext>
+            </a:extLst>
+          </p:cNvPr>
+          <p:cNvSpPr>
+            <a:spLocks noGrp="1"/>
+          </p:cNvSpPr>
+          <p:nvPr>
+            <p:ph type="sldNum" idx="12"/>
           </p:nvPr>
         </p:nvSpPr>
         <p:spPr/>
@@ -3006,19 +3316,13 @@
           <a:lstStyle/>
           <a:p>
             <a:fld id="{C1FF6DA9-008F-8B48-92A6-B652298478BF}" type="slidenum">
-              <a:rPr lang="en-US" smtClean="0"/>
               <a:t>‹#›</a:t>
             </a:fld>
-            <a:endParaRPr lang="en-US"/>
+            <a:endParaRPr/>
           </a:p>
         </p:txBody>
       </p:sp>
     </p:spTree>
-    <p:extLst>
-      <p:ext uri="{BB962C8B-B14F-4D97-AF65-F5344CB8AC3E}">
-        <p14:creationId xmlns:p14="http://schemas.microsoft.com/office/powerpoint/2010/main" val="1212999818"/>
-      </p:ext>
-    </p:extLst>
   </p:cSld>
   <p:clrMapOvr>
     <a:masterClrMapping/>
@@ -3045,7 +3349,13 @@
       </p:grpSpPr>
       <p:sp>
         <p:nvSpPr>
-          <p:cNvPr id="2" name="Title 1"/>
+          <p:cNvPr id="2" name="Title 1">
+            <a:extLst>
+              <a:ext uri="{FF2B5EF4-FFF2-40B4-BE49-F238E27FC236}">
+                <a16:creationId xmlns:a16="http://schemas.microsoft.com/office/drawing/2014/main" id="{CAF8F300-65EE-48C5-8D6E-BD42DCCBA7F9}"/>
+              </a:ext>
+            </a:extLst>
+          </p:cNvPr>
           <p:cNvSpPr>
             <a:spLocks noGrp="1"/>
           </p:cNvSpPr>
@@ -3063,21 +3373,26 @@
           <a:bodyPr anchor="b"/>
           <a:lstStyle>
             <a:lvl1pPr algn="l">
+              <a:buNone/>
               <a:defRPr sz="2000" b="1"/>
             </a:lvl1pPr>
           </a:lstStyle>
           <a:p>
             <a:r>
-              <a:rPr lang="en-US" smtClean="0"/>
               <a:t>Click to edit Master title style</a:t>
             </a:r>
-            <a:endParaRPr lang="en-US"/>
-          </a:p>
-        </p:txBody>
-      </p:sp>
-      <p:sp>
-        <p:nvSpPr>
-          <p:cNvPr id="3" name="Content Placeholder 2"/>
+          </a:p>
+        </p:txBody>
+      </p:sp>
+      <p:sp>
+        <p:nvSpPr>
+          <p:cNvPr id="3" name="Content Placeholder 2">
+            <a:extLst>
+              <a:ext uri="{FF2B5EF4-FFF2-40B4-BE49-F238E27FC236}">
+                <a16:creationId xmlns:a16="http://schemas.microsoft.com/office/drawing/2014/main" id="{F4E22C05-9428-45D4-9F7D-00B4910EDBDD}"/>
+              </a:ext>
+            </a:extLst>
+          </p:cNvPr>
           <p:cNvSpPr>
             <a:spLocks noGrp="1"/>
           </p:cNvSpPr>
@@ -3095,79 +3410,98 @@
           <a:bodyPr/>
           <a:lstStyle>
             <a:lvl1pPr>
+              <a:buNone/>
               <a:defRPr sz="3200"/>
             </a:lvl1pPr>
             <a:lvl2pPr>
+              <a:buNone/>
               <a:defRPr sz="2800"/>
             </a:lvl2pPr>
             <a:lvl3pPr>
+              <a:buNone/>
               <a:defRPr sz="2400"/>
             </a:lvl3pPr>
             <a:lvl4pPr>
+              <a:buNone/>
               <a:defRPr sz="2000"/>
             </a:lvl4pPr>
             <a:lvl5pPr>
+              <a:buNone/>
               <a:defRPr sz="2000"/>
             </a:lvl5pPr>
             <a:lvl6pPr>
+              <a:buNone/>
               <a:defRPr sz="2000"/>
             </a:lvl6pPr>
             <a:lvl7pPr>
+              <a:buNone/>
               <a:defRPr sz="2000"/>
             </a:lvl7pPr>
             <a:lvl8pPr>
+              <a:buNone/>
               <a:defRPr sz="2000"/>
             </a:lvl8pPr>
             <a:lvl9pPr>
+              <a:buNone/>
               <a:defRPr sz="2000"/>
             </a:lvl9pPr>
           </a:lstStyle>
           <a:p>
-            <a:pPr lvl="0"/>
-            <a:r>
-              <a:rPr lang="en-US" smtClean="0"/>
+            <a:pPr lvl="0">
+              <a:buNone/>
+            </a:pPr>
+            <a:r>
               <a:t>Click to edit Master text styles</a:t>
             </a:r>
           </a:p>
           <a:p>
-            <a:pPr lvl="1"/>
-            <a:r>
-              <a:rPr lang="en-US" smtClean="0"/>
+            <a:pPr lvl="1">
+              <a:buNone/>
+            </a:pPr>
+            <a:r>
               <a:t>Second level</a:t>
             </a:r>
           </a:p>
           <a:p>
-            <a:pPr lvl="2"/>
-            <a:r>
-              <a:rPr lang="en-US" smtClean="0"/>
+            <a:pPr lvl="2">
+              <a:buNone/>
+            </a:pPr>
+            <a:r>
               <a:t>Third level</a:t>
             </a:r>
           </a:p>
           <a:p>
-            <a:pPr lvl="3"/>
-            <a:r>
-              <a:rPr lang="en-US" smtClean="0"/>
+            <a:pPr lvl="3">
+              <a:buNone/>
+            </a:pPr>
+            <a:r>
               <a:t>Fourth level</a:t>
             </a:r>
           </a:p>
           <a:p>
-            <a:pPr lvl="4"/>
-            <a:r>
-              <a:rPr lang="en-US" smtClean="0"/>
+            <a:pPr lvl="4">
+              <a:buNone/>
+            </a:pPr>
+            <a:r>
               <a:t>Fifth level</a:t>
             </a:r>
-            <a:endParaRPr lang="en-US"/>
-          </a:p>
-        </p:txBody>
-      </p:sp>
-      <p:sp>
-        <p:nvSpPr>
-          <p:cNvPr id="4" name="Text Placeholder 3"/>
-          <p:cNvSpPr>
-            <a:spLocks noGrp="1"/>
-          </p:cNvSpPr>
-          <p:nvPr>
-            <p:ph type="body" sz="half" idx="2"/>
+          </a:p>
+        </p:txBody>
+      </p:sp>
+      <p:sp>
+        <p:nvSpPr>
+          <p:cNvPr id="4" name="Text Placeholder 3">
+            <a:extLst>
+              <a:ext uri="{FF2B5EF4-FFF2-40B4-BE49-F238E27FC236}">
+                <a16:creationId xmlns:a16="http://schemas.microsoft.com/office/drawing/2014/main" id="{502BB7AE-4E28-4791-AF78-E1B17FC53E7B}"/>
+              </a:ext>
+            </a:extLst>
+          </p:cNvPr>
+          <p:cNvSpPr>
+            <a:spLocks noGrp="1"/>
+          </p:cNvSpPr>
+          <p:nvPr>
+            <p:ph type="body" idx="2"/>
           </p:nvPr>
         </p:nvSpPr>
         <p:spPr>
@@ -3217,9 +3551,10 @@
             </a:lvl9pPr>
           </a:lstStyle>
           <a:p>
-            <a:pPr lvl="0"/>
-            <a:r>
-              <a:rPr lang="en-US" smtClean="0"/>
+            <a:pPr lvl="0">
+              <a:buNone/>
+            </a:pPr>
+            <a:r>
               <a:t>Click to edit Master text styles</a:t>
             </a:r>
           </a:p>
@@ -3227,12 +3562,18 @@
       </p:sp>
       <p:sp>
         <p:nvSpPr>
-          <p:cNvPr id="5" name="Date Placeholder 4"/>
-          <p:cNvSpPr>
-            <a:spLocks noGrp="1"/>
-          </p:cNvSpPr>
-          <p:nvPr>
-            <p:ph type="dt" sz="half" idx="10"/>
+          <p:cNvPr id="5" name="Date Placeholder 4">
+            <a:extLst>
+              <a:ext uri="{FF2B5EF4-FFF2-40B4-BE49-F238E27FC236}">
+                <a16:creationId xmlns:a16="http://schemas.microsoft.com/office/drawing/2014/main" id="{FEE4A8A3-EB4C-4448-9D21-8378AE1672DF}"/>
+              </a:ext>
+            </a:extLst>
+          </p:cNvPr>
+          <p:cNvSpPr>
+            <a:spLocks noGrp="1"/>
+          </p:cNvSpPr>
+          <p:nvPr>
+            <p:ph type="dt" idx="10"/>
           </p:nvPr>
         </p:nvSpPr>
         <p:spPr/>
@@ -3241,21 +3582,26 @@
           <a:lstStyle/>
           <a:p>
             <a:fld id="{5BCAD085-E8A6-8845-BD4E-CB4CCA059FC4}" type="datetimeFigureOut">
-              <a:rPr lang="en-US" smtClean="0"/>
-              <a:t>1/27/13</a:t>
+              <a:t>9/27/2026</a:t>
             </a:fld>
-            <a:endParaRPr lang="en-US"/>
-          </a:p>
-        </p:txBody>
-      </p:sp>
-      <p:sp>
-        <p:nvSpPr>
-          <p:cNvPr id="6" name="Footer Placeholder 5"/>
-          <p:cNvSpPr>
-            <a:spLocks noGrp="1"/>
-          </p:cNvSpPr>
-          <p:nvPr>
-            <p:ph type="ftr" sz="quarter" idx="11"/>
+            <a:endParaRPr/>
+          </a:p>
+        </p:txBody>
+      </p:sp>
+      <p:sp>
+        <p:nvSpPr>
+          <p:cNvPr id="6" name="Footer Placeholder 5">
+            <a:extLst>
+              <a:ext uri="{FF2B5EF4-FFF2-40B4-BE49-F238E27FC236}">
+                <a16:creationId xmlns:a16="http://schemas.microsoft.com/office/drawing/2014/main" id="{A11B314C-DBE0-4BAB-8107-B430C76E3724}"/>
+              </a:ext>
+            </a:extLst>
+          </p:cNvPr>
+          <p:cNvSpPr>
+            <a:spLocks noGrp="1"/>
+          </p:cNvSpPr>
+          <p:nvPr>
+            <p:ph type="ftr" idx="11"/>
           </p:nvPr>
         </p:nvSpPr>
         <p:spPr/>
@@ -3263,18 +3609,24 @@
           <a:bodyPr/>
           <a:lstStyle/>
           <a:p>
-            <a:endParaRPr lang="en-US"/>
-          </a:p>
-        </p:txBody>
-      </p:sp>
-      <p:sp>
-        <p:nvSpPr>
-          <p:cNvPr id="7" name="Slide Number Placeholder 6"/>
-          <p:cNvSpPr>
-            <a:spLocks noGrp="1"/>
-          </p:cNvSpPr>
-          <p:nvPr>
-            <p:ph type="sldNum" sz="quarter" idx="12"/>
+            <a:endParaRPr/>
+          </a:p>
+        </p:txBody>
+      </p:sp>
+      <p:sp>
+        <p:nvSpPr>
+          <p:cNvPr id="7" name="Slide Number Placeholder 6">
+            <a:extLst>
+              <a:ext uri="{FF2B5EF4-FFF2-40B4-BE49-F238E27FC236}">
+                <a16:creationId xmlns:a16="http://schemas.microsoft.com/office/drawing/2014/main" id="{DAC44B49-AD43-4116-B498-D4B62145AB49}"/>
+              </a:ext>
+            </a:extLst>
+          </p:cNvPr>
+          <p:cNvSpPr>
+            <a:spLocks noGrp="1"/>
+          </p:cNvSpPr>
+          <p:nvPr>
+            <p:ph type="sldNum" idx="12"/>
           </p:nvPr>
         </p:nvSpPr>
         <p:spPr/>
@@ -3283,19 +3635,13 @@
           <a:lstStyle/>
           <a:p>
             <a:fld id="{C1FF6DA9-008F-8B48-92A6-B652298478BF}" type="slidenum">
-              <a:rPr lang="en-US" smtClean="0"/>
               <a:t>‹#›</a:t>
             </a:fld>
-            <a:endParaRPr lang="en-US"/>
+            <a:endParaRPr/>
           </a:p>
         </p:txBody>
       </p:sp>
     </p:spTree>
-    <p:extLst>
-      <p:ext uri="{BB962C8B-B14F-4D97-AF65-F5344CB8AC3E}">
-        <p14:creationId xmlns:p14="http://schemas.microsoft.com/office/powerpoint/2010/main" val="1840726560"/>
-      </p:ext>
-    </p:extLst>
   </p:cSld>
   <p:clrMapOvr>
     <a:masterClrMapping/>
@@ -3322,7 +3668,13 @@
       </p:grpSpPr>
       <p:sp>
         <p:nvSpPr>
-          <p:cNvPr id="2" name="Title 1"/>
+          <p:cNvPr id="2" name="Title 1">
+            <a:extLst>
+              <a:ext uri="{FF2B5EF4-FFF2-40B4-BE49-F238E27FC236}">
+                <a16:creationId xmlns:a16="http://schemas.microsoft.com/office/drawing/2014/main" id="{215F3806-4DBC-4A8F-B5FF-A4A49A5A5732}"/>
+              </a:ext>
+            </a:extLst>
+          </p:cNvPr>
           <p:cNvSpPr>
             <a:spLocks noGrp="1"/>
           </p:cNvSpPr>
@@ -3340,21 +3692,26 @@
           <a:bodyPr anchor="b"/>
           <a:lstStyle>
             <a:lvl1pPr algn="l">
+              <a:buNone/>
               <a:defRPr sz="2000" b="1"/>
             </a:lvl1pPr>
           </a:lstStyle>
           <a:p>
             <a:r>
-              <a:rPr lang="en-US" smtClean="0"/>
               <a:t>Click to edit Master title style</a:t>
             </a:r>
-            <a:endParaRPr lang="en-US"/>
-          </a:p>
-        </p:txBody>
-      </p:sp>
-      <p:sp>
-        <p:nvSpPr>
-          <p:cNvPr id="3" name="Picture Placeholder 2"/>
+          </a:p>
+        </p:txBody>
+      </p:sp>
+      <p:sp>
+        <p:nvSpPr>
+          <p:cNvPr id="3" name="Picture Placeholder 2">
+            <a:extLst>
+              <a:ext uri="{FF2B5EF4-FFF2-40B4-BE49-F238E27FC236}">
+                <a16:creationId xmlns:a16="http://schemas.microsoft.com/office/drawing/2014/main" id="{AA2EBA35-F579-46E2-8D4C-99B00530DE7E}"/>
+              </a:ext>
+            </a:extLst>
+          </p:cNvPr>
           <p:cNvSpPr>
             <a:spLocks noGrp="1"/>
           </p:cNvSpPr>
@@ -3409,18 +3766,24 @@
             </a:lvl9pPr>
           </a:lstStyle>
           <a:p>
-            <a:endParaRPr lang="en-US"/>
-          </a:p>
-        </p:txBody>
-      </p:sp>
-      <p:sp>
-        <p:nvSpPr>
-          <p:cNvPr id="4" name="Text Placeholder 3"/>
-          <p:cNvSpPr>
-            <a:spLocks noGrp="1"/>
-          </p:cNvSpPr>
-          <p:nvPr>
-            <p:ph type="body" sz="half" idx="2"/>
+            <a:endParaRPr/>
+          </a:p>
+        </p:txBody>
+      </p:sp>
+      <p:sp>
+        <p:nvSpPr>
+          <p:cNvPr id="4" name="Text Placeholder 3">
+            <a:extLst>
+              <a:ext uri="{FF2B5EF4-FFF2-40B4-BE49-F238E27FC236}">
+                <a16:creationId xmlns:a16="http://schemas.microsoft.com/office/drawing/2014/main" id="{3430B6F5-856A-4466-B385-65D9245D9370}"/>
+              </a:ext>
+            </a:extLst>
+          </p:cNvPr>
+          <p:cNvSpPr>
+            <a:spLocks noGrp="1"/>
+          </p:cNvSpPr>
+          <p:nvPr>
+            <p:ph type="body" idx="2"/>
           </p:nvPr>
         </p:nvSpPr>
         <p:spPr>
@@ -3470,9 +3833,10 @@
             </a:lvl9pPr>
           </a:lstStyle>
           <a:p>
-            <a:pPr lvl="0"/>
-            <a:r>
-              <a:rPr lang="en-US" smtClean="0"/>
+            <a:pPr lvl="0">
+              <a:buNone/>
+            </a:pPr>
+            <a:r>
               <a:t>Click to edit Master text styles</a:t>
             </a:r>
           </a:p>
@@ -3480,12 +3844,18 @@
       </p:sp>
       <p:sp>
         <p:nvSpPr>
-          <p:cNvPr id="5" name="Date Placeholder 4"/>
-          <p:cNvSpPr>
-            <a:spLocks noGrp="1"/>
-          </p:cNvSpPr>
-          <p:nvPr>
-            <p:ph type="dt" sz="half" idx="10"/>
+          <p:cNvPr id="5" name="Date Placeholder 4">
+            <a:extLst>
+              <a:ext uri="{FF2B5EF4-FFF2-40B4-BE49-F238E27FC236}">
+                <a16:creationId xmlns:a16="http://schemas.microsoft.com/office/drawing/2014/main" id="{98A5BBB6-20F7-4D57-93C3-55C2A8FE71A6}"/>
+              </a:ext>
+            </a:extLst>
+          </p:cNvPr>
+          <p:cNvSpPr>
+            <a:spLocks noGrp="1"/>
+          </p:cNvSpPr>
+          <p:nvPr>
+            <p:ph type="dt" idx="10"/>
           </p:nvPr>
         </p:nvSpPr>
         <p:spPr/>
@@ -3494,21 +3864,26 @@
           <a:lstStyle/>
           <a:p>
             <a:fld id="{5BCAD085-E8A6-8845-BD4E-CB4CCA059FC4}" type="datetimeFigureOut">
-              <a:rPr lang="en-US" smtClean="0"/>
-              <a:t>1/27/13</a:t>
+              <a:t>9/27/2026</a:t>
             </a:fld>
-            <a:endParaRPr lang="en-US"/>
-          </a:p>
-        </p:txBody>
-      </p:sp>
-      <p:sp>
-        <p:nvSpPr>
-          <p:cNvPr id="6" name="Footer Placeholder 5"/>
-          <p:cNvSpPr>
-            <a:spLocks noGrp="1"/>
-          </p:cNvSpPr>
-          <p:nvPr>
-            <p:ph type="ftr" sz="quarter" idx="11"/>
+            <a:endParaRPr/>
+          </a:p>
+        </p:txBody>
+      </p:sp>
+      <p:sp>
+        <p:nvSpPr>
+          <p:cNvPr id="6" name="Footer Placeholder 5">
+            <a:extLst>
+              <a:ext uri="{FF2B5EF4-FFF2-40B4-BE49-F238E27FC236}">
+                <a16:creationId xmlns:a16="http://schemas.microsoft.com/office/drawing/2014/main" id="{6D4A84F3-53DD-4E19-9F00-7112937F9D95}"/>
+              </a:ext>
+            </a:extLst>
+          </p:cNvPr>
+          <p:cNvSpPr>
+            <a:spLocks noGrp="1"/>
+          </p:cNvSpPr>
+          <p:nvPr>
+            <p:ph type="ftr" idx="11"/>
           </p:nvPr>
         </p:nvSpPr>
         <p:spPr/>
@@ -3516,18 +3891,24 @@
           <a:bodyPr/>
           <a:lstStyle/>
           <a:p>
-            <a:endParaRPr lang="en-US"/>
-          </a:p>
-        </p:txBody>
-      </p:sp>
-      <p:sp>
-        <p:nvSpPr>
-          <p:cNvPr id="7" name="Slide Number Placeholder 6"/>
-          <p:cNvSpPr>
-            <a:spLocks noGrp="1"/>
-          </p:cNvSpPr>
-          <p:nvPr>
-            <p:ph type="sldNum" sz="quarter" idx="12"/>
+            <a:endParaRPr/>
+          </a:p>
+        </p:txBody>
+      </p:sp>
+      <p:sp>
+        <p:nvSpPr>
+          <p:cNvPr id="7" name="Slide Number Placeholder 6">
+            <a:extLst>
+              <a:ext uri="{FF2B5EF4-FFF2-40B4-BE49-F238E27FC236}">
+                <a16:creationId xmlns:a16="http://schemas.microsoft.com/office/drawing/2014/main" id="{6A31216A-EA54-4357-9105-82DC3B1A2521}"/>
+              </a:ext>
+            </a:extLst>
+          </p:cNvPr>
+          <p:cNvSpPr>
+            <a:spLocks noGrp="1"/>
+          </p:cNvSpPr>
+          <p:nvPr>
+            <p:ph type="sldNum" idx="12"/>
           </p:nvPr>
         </p:nvSpPr>
         <p:spPr/>
@@ -3536,19 +3917,13 @@
           <a:lstStyle/>
           <a:p>
             <a:fld id="{C1FF6DA9-008F-8B48-92A6-B652298478BF}" type="slidenum">
-              <a:rPr lang="en-US" smtClean="0"/>
               <a:t>‹#›</a:t>
             </a:fld>
-            <a:endParaRPr lang="en-US"/>
+            <a:endParaRPr/>
           </a:p>
         </p:txBody>
       </p:sp>
     </p:spTree>
-    <p:extLst>
-      <p:ext uri="{BB962C8B-B14F-4D97-AF65-F5344CB8AC3E}">
-        <p14:creationId xmlns:p14="http://schemas.microsoft.com/office/powerpoint/2010/main" val="3889236939"/>
-      </p:ext>
-    </p:extLst>
   </p:cSld>
   <p:clrMapOvr>
     <a:masterClrMapping/>
@@ -3580,7 +3955,13 @@
       </p:grpSpPr>
       <p:sp>
         <p:nvSpPr>
-          <p:cNvPr id="2" name="Title Placeholder 1"/>
+          <p:cNvPr id="2" name="Title Placeholder 1">
+            <a:extLst>
+              <a:ext uri="{FF2B5EF4-FFF2-40B4-BE49-F238E27FC236}">
+                <a16:creationId xmlns:a16="http://schemas.microsoft.com/office/drawing/2014/main" id="{E225CF15-B196-4B5A-9618-90C4CA445E28}"/>
+              </a:ext>
+            </a:extLst>
+          </p:cNvPr>
           <p:cNvSpPr>
             <a:spLocks noGrp="1"/>
           </p:cNvSpPr>
@@ -3598,22 +3979,26 @@
           </a:prstGeom>
         </p:spPr>
         <p:txBody>
-          <a:bodyPr vert="horz" lIns="91440" tIns="45720" rIns="91440" bIns="45720" rtlCol="0" anchor="ctr">
+          <a:bodyPr vert="horz" lIns="91440" tIns="45720" rIns="91440" bIns="45720" anchor="ctr">
             <a:normAutofit/>
           </a:bodyPr>
           <a:lstStyle/>
           <a:p>
             <a:r>
-              <a:rPr lang="en-US" smtClean="0"/>
               <a:t>Click to edit Master title style</a:t>
             </a:r>
-            <a:endParaRPr lang="en-US"/>
-          </a:p>
-        </p:txBody>
-      </p:sp>
-      <p:sp>
-        <p:nvSpPr>
-          <p:cNvPr id="3" name="Text Placeholder 2"/>
+          </a:p>
+        </p:txBody>
+      </p:sp>
+      <p:sp>
+        <p:nvSpPr>
+          <p:cNvPr id="3" name="Text Placeholder 2">
+            <a:extLst>
+              <a:ext uri="{FF2B5EF4-FFF2-40B4-BE49-F238E27FC236}">
+                <a16:creationId xmlns:a16="http://schemas.microsoft.com/office/drawing/2014/main" id="{45D9526C-8204-4F3A-908D-2BA0F981B363}"/>
+              </a:ext>
+            </a:extLst>
+          </p:cNvPr>
           <p:cNvSpPr>
             <a:spLocks noGrp="1"/>
           </p:cNvSpPr>
@@ -3631,56 +4016,66 @@
           </a:prstGeom>
         </p:spPr>
         <p:txBody>
-          <a:bodyPr vert="horz" lIns="91440" tIns="45720" rIns="91440" bIns="45720" rtlCol="0">
+          <a:bodyPr vert="horz" lIns="91440" tIns="45720" rIns="91440" bIns="45720">
             <a:normAutofit/>
           </a:bodyPr>
           <a:lstStyle/>
           <a:p>
-            <a:pPr lvl="0"/>
-            <a:r>
-              <a:rPr lang="en-US" smtClean="0"/>
+            <a:pPr lvl="0">
+              <a:buNone/>
+            </a:pPr>
+            <a:r>
               <a:t>Click to edit Master text styles</a:t>
             </a:r>
           </a:p>
           <a:p>
-            <a:pPr lvl="1"/>
-            <a:r>
-              <a:rPr lang="en-US" smtClean="0"/>
+            <a:pPr lvl="1">
+              <a:buNone/>
+            </a:pPr>
+            <a:r>
               <a:t>Second level</a:t>
             </a:r>
           </a:p>
           <a:p>
-            <a:pPr lvl="2"/>
-            <a:r>
-              <a:rPr lang="en-US" smtClean="0"/>
+            <a:pPr lvl="2">
+              <a:buNone/>
+            </a:pPr>
+            <a:r>
               <a:t>Third level</a:t>
             </a:r>
           </a:p>
           <a:p>
-            <a:pPr lvl="3"/>
-            <a:r>
-              <a:rPr lang="en-US" smtClean="0"/>
+            <a:pPr lvl="3">
+              <a:buNone/>
+            </a:pPr>
+            <a:r>
               <a:t>Fourth level</a:t>
             </a:r>
           </a:p>
           <a:p>
-            <a:pPr lvl="4"/>
-            <a:r>
-              <a:rPr lang="en-US" smtClean="0"/>
+            <a:pPr lvl="4">
+              <a:buNone/>
+            </a:pPr>
+            <a:r>
               <a:t>Fifth level</a:t>
             </a:r>
-            <a:endParaRPr lang="en-US"/>
-          </a:p>
-        </p:txBody>
-      </p:sp>
-      <p:sp>
-        <p:nvSpPr>
-          <p:cNvPr id="4" name="Date Placeholder 3"/>
-          <p:cNvSpPr>
-            <a:spLocks noGrp="1"/>
-          </p:cNvSpPr>
-          <p:nvPr>
-            <p:ph type="dt" sz="half" idx="2"/>
+          </a:p>
+        </p:txBody>
+      </p:sp>
+      <p:sp>
+        <p:nvSpPr>
+          <p:cNvPr id="4" name="Date Placeholder 3">
+            <a:extLst>
+              <a:ext uri="{FF2B5EF4-FFF2-40B4-BE49-F238E27FC236}">
+                <a16:creationId xmlns:a16="http://schemas.microsoft.com/office/drawing/2014/main" id="{C32EEFDE-09C8-4EF9-AB0E-F9D73A3EB818}"/>
+              </a:ext>
+            </a:extLst>
+          </p:cNvPr>
+          <p:cNvSpPr>
+            <a:spLocks noGrp="1"/>
+          </p:cNvSpPr>
+          <p:nvPr>
+            <p:ph type="dt" idx="2"/>
           </p:nvPr>
         </p:nvSpPr>
         <p:spPr>
@@ -3693,9 +4088,10 @@
           </a:prstGeom>
         </p:spPr>
         <p:txBody>
-          <a:bodyPr vert="horz" lIns="91440" tIns="45720" rIns="91440" bIns="45720" rtlCol="0" anchor="ctr"/>
+          <a:bodyPr vert="horz" lIns="91440" tIns="45720" rIns="91440" bIns="45720" anchor="ctr"/>
           <a:lstStyle>
             <a:lvl1pPr algn="l">
+              <a:buNone/>
               <a:defRPr sz="1200">
                 <a:solidFill>
                   <a:schemeClr val="tx1">
@@ -3707,21 +4103,26 @@
           </a:lstStyle>
           <a:p>
             <a:fld id="{5BCAD085-E8A6-8845-BD4E-CB4CCA059FC4}" type="datetimeFigureOut">
-              <a:rPr lang="en-US" smtClean="0"/>
-              <a:t>1/27/13</a:t>
+              <a:t>9/27/2026</a:t>
             </a:fld>
-            <a:endParaRPr lang="en-US"/>
-          </a:p>
-        </p:txBody>
-      </p:sp>
-      <p:sp>
-        <p:nvSpPr>
-          <p:cNvPr id="5" name="Footer Placeholder 4"/>
-          <p:cNvSpPr>
-            <a:spLocks noGrp="1"/>
-          </p:cNvSpPr>
-          <p:nvPr>
-            <p:ph type="ftr" sz="quarter" idx="3"/>
+            <a:endParaRPr/>
+          </a:p>
+        </p:txBody>
+      </p:sp>
+      <p:sp>
+        <p:nvSpPr>
+          <p:cNvPr id="5" name="Footer Placeholder 4">
+            <a:extLst>
+              <a:ext uri="{FF2B5EF4-FFF2-40B4-BE49-F238E27FC236}">
+                <a16:creationId xmlns:a16="http://schemas.microsoft.com/office/drawing/2014/main" id="{05327258-8A3B-4F59-8EDA-5B4584510EC8}"/>
+              </a:ext>
+            </a:extLst>
+          </p:cNvPr>
+          <p:cNvSpPr>
+            <a:spLocks noGrp="1"/>
+          </p:cNvSpPr>
+          <p:nvPr>
+            <p:ph type="ftr" idx="3"/>
           </p:nvPr>
         </p:nvSpPr>
         <p:spPr>
@@ -3734,9 +4135,10 @@
           </a:prstGeom>
         </p:spPr>
         <p:txBody>
-          <a:bodyPr vert="horz" lIns="91440" tIns="45720" rIns="91440" bIns="45720" rtlCol="0" anchor="ctr"/>
+          <a:bodyPr vert="horz" lIns="91440" tIns="45720" rIns="91440" bIns="45720" anchor="ctr"/>
           <a:lstStyle>
             <a:lvl1pPr algn="ctr">
+              <a:buNone/>
               <a:defRPr sz="1200">
                 <a:solidFill>
                   <a:schemeClr val="tx1">
@@ -3747,18 +4149,24 @@
             </a:lvl1pPr>
           </a:lstStyle>
           <a:p>
-            <a:endParaRPr lang="en-US"/>
-          </a:p>
-        </p:txBody>
-      </p:sp>
-      <p:sp>
-        <p:nvSpPr>
-          <p:cNvPr id="6" name="Slide Number Placeholder 5"/>
-          <p:cNvSpPr>
-            <a:spLocks noGrp="1"/>
-          </p:cNvSpPr>
-          <p:nvPr>
-            <p:ph type="sldNum" sz="quarter" idx="4"/>
+            <a:endParaRPr/>
+          </a:p>
+        </p:txBody>
+      </p:sp>
+      <p:sp>
+        <p:nvSpPr>
+          <p:cNvPr id="6" name="Slide Number Placeholder 5">
+            <a:extLst>
+              <a:ext uri="{FF2B5EF4-FFF2-40B4-BE49-F238E27FC236}">
+                <a16:creationId xmlns:a16="http://schemas.microsoft.com/office/drawing/2014/main" id="{DBACE27B-96E8-46EF-97BE-E3B183341E3E}"/>
+              </a:ext>
+            </a:extLst>
+          </p:cNvPr>
+          <p:cNvSpPr>
+            <a:spLocks noGrp="1"/>
+          </p:cNvSpPr>
+          <p:nvPr>
+            <p:ph type="sldNum" idx="4"/>
           </p:nvPr>
         </p:nvSpPr>
         <p:spPr>
@@ -3771,9 +4179,10 @@
           </a:prstGeom>
         </p:spPr>
         <p:txBody>
-          <a:bodyPr vert="horz" lIns="91440" tIns="45720" rIns="91440" bIns="45720" rtlCol="0" anchor="ctr"/>
+          <a:bodyPr vert="horz" lIns="91440" tIns="45720" rIns="91440" bIns="45720" anchor="ctr"/>
           <a:lstStyle>
             <a:lvl1pPr algn="r">
+              <a:buNone/>
               <a:defRPr sz="1200">
                 <a:solidFill>
                   <a:schemeClr val="tx1">
@@ -3785,19 +4194,13 @@
           </a:lstStyle>
           <a:p>
             <a:fld id="{C1FF6DA9-008F-8B48-92A6-B652298478BF}" type="slidenum">
-              <a:rPr lang="en-US" smtClean="0"/>
               <a:t>‹#›</a:t>
             </a:fld>
-            <a:endParaRPr lang="en-US"/>
+            <a:endParaRPr/>
           </a:p>
         </p:txBody>
       </p:sp>
     </p:spTree>
-    <p:extLst>
-      <p:ext uri="{BB962C8B-B14F-4D97-AF65-F5344CB8AC3E}">
-        <p14:creationId xmlns:p14="http://schemas.microsoft.com/office/powerpoint/2010/main" val="2209977519"/>
-      </p:ext>
-    </p:extLst>
   </p:cSld>
   <p:clrMap bg1="lt1" tx1="dk1" bg2="lt2" tx2="dk2" accent1="accent1" accent2="accent2" accent3="accent3" accent4="accent4" accent5="accent5" accent6="accent6" hlink="hlink" folHlink="folHlink"/>
   <p:sldLayoutIdLst>
@@ -3815,7 +4218,7 @@
   </p:sldLayoutIdLst>
   <p:txStyles>
     <p:titleStyle>
-      <a:lvl1pPr algn="ctr" defTabSz="457200" rtl="0" eaLnBrk="1" latinLnBrk="0" hangingPunct="1">
+      <a:lvl1pPr algn="ctr" defTabSz="457200">
         <a:spcBef>
           <a:spcPct val="0"/>
         </a:spcBef>
@@ -3825,13 +4228,13 @@
             <a:schemeClr val="tx1"/>
           </a:solidFill>
           <a:latin typeface="+mj-lt"/>
-          <a:ea typeface="+mj-ea"/>
-          <a:cs typeface="+mj-cs"/>
+          <a:ea typeface="+mj-lt"/>
+          <a:cs typeface="+mj-lt"/>
         </a:defRPr>
       </a:lvl1pPr>
     </p:titleStyle>
     <p:bodyStyle>
-      <a:lvl1pPr marL="342900" indent="-342900" algn="l" defTabSz="457200" rtl="0" eaLnBrk="1" latinLnBrk="0" hangingPunct="1">
+      <a:lvl1pPr marL="342900" indent="-342900" algn="l" defTabSz="457200">
         <a:spcBef>
           <a:spcPct val="20000"/>
         </a:spcBef>
@@ -3842,11 +4245,11 @@
             <a:schemeClr val="tx1"/>
           </a:solidFill>
           <a:latin typeface="+mn-lt"/>
-          <a:ea typeface="+mn-ea"/>
-          <a:cs typeface="+mn-cs"/>
+          <a:ea typeface="+mn-lt"/>
+          <a:cs typeface="+mn-lt"/>
         </a:defRPr>
       </a:lvl1pPr>
-      <a:lvl2pPr marL="742950" indent="-285750" algn="l" defTabSz="457200" rtl="0" eaLnBrk="1" latinLnBrk="0" hangingPunct="1">
+      <a:lvl2pPr marL="742950" indent="-285750" algn="l" defTabSz="457200">
         <a:spcBef>
           <a:spcPct val="20000"/>
         </a:spcBef>
@@ -3857,11 +4260,11 @@
             <a:schemeClr val="tx1"/>
           </a:solidFill>
           <a:latin typeface="+mn-lt"/>
-          <a:ea typeface="+mn-ea"/>
-          <a:cs typeface="+mn-cs"/>
+          <a:ea typeface="+mn-lt"/>
+          <a:cs typeface="+mn-lt"/>
         </a:defRPr>
       </a:lvl2pPr>
-      <a:lvl3pPr marL="1143000" indent="-228600" algn="l" defTabSz="457200" rtl="0" eaLnBrk="1" latinLnBrk="0" hangingPunct="1">
+      <a:lvl3pPr marL="1143000" indent="-228600" algn="l" defTabSz="457200">
         <a:spcBef>
           <a:spcPct val="20000"/>
         </a:spcBef>
@@ -3872,11 +4275,11 @@
             <a:schemeClr val="tx1"/>
           </a:solidFill>
           <a:latin typeface="+mn-lt"/>
-          <a:ea typeface="+mn-ea"/>
-          <a:cs typeface="+mn-cs"/>
+          <a:ea typeface="+mn-lt"/>
+          <a:cs typeface="+mn-lt"/>
         </a:defRPr>
       </a:lvl3pPr>
-      <a:lvl4pPr marL="1600200" indent="-228600" algn="l" defTabSz="457200" rtl="0" eaLnBrk="1" latinLnBrk="0" hangingPunct="1">
+      <a:lvl4pPr marL="1600200" indent="-228600" algn="l" defTabSz="457200">
         <a:spcBef>
           <a:spcPct val="20000"/>
         </a:spcBef>
@@ -3887,11 +4290,11 @@
             <a:schemeClr val="tx1"/>
           </a:solidFill>
           <a:latin typeface="+mn-lt"/>
-          <a:ea typeface="+mn-ea"/>
-          <a:cs typeface="+mn-cs"/>
+          <a:ea typeface="+mn-lt"/>
+          <a:cs typeface="+mn-lt"/>
         </a:defRPr>
       </a:lvl4pPr>
-      <a:lvl5pPr marL="2057400" indent="-228600" algn="l" defTabSz="457200" rtl="0" eaLnBrk="1" latinLnBrk="0" hangingPunct="1">
+      <a:lvl5pPr marL="2057400" indent="-228600" algn="l" defTabSz="457200">
         <a:spcBef>
           <a:spcPct val="20000"/>
         </a:spcBef>
@@ -3902,11 +4305,11 @@
             <a:schemeClr val="tx1"/>
           </a:solidFill>
           <a:latin typeface="+mn-lt"/>
-          <a:ea typeface="+mn-ea"/>
-          <a:cs typeface="+mn-cs"/>
+          <a:ea typeface="+mn-lt"/>
+          <a:cs typeface="+mn-lt"/>
         </a:defRPr>
       </a:lvl5pPr>
-      <a:lvl6pPr marL="2514600" indent="-228600" algn="l" defTabSz="457200" rtl="0" eaLnBrk="1" latinLnBrk="0" hangingPunct="1">
+      <a:lvl6pPr marL="2514600" indent="-228600" algn="l" defTabSz="457200">
         <a:spcBef>
           <a:spcPct val="20000"/>
         </a:spcBef>
@@ -3917,11 +4320,11 @@
             <a:schemeClr val="tx1"/>
           </a:solidFill>
           <a:latin typeface="+mn-lt"/>
-          <a:ea typeface="+mn-ea"/>
-          <a:cs typeface="+mn-cs"/>
+          <a:ea typeface="+mn-lt"/>
+          <a:cs typeface="+mn-lt"/>
         </a:defRPr>
       </a:lvl6pPr>
-      <a:lvl7pPr marL="2971800" indent="-228600" algn="l" defTabSz="457200" rtl="0" eaLnBrk="1" latinLnBrk="0" hangingPunct="1">
+      <a:lvl7pPr marL="2971800" indent="-228600" algn="l" defTabSz="457200">
         <a:spcBef>
           <a:spcPct val="20000"/>
         </a:spcBef>
@@ -3932,11 +4335,11 @@
             <a:schemeClr val="tx1"/>
           </a:solidFill>
           <a:latin typeface="+mn-lt"/>
-          <a:ea typeface="+mn-ea"/>
-          <a:cs typeface="+mn-cs"/>
+          <a:ea typeface="+mn-lt"/>
+          <a:cs typeface="+mn-lt"/>
         </a:defRPr>
       </a:lvl7pPr>
-      <a:lvl8pPr marL="3429000" indent="-228600" algn="l" defTabSz="457200" rtl="0" eaLnBrk="1" latinLnBrk="0" hangingPunct="1">
+      <a:lvl8pPr marL="3429000" indent="-228600" algn="l" defTabSz="457200">
         <a:spcBef>
           <a:spcPct val="20000"/>
         </a:spcBef>
@@ -3947,11 +4350,11 @@
             <a:schemeClr val="tx1"/>
           </a:solidFill>
           <a:latin typeface="+mn-lt"/>
-          <a:ea typeface="+mn-ea"/>
-          <a:cs typeface="+mn-cs"/>
+          <a:ea typeface="+mn-lt"/>
+          <a:cs typeface="+mn-lt"/>
         </a:defRPr>
       </a:lvl8pPr>
-      <a:lvl9pPr marL="3886200" indent="-228600" algn="l" defTabSz="457200" rtl="0" eaLnBrk="1" latinLnBrk="0" hangingPunct="1">
+      <a:lvl9pPr marL="3886200" indent="-228600" algn="l" defTabSz="457200">
         <a:spcBef>
           <a:spcPct val="20000"/>
         </a:spcBef>
@@ -3962,103 +4365,109 @@
             <a:schemeClr val="tx1"/>
           </a:solidFill>
           <a:latin typeface="+mn-lt"/>
-          <a:ea typeface="+mn-ea"/>
-          <a:cs typeface="+mn-cs"/>
+          <a:ea typeface="+mn-lt"/>
+          <a:cs typeface="+mn-lt"/>
         </a:defRPr>
       </a:lvl9pPr>
     </p:bodyStyle>
     <p:otherStyle>
-      <a:defPPr>
-        <a:defRPr lang="en-US"/>
-      </a:defPPr>
-      <a:lvl1pPr marL="0" algn="l" defTabSz="457200" rtl="0" eaLnBrk="1" latinLnBrk="0" hangingPunct="1">
+      <a:lvl1pPr marL="0" algn="l" defTabSz="457200">
+        <a:buNone/>
         <a:defRPr sz="1800" kern="1200">
           <a:solidFill>
             <a:schemeClr val="tx1"/>
           </a:solidFill>
           <a:latin typeface="+mn-lt"/>
-          <a:ea typeface="+mn-ea"/>
-          <a:cs typeface="+mn-cs"/>
+          <a:ea typeface="+mn-lt"/>
+          <a:cs typeface="+mn-lt"/>
         </a:defRPr>
       </a:lvl1pPr>
-      <a:lvl2pPr marL="457200" algn="l" defTabSz="457200" rtl="0" eaLnBrk="1" latinLnBrk="0" hangingPunct="1">
+      <a:lvl2pPr marL="457200" algn="l" defTabSz="457200">
+        <a:buNone/>
         <a:defRPr sz="1800" kern="1200">
           <a:solidFill>
             <a:schemeClr val="tx1"/>
           </a:solidFill>
           <a:latin typeface="+mn-lt"/>
-          <a:ea typeface="+mn-ea"/>
-          <a:cs typeface="+mn-cs"/>
+          <a:ea typeface="+mn-lt"/>
+          <a:cs typeface="+mn-lt"/>
         </a:defRPr>
       </a:lvl2pPr>
-      <a:lvl3pPr marL="914400" algn="l" defTabSz="457200" rtl="0" eaLnBrk="1" latinLnBrk="0" hangingPunct="1">
+      <a:lvl3pPr marL="914400" algn="l" defTabSz="457200">
+        <a:buNone/>
         <a:defRPr sz="1800" kern="1200">
           <a:solidFill>
             <a:schemeClr val="tx1"/>
           </a:solidFill>
           <a:latin typeface="+mn-lt"/>
-          <a:ea typeface="+mn-ea"/>
-          <a:cs typeface="+mn-cs"/>
+          <a:ea typeface="+mn-lt"/>
+          <a:cs typeface="+mn-lt"/>
         </a:defRPr>
       </a:lvl3pPr>
-      <a:lvl4pPr marL="1371600" algn="l" defTabSz="457200" rtl="0" eaLnBrk="1" latinLnBrk="0" hangingPunct="1">
+      <a:lvl4pPr marL="1371600" algn="l" defTabSz="457200">
+        <a:buNone/>
         <a:defRPr sz="1800" kern="1200">
           <a:solidFill>
             <a:schemeClr val="tx1"/>
           </a:solidFill>
           <a:latin typeface="+mn-lt"/>
-          <a:ea typeface="+mn-ea"/>
-          <a:cs typeface="+mn-cs"/>
+          <a:ea typeface="+mn-lt"/>
+          <a:cs typeface="+mn-lt"/>
         </a:defRPr>
       </a:lvl4pPr>
-      <a:lvl5pPr marL="1828800" algn="l" defTabSz="457200" rtl="0" eaLnBrk="1" latinLnBrk="0" hangingPunct="1">
+      <a:lvl5pPr marL="1828800" algn="l" defTabSz="457200">
+        <a:buNone/>
         <a:defRPr sz="1800" kern="1200">
           <a:solidFill>
             <a:schemeClr val="tx1"/>
           </a:solidFill>
           <a:latin typeface="+mn-lt"/>
-          <a:ea typeface="+mn-ea"/>
-          <a:cs typeface="+mn-cs"/>
+          <a:ea typeface="+mn-lt"/>
+          <a:cs typeface="+mn-lt"/>
         </a:defRPr>
       </a:lvl5pPr>
-      <a:lvl6pPr marL="2286000" algn="l" defTabSz="457200" rtl="0" eaLnBrk="1" latinLnBrk="0" hangingPunct="1">
+      <a:lvl6pPr marL="2286000" algn="l" defTabSz="457200">
+        <a:buNone/>
         <a:defRPr sz="1800" kern="1200">
           <a:solidFill>
             <a:schemeClr val="tx1"/>
           </a:solidFill>
           <a:latin typeface="+mn-lt"/>
-          <a:ea typeface="+mn-ea"/>
-          <a:cs typeface="+mn-cs"/>
+          <a:ea typeface="+mn-lt"/>
+          <a:cs typeface="+mn-lt"/>
         </a:defRPr>
       </a:lvl6pPr>
-      <a:lvl7pPr marL="2743200" algn="l" defTabSz="457200" rtl="0" eaLnBrk="1" latinLnBrk="0" hangingPunct="1">
+      <a:lvl7pPr marL="2743200" algn="l" defTabSz="457200">
+        <a:buNone/>
         <a:defRPr sz="1800" kern="1200">
           <a:solidFill>
             <a:schemeClr val="tx1"/>
           </a:solidFill>
           <a:latin typeface="+mn-lt"/>
-          <a:ea typeface="+mn-ea"/>
-          <a:cs typeface="+mn-cs"/>
+          <a:ea typeface="+mn-lt"/>
+          <a:cs typeface="+mn-lt"/>
         </a:defRPr>
       </a:lvl7pPr>
-      <a:lvl8pPr marL="3200400" algn="l" defTabSz="457200" rtl="0" eaLnBrk="1" latinLnBrk="0" hangingPunct="1">
+      <a:lvl8pPr marL="3200400" algn="l" defTabSz="457200">
+        <a:buNone/>
         <a:defRPr sz="1800" kern="1200">
           <a:solidFill>
             <a:schemeClr val="tx1"/>
           </a:solidFill>
           <a:latin typeface="+mn-lt"/>
-          <a:ea typeface="+mn-ea"/>
-          <a:cs typeface="+mn-cs"/>
+          <a:ea typeface="+mn-lt"/>
+          <a:cs typeface="+mn-lt"/>
         </a:defRPr>
       </a:lvl8pPr>
-      <a:lvl9pPr marL="3657600" algn="l" defTabSz="457200" rtl="0" eaLnBrk="1" latinLnBrk="0" hangingPunct="1">
+      <a:lvl9pPr marL="3657600" algn="l" defTabSz="457200">
+        <a:buNone/>
         <a:defRPr sz="1800" kern="1200">
           <a:solidFill>
             <a:schemeClr val="tx1"/>
           </a:solidFill>
           <a:latin typeface="+mn-lt"/>
-          <a:ea typeface="+mn-ea"/>
-          <a:cs typeface="+mn-cs"/>
+          <a:ea typeface="+mn-lt"/>
+          <a:cs typeface="+mn-lt"/>
         </a:defRPr>
       </a:lvl9pPr>
     </p:otherStyle>
@@ -4067,7 +4476,7 @@
 </file>
 
 <file path=ppt/slides/slide1.xml><?xml version="1.0" encoding="utf-8"?>
-<p:sld xmlns:a="http://schemas.openxmlformats.org/drawingml/2006/main" xmlns:p="http://schemas.openxmlformats.org/presentationml/2006/main" xmlns:r="http://schemas.openxmlformats.org/officeDocument/2006/relationships">
+<p:sld xmlns:a="http://schemas.openxmlformats.org/drawingml/2006/main" xmlns:r="http://schemas.openxmlformats.org/officeDocument/2006/relationships" xmlns:p="http://schemas.openxmlformats.org/presentationml/2006/main">
   <p:cSld>
     <p:bg>
       <p:bgPr>
@@ -4083,17 +4492,32 @@
         <p:cNvGrpSpPr/>
         <p:nvPr/>
       </p:nvGrpSpPr>
-      <p:grpSpPr/>
-      <p:sp>
-        <p:nvSpPr>
-          <p:cNvPr id="2" name="TextBox 1"/>
-          <p:cNvSpPr txBox="1"/>
+      <p:grpSpPr>
+        <a:xfrm>
+          <a:off x="0" y="0"/>
+          <a:ext cx="0" cy="0"/>
+          <a:chOff x="0" y="0"/>
+          <a:chExt cx="0" cy="0"/>
+        </a:xfrm>
+      </p:grpSpPr>
+      <p:sp>
+        <p:nvSpPr>
+          <p:cNvPr id="2" name="TextBox 1">
+            <a:extLst>
+              <a:ext uri="{FF2B5EF4-FFF2-40B4-BE49-F238E27FC236}">
+                <a16:creationId xmlns:a16="http://schemas.microsoft.com/office/drawing/2014/main" id="{66A146AF-E2AC-4CFA-A11B-A67FD4DB42AC}"/>
+              </a:ext>
+            </a:extLst>
+          </p:cNvPr>
+          <p:cNvSpPr>
+            <a:spLocks noGrp="1"/>
+          </p:cNvSpPr>
           <p:nvPr/>
         </p:nvSpPr>
         <p:spPr>
           <a:xfrm>
             <a:off x="640080" y="2103120"/>
-            <a:ext cx="10607040" cy="3291840"/>
+            <a:ext cx="10607040" cy="2076450"/>
           </a:xfrm>
           <a:prstGeom prst="rect">
             <a:avLst/>
@@ -4101,7 +4525,7 @@
           <a:noFill/>
         </p:spPr>
         <p:txBody>
-          <a:bodyPr wrap="square" lIns="0" rIns="0" tIns="0" bIns="0">
+          <a:bodyPr wrap="square" lIns="0" tIns="0" rIns="0" bIns="0">
             <a:spAutoFit/>
           </a:bodyPr>
           <a:lstStyle/>
@@ -4112,6 +4536,8 @@
                   <a:srgbClr val="CF3338"/>
                 </a:solidFill>
                 <a:latin typeface="Arial Black"/>
+                <a:ea typeface="Arial Black"/>
+                <a:cs typeface="Arial Black"/>
               </a:rPr>
               <a:t>GUERRILLA AI FOR EXCEL. A LIVE SERIES, DAY 2 OF 5</a:t>
             </a:r>
@@ -4121,6 +4547,7 @@
               <a:spcBef>
                 <a:spcPts val="1000"/>
               </a:spcBef>
+              <a:buNone/>
             </a:pPr>
             <a:r>
               <a:rPr sz="4200" b="1" i="0">
@@ -4128,6 +4555,8 @@
                   <a:srgbClr val="1F2120"/>
                 </a:solidFill>
                 <a:latin typeface="Arial Black"/>
+                <a:ea typeface="Arial Black"/>
+                <a:cs typeface="Arial Black"/>
               </a:rPr>
               <a:t>Make your data AI-readable</a:t>
             </a:r>
@@ -4137,6 +4566,7 @@
               <a:spcBef>
                 <a:spcPts val="1400"/>
               </a:spcBef>
+              <a:buNone/>
             </a:pPr>
             <a:r>
               <a:rPr sz="2000" b="0" i="0">
@@ -4144,6 +4574,8 @@
                   <a:srgbClr val="707070"/>
                 </a:solidFill>
                 <a:latin typeface="Arial"/>
+                <a:ea typeface="Arial"/>
+                <a:cs typeface="Arial"/>
               </a:rPr>
               <a:t>Tables and structured references: the prep move that makes every AI sharper.</a:t>
             </a:r>
@@ -4152,8 +4584,16 @@
       </p:sp>
       <p:sp>
         <p:nvSpPr>
-          <p:cNvPr id="3" name="TextBox 2"/>
-          <p:cNvSpPr txBox="1"/>
+          <p:cNvPr id="3" name="TextBox 2">
+            <a:extLst>
+              <a:ext uri="{FF2B5EF4-FFF2-40B4-BE49-F238E27FC236}">
+                <a16:creationId xmlns:a16="http://schemas.microsoft.com/office/drawing/2014/main" id="{BC8D3B2E-8C31-4731-B48F-F32B9CB37797}"/>
+              </a:ext>
+            </a:extLst>
+          </p:cNvPr>
+          <p:cNvSpPr>
+            <a:spLocks noGrp="1"/>
+          </p:cNvSpPr>
           <p:nvPr/>
         </p:nvSpPr>
         <p:spPr>
@@ -4167,7 +4607,7 @@
           <a:noFill/>
         </p:spPr>
         <p:txBody>
-          <a:bodyPr wrap="square" lIns="0" rIns="0" tIns="0" bIns="0">
+          <a:bodyPr wrap="square" lIns="0" tIns="0" rIns="0" bIns="0">
             <a:spAutoFit/>
           </a:bodyPr>
           <a:lstStyle/>
@@ -4178,6 +4618,8 @@
                   <a:srgbClr val="707070"/>
                 </a:solidFill>
                 <a:latin typeface="Arial"/>
+                <a:ea typeface="Arial"/>
+                <a:cs typeface="Arial"/>
               </a:rPr>
               <a:t>Live Mon Sep 28 to Fri Oct 2, 12:00 to 12:20 PM ET. Sessions are recorded.</a:t>
             </a:r>
@@ -4186,8 +4628,16 @@
       </p:sp>
       <p:sp>
         <p:nvSpPr>
-          <p:cNvPr id="4" name="TextBox 3"/>
-          <p:cNvSpPr txBox="1"/>
+          <p:cNvPr id="4" name="TextBox 3">
+            <a:extLst>
+              <a:ext uri="{FF2B5EF4-FFF2-40B4-BE49-F238E27FC236}">
+                <a16:creationId xmlns:a16="http://schemas.microsoft.com/office/drawing/2014/main" id="{225F7FE2-8943-46FD-9092-BFEEA5857400}"/>
+              </a:ext>
+            </a:extLst>
+          </p:cNvPr>
+          <p:cNvSpPr>
+            <a:spLocks noGrp="1"/>
+          </p:cNvSpPr>
           <p:nvPr/>
         </p:nvSpPr>
         <p:spPr>
@@ -4201,7 +4651,7 @@
           <a:noFill/>
         </p:spPr>
         <p:txBody>
-          <a:bodyPr wrap="square" lIns="0" rIns="0" tIns="0" bIns="0">
+          <a:bodyPr wrap="square" lIns="0" tIns="0" rIns="0" bIns="0">
             <a:spAutoFit/>
           </a:bodyPr>
           <a:lstStyle/>
@@ -4212,13 +4662,230 @@
                   <a:srgbClr val="CF3338"/>
                 </a:solidFill>
                 <a:latin typeface="Arial Black"/>
+                <a:ea typeface="Arial Black"/>
+                <a:cs typeface="Arial Black"/>
               </a:rPr>
               <a:t>STRINGFEST ANALYTICS</a:t>
             </a:r>
           </a:p>
         </p:txBody>
       </p:sp>
+      <p:sp>
+        <p:nvSpPr>
+          <p:cNvPr id="5" name="Chat prompt panel">
+            <a:extLst>
+              <a:ext uri="{FF2B5EF4-FFF2-40B4-BE49-F238E27FC236}">
+                <a16:creationId xmlns:a16="http://schemas.microsoft.com/office/drawing/2014/main" id="{478EE6C4-CE7E-47CA-A3AC-FE8B63CABFD0}"/>
+              </a:ext>
+            </a:extLst>
+          </p:cNvPr>
+          <p:cNvSpPr>
+            <a:spLocks noGrp="1"/>
+          </p:cNvSpPr>
+          <p:nvPr/>
+        </p:nvSpPr>
+        <p:spPr>
+          <a:xfrm>
+            <a:off x="638175" y="4352925"/>
+            <a:ext cx="10896600" cy="1352550"/>
+          </a:xfrm>
+          <a:prstGeom prst="rect">
+            <a:avLst/>
+          </a:prstGeom>
+          <a:solidFill>
+            <a:srgbClr val="1F2120"/>
+          </a:solidFill>
+          <a:ln w="0">
+            <a:noFill/>
+          </a:ln>
+        </p:spPr>
+        <p:txBody>
+          <a:bodyPr wrap="square" lIns="0" tIns="0" rIns="0" bIns="0">
+            <a:noAutofit/>
+          </a:bodyPr>
+          <a:lstStyle/>
+          <a:p>
+            <a:endParaRPr/>
+          </a:p>
+        </p:txBody>
+      </p:sp>
+      <p:sp>
+        <p:nvSpPr>
+          <p:cNvPr id="6" name="Chat question">
+            <a:extLst>
+              <a:ext uri="{FF2B5EF4-FFF2-40B4-BE49-F238E27FC236}">
+                <a16:creationId xmlns:a16="http://schemas.microsoft.com/office/drawing/2014/main" id="{3669CF47-C091-499B-9779-012E40FE20A3}"/>
+              </a:ext>
+            </a:extLst>
+          </p:cNvPr>
+          <p:cNvSpPr>
+            <a:spLocks noGrp="1"/>
+          </p:cNvSpPr>
+          <p:nvPr/>
+        </p:nvSpPr>
+        <p:spPr>
+          <a:xfrm>
+            <a:off x="857250" y="4495800"/>
+            <a:ext cx="10429875" cy="381000"/>
+          </a:xfrm>
+          <a:prstGeom prst="rect">
+            <a:avLst/>
+          </a:prstGeom>
+          <a:noFill/>
+          <a:ln w="0">
+            <a:noFill/>
+          </a:ln>
+        </p:spPr>
+        <p:txBody>
+          <a:bodyPr wrap="square" lIns="0" tIns="0" rIns="0" bIns="0">
+            <a:noAutofit/>
+          </a:bodyPr>
+          <a:lstStyle/>
+          <a:p>
+            <a:pPr>
+              <a:defRPr sz="2100" b="1">
+                <a:solidFill>
+                  <a:srgbClr val="FFFFFF"/>
+                </a:solidFill>
+                <a:latin typeface="Arial"/>
+                <a:ea typeface="Arial"/>
+                <a:cs typeface="Arial"/>
+              </a:defRPr>
+            </a:pPr>
+            <a:r>
+              <a:rPr sz="2100" b="1">
+                <a:solidFill>
+                  <a:srgbClr val="FFFFFF"/>
+                </a:solidFill>
+                <a:latin typeface="Arial"/>
+                <a:ea typeface="Arial"/>
+                <a:cs typeface="Arial"/>
+              </a:rPr>
+              <a:t>Do you use Excel tables already?</a:t>
+            </a:r>
+          </a:p>
+        </p:txBody>
+      </p:sp>
+      <p:sp>
+        <p:nvSpPr>
+          <p:cNvPr id="7" name="Chat choices">
+            <a:extLst>
+              <a:ext uri="{FF2B5EF4-FFF2-40B4-BE49-F238E27FC236}">
+                <a16:creationId xmlns:a16="http://schemas.microsoft.com/office/drawing/2014/main" id="{3ECE6A1F-B37B-4DDA-BED7-CE87E2A53A29}"/>
+              </a:ext>
+            </a:extLst>
+          </p:cNvPr>
+          <p:cNvSpPr>
+            <a:spLocks noGrp="1"/>
+          </p:cNvSpPr>
+          <p:nvPr/>
+        </p:nvSpPr>
+        <p:spPr>
+          <a:xfrm>
+            <a:off x="857250" y="4962525"/>
+            <a:ext cx="6858000" cy="419100"/>
+          </a:xfrm>
+          <a:prstGeom prst="rect">
+            <a:avLst/>
+          </a:prstGeom>
+          <a:noFill/>
+          <a:ln w="0">
+            <a:noFill/>
+          </a:ln>
+        </p:spPr>
+        <p:txBody>
+          <a:bodyPr wrap="square" lIns="0" tIns="0" rIns="0" bIns="0">
+            <a:noAutofit/>
+          </a:bodyPr>
+          <a:lstStyle/>
+          <a:p>
+            <a:pPr>
+              <a:defRPr sz="2400" b="1">
+                <a:solidFill>
+                  <a:srgbClr val="FFFFFF"/>
+                </a:solidFill>
+                <a:latin typeface="Arial"/>
+                <a:ea typeface="Arial"/>
+                <a:cs typeface="Arial"/>
+              </a:defRPr>
+            </a:pPr>
+            <a:r>
+              <a:rPr sz="2400" b="1">
+                <a:solidFill>
+                  <a:srgbClr val="FFFFFF"/>
+                </a:solidFill>
+                <a:latin typeface="Arial"/>
+                <a:ea typeface="Arial"/>
+                <a:cs typeface="Arial"/>
+              </a:rPr>
+              <a:t>YES / NO</a:t>
+            </a:r>
+          </a:p>
+        </p:txBody>
+      </p:sp>
+      <p:sp>
+        <p:nvSpPr>
+          <p:cNvPr id="8" name="Chat instruction">
+            <a:extLst>
+              <a:ext uri="{FF2B5EF4-FFF2-40B4-BE49-F238E27FC236}">
+                <a16:creationId xmlns:a16="http://schemas.microsoft.com/office/drawing/2014/main" id="{58603D99-4D5C-47CC-BA46-BBC1D0DB602F}"/>
+              </a:ext>
+            </a:extLst>
+          </p:cNvPr>
+          <p:cNvSpPr>
+            <a:spLocks noGrp="1"/>
+          </p:cNvSpPr>
+          <p:nvPr/>
+        </p:nvSpPr>
+        <p:spPr>
+          <a:xfrm>
+            <a:off x="8143875" y="5095875"/>
+            <a:ext cx="3048000" cy="400050"/>
+          </a:xfrm>
+          <a:prstGeom prst="rect">
+            <a:avLst/>
+          </a:prstGeom>
+          <a:noFill/>
+          <a:ln w="0">
+            <a:noFill/>
+          </a:ln>
+        </p:spPr>
+        <p:txBody>
+          <a:bodyPr wrap="square" lIns="0" tIns="0" rIns="0" bIns="0">
+            <a:noAutofit/>
+          </a:bodyPr>
+          <a:lstStyle/>
+          <a:p>
+            <a:pPr>
+              <a:defRPr sz="1425" b="0">
+                <a:solidFill>
+                  <a:srgbClr val="FFFFFF"/>
+                </a:solidFill>
+                <a:latin typeface="Arial"/>
+                <a:ea typeface="Arial"/>
+                <a:cs typeface="Arial"/>
+              </a:defRPr>
+            </a:pPr>
+            <a:r>
+              <a:rPr sz="1425" b="0">
+                <a:solidFill>
+                  <a:srgbClr val="FFFFFF"/>
+                </a:solidFill>
+                <a:latin typeface="Arial"/>
+                <a:ea typeface="Arial"/>
+                <a:cs typeface="Arial"/>
+              </a:rPr>
+              <a:t>Type one word in chat.</a:t>
+            </a:r>
+          </a:p>
+        </p:txBody>
+      </p:sp>
     </p:spTree>
+    <p:extLst>
+      <p:ext uri="{BB962C8B-B14F-4D97-AF65-F5344CB8AC3E}">
+        <p14:creationId xmlns:p14="http://schemas.microsoft.com/office/powerpoint/2010/main" val="147377805"/>
+      </p:ext>
+    </p:extLst>
   </p:cSld>
   <p:clrMapOvr>
     <a:masterClrMapping/>
@@ -4227,7 +4894,7 @@
 </file>
 
 <file path=ppt/slides/slide2.xml><?xml version="1.0" encoding="utf-8"?>
-<p:sld xmlns:a="http://schemas.openxmlformats.org/drawingml/2006/main" xmlns:p="http://schemas.openxmlformats.org/presentationml/2006/main" xmlns:r="http://schemas.openxmlformats.org/officeDocument/2006/relationships">
+<p:sld xmlns:a="http://schemas.openxmlformats.org/drawingml/2006/main" xmlns:r="http://schemas.openxmlformats.org/officeDocument/2006/relationships" xmlns:p="http://schemas.openxmlformats.org/presentationml/2006/main">
   <p:cSld>
     <p:bg>
       <p:bgPr>
@@ -4243,11 +4910,26 @@
         <p:cNvGrpSpPr/>
         <p:nvPr/>
       </p:nvGrpSpPr>
-      <p:grpSpPr/>
-      <p:sp>
-        <p:nvSpPr>
-          <p:cNvPr id="2" name="TextBox 1"/>
-          <p:cNvSpPr txBox="1"/>
+      <p:grpSpPr>
+        <a:xfrm>
+          <a:off x="0" y="0"/>
+          <a:ext cx="0" cy="0"/>
+          <a:chOff x="0" y="0"/>
+          <a:chExt cx="0" cy="0"/>
+        </a:xfrm>
+      </p:grpSpPr>
+      <p:sp>
+        <p:nvSpPr>
+          <p:cNvPr id="2" name="TextBox 1">
+            <a:extLst>
+              <a:ext uri="{FF2B5EF4-FFF2-40B4-BE49-F238E27FC236}">
+                <a16:creationId xmlns:a16="http://schemas.microsoft.com/office/drawing/2014/main" id="{D277A430-4362-4375-9D72-1654B9D8F0E0}"/>
+              </a:ext>
+            </a:extLst>
+          </p:cNvPr>
+          <p:cNvSpPr>
+            <a:spLocks noGrp="1"/>
+          </p:cNvSpPr>
           <p:nvPr/>
         </p:nvSpPr>
         <p:spPr>
@@ -4261,7 +4943,7 @@
           <a:noFill/>
         </p:spPr>
         <p:txBody>
-          <a:bodyPr wrap="square" lIns="0" rIns="0" tIns="0" bIns="0">
+          <a:bodyPr wrap="square" lIns="0" tIns="0" rIns="0" bIns="0">
             <a:spAutoFit/>
           </a:bodyPr>
           <a:lstStyle/>
@@ -4272,6 +4954,8 @@
                   <a:srgbClr val="1F2120"/>
                 </a:solidFill>
                 <a:latin typeface="Arial Black"/>
+                <a:ea typeface="Arial Black"/>
+                <a:cs typeface="Arial Black"/>
               </a:rPr>
               <a:t>Yesterday in 30 seconds</a:t>
             </a:r>
@@ -4281,6 +4965,7 @@
               <a:spcBef>
                 <a:spcPts val="400"/>
               </a:spcBef>
+              <a:buNone/>
             </a:pPr>
             <a:r>
               <a:rPr sz="1500" b="0" i="1">
@@ -4288,16 +4973,26 @@
                   <a:srgbClr val="CF3338"/>
                 </a:solidFill>
                 <a:latin typeface="Arial"/>
+                <a:ea typeface="Arial"/>
+                <a:cs typeface="Arial"/>
               </a:rPr>
-              <a:t>One dataset, five wins, zero licenses</a:t>
-            </a:r>
-          </a:p>
-        </p:txBody>
-      </p:sp>
-      <p:sp>
-        <p:nvSpPr>
-          <p:cNvPr id="3" name="TextBox 2"/>
-          <p:cNvSpPr txBox="1"/>
+              <a:t>One dataset, five practical wins</a:t>
+            </a:r>
+          </a:p>
+        </p:txBody>
+      </p:sp>
+      <p:sp>
+        <p:nvSpPr>
+          <p:cNvPr id="3" name="TextBox 2">
+            <a:extLst>
+              <a:ext uri="{FF2B5EF4-FFF2-40B4-BE49-F238E27FC236}">
+                <a16:creationId xmlns:a16="http://schemas.microsoft.com/office/drawing/2014/main" id="{EB9F6045-0ED3-4B3E-9CE7-00C20D2E9352}"/>
+              </a:ext>
+            </a:extLst>
+          </p:cNvPr>
+          <p:cNvSpPr>
+            <a:spLocks noGrp="1"/>
+          </p:cNvSpPr>
           <p:nvPr/>
         </p:nvSpPr>
         <p:spPr>
@@ -4311,7 +5006,7 @@
           <a:noFill/>
         </p:spPr>
         <p:txBody>
-          <a:bodyPr wrap="square" lIns="0" rIns="0" tIns="0" bIns="0">
+          <a:bodyPr wrap="square" lIns="0" tIns="0" rIns="0" bIns="0">
             <a:spAutoFit/>
           </a:bodyPr>
           <a:lstStyle/>
@@ -4320,6 +5015,7 @@
               <a:spcAft>
                 <a:spcPts val="700"/>
               </a:spcAft>
+              <a:buNone/>
             </a:pPr>
             <a:r>
               <a:rPr sz="1200" b="1" i="0">
@@ -4327,8 +5023,10 @@
                   <a:srgbClr val="CF3338"/>
                 </a:solidFill>
                 <a:latin typeface="Arial"/>
+                <a:ea typeface="Arial"/>
+                <a:cs typeface="Arial"/>
               </a:rPr>
-              <a:t>▶  </a:t>
+              <a:t>• </a:t>
             </a:r>
             <a:r>
               <a:rPr sz="1600" b="0" i="0">
@@ -4336,6 +5034,8 @@
                   <a:srgbClr val="1F2120"/>
                 </a:solidFill>
                 <a:latin typeface="Arial"/>
+                <a:ea typeface="Arial"/>
+                <a:cs typeface="Arial"/>
               </a:rPr>
               <a:t>Day 1 was The AI already hiding in your Excel.</a:t>
             </a:r>
@@ -4345,6 +5045,7 @@
               <a:spcAft>
                 <a:spcPts val="700"/>
               </a:spcAft>
+              <a:buNone/>
             </a:pPr>
             <a:r>
               <a:rPr sz="1200" b="1" i="0">
@@ -4352,8 +5053,10 @@
                   <a:srgbClr val="CF3338"/>
                 </a:solidFill>
                 <a:latin typeface="Arial"/>
+                <a:ea typeface="Arial"/>
+                <a:cs typeface="Arial"/>
               </a:rPr>
-              <a:t>▶  </a:t>
+              <a:t>• </a:t>
             </a:r>
             <a:r>
               <a:rPr sz="1600" b="0" i="0">
@@ -4361,6 +5064,8 @@
                   <a:srgbClr val="1F2120"/>
                 </a:solidFill>
                 <a:latin typeface="Arial"/>
+                <a:ea typeface="Arial"/>
+                <a:cs typeface="Arial"/>
               </a:rPr>
               <a:t>Before asking for an AI budget, exhaust the AI you already have.</a:t>
             </a:r>
@@ -4370,6 +5075,7 @@
               <a:spcAft>
                 <a:spcPts val="700"/>
               </a:spcAft>
+              <a:buNone/>
             </a:pPr>
             <a:r>
               <a:rPr sz="1200" b="1" i="0">
@@ -4377,8 +5083,10 @@
                   <a:srgbClr val="CF3338"/>
                 </a:solidFill>
                 <a:latin typeface="Arial"/>
+                <a:ea typeface="Arial"/>
+                <a:cs typeface="Arial"/>
               </a:rPr>
-              <a:t>▶  </a:t>
+              <a:t>• </a:t>
             </a:r>
             <a:r>
               <a:rPr sz="1600" b="0" i="0">
@@ -4386,6 +5094,8 @@
                   <a:srgbClr val="1F2120"/>
                 </a:solidFill>
                 <a:latin typeface="Arial"/>
+                <a:ea typeface="Arial"/>
+                <a:cs typeface="Arial"/>
               </a:rPr>
               <a:t>Same dataset today. Every day builds on the last.</a:t>
             </a:r>
@@ -4393,6 +5103,11 @@
         </p:txBody>
       </p:sp>
     </p:spTree>
+    <p:extLst>
+      <p:ext uri="{BB962C8B-B14F-4D97-AF65-F5344CB8AC3E}">
+        <p14:creationId xmlns:p14="http://schemas.microsoft.com/office/powerpoint/2010/main" val="891823638"/>
+      </p:ext>
+    </p:extLst>
   </p:cSld>
   <p:clrMapOvr>
     <a:masterClrMapping/>
@@ -4401,7 +5116,7 @@
 </file>
 
 <file path=ppt/slides/slide3.xml><?xml version="1.0" encoding="utf-8"?>
-<p:sld xmlns:a="http://schemas.openxmlformats.org/drawingml/2006/main" xmlns:p="http://schemas.openxmlformats.org/presentationml/2006/main" xmlns:r="http://schemas.openxmlformats.org/officeDocument/2006/relationships">
+<p:sld xmlns:a="http://schemas.openxmlformats.org/drawingml/2006/main" xmlns:r="http://schemas.openxmlformats.org/officeDocument/2006/relationships" xmlns:p="http://schemas.openxmlformats.org/presentationml/2006/main">
   <p:cSld>
     <p:bg>
       <p:bgPr>
@@ -4417,17 +5132,86 @@
         <p:cNvGrpSpPr/>
         <p:nvPr/>
       </p:nvGrpSpPr>
-      <p:grpSpPr/>
-      <p:sp>
-        <p:nvSpPr>
-          <p:cNvPr id="2" name="TextBox 1"/>
-          <p:cNvSpPr txBox="1"/>
+      <p:grpSpPr>
+        <a:xfrm>
+          <a:off x="0" y="0"/>
+          <a:ext cx="0" cy="0"/>
+          <a:chOff x="0" y="0"/>
+          <a:chExt cx="0" cy="0"/>
+        </a:xfrm>
+      </p:grpSpPr>
+      <p:sp>
+        <p:nvSpPr>
+          <p:cNvPr id="2" name="Rectangle 1">
+            <a:extLst>
+              <a:ext uri="{FF2B5EF4-FFF2-40B4-BE49-F238E27FC236}">
+                <a16:creationId xmlns:a16="http://schemas.microsoft.com/office/drawing/2014/main" id="{B7814534-16BD-4203-B612-E59BC98588E9}"/>
+              </a:ext>
+            </a:extLst>
+          </p:cNvPr>
+          <p:cNvSpPr>
+            <a:spLocks noGrp="1"/>
+          </p:cNvSpPr>
           <p:nvPr/>
         </p:nvSpPr>
         <p:spPr>
           <a:xfrm>
-            <a:off x="640080" y="457200"/>
-            <a:ext cx="10881360" cy="1188720"/>
+            <a:off x="9082735" y="0"/>
+            <a:ext cx="3108960" cy="6858000"/>
+          </a:xfrm>
+          <a:prstGeom prst="rect">
+            <a:avLst/>
+          </a:prstGeom>
+          <a:solidFill>
+            <a:srgbClr val="CF3338"/>
+          </a:solidFill>
+          <a:ln>
+            <a:noFill/>
+          </a:ln>
+        </p:spPr>
+        <p:style>
+          <a:lnRef idx="1">
+            <a:schemeClr val="accent1"/>
+          </a:lnRef>
+          <a:fillRef idx="3">
+            <a:schemeClr val="accent1"/>
+          </a:fillRef>
+          <a:effectRef idx="2">
+            <a:schemeClr val="accent1"/>
+          </a:effectRef>
+          <a:fontRef idx="minor">
+            <a:schemeClr val="lt1"/>
+          </a:fontRef>
+        </p:style>
+        <p:txBody>
+          <a:bodyPr anchor="ctr"/>
+          <a:lstStyle/>
+          <a:p>
+            <a:pPr algn="ctr">
+              <a:buNone/>
+            </a:pPr>
+            <a:endParaRPr/>
+          </a:p>
+        </p:txBody>
+      </p:sp>
+      <p:sp>
+        <p:nvSpPr>
+          <p:cNvPr id="3" name="TextBox 2">
+            <a:extLst>
+              <a:ext uri="{FF2B5EF4-FFF2-40B4-BE49-F238E27FC236}">
+                <a16:creationId xmlns:a16="http://schemas.microsoft.com/office/drawing/2014/main" id="{06E1AB63-C43E-4F5F-86AA-7BE1F676AD73}"/>
+              </a:ext>
+            </a:extLst>
+          </p:cNvPr>
+          <p:cNvSpPr>
+            <a:spLocks noGrp="1"/>
+          </p:cNvSpPr>
+          <p:nvPr/>
+        </p:nvSpPr>
+        <p:spPr>
+          <a:xfrm>
+            <a:off x="9311335" y="640080"/>
+            <a:ext cx="2468880" cy="1828800"/>
           </a:xfrm>
           <a:prstGeom prst="rect">
             <a:avLst/>
@@ -4435,49 +5219,56 @@
           <a:noFill/>
         </p:spPr>
         <p:txBody>
-          <a:bodyPr wrap="square" lIns="0" rIns="0" tIns="0" bIns="0">
+          <a:bodyPr wrap="square" lIns="0" tIns="0" rIns="0" bIns="0">
             <a:spAutoFit/>
           </a:bodyPr>
           <a:lstStyle/>
           <a:p>
             <a:r>
-              <a:rPr sz="3000" b="1" i="0">
-                <a:solidFill>
-                  <a:srgbClr val="1F2120"/>
+              <a:rPr sz="2600" b="1" i="0">
+                <a:solidFill>
+                  <a:srgbClr val="FFFFFF"/>
                 </a:solidFill>
                 <a:latin typeface="Arial Black"/>
+                <a:ea typeface="Arial Black"/>
+                <a:cs typeface="Arial Black"/>
               </a:rPr>
-              <a:t>Why this counts as AI</a:t>
-            </a:r>
-          </a:p>
-          <a:p>
-            <a:pPr>
-              <a:spcBef>
-                <a:spcPts val="400"/>
-              </a:spcBef>
-            </a:pPr>
-            <a:r>
-              <a:rPr sz="1500" b="0" i="1">
-                <a:solidFill>
-                  <a:srgbClr val="CF3338"/>
-                </a:solidFill>
-                <a:latin typeface="Arial"/>
+              <a:t>LIVE</a:t>
+            </a:r>
+          </a:p>
+          <a:p>
+            <a:r>
+              <a:rPr sz="2600" b="1" i="0">
+                <a:solidFill>
+                  <a:srgbClr val="FFFFFF"/>
+                </a:solidFill>
+                <a:latin typeface="Arial Black"/>
+                <a:ea typeface="Arial Black"/>
+                <a:cs typeface="Arial Black"/>
               </a:rPr>
-              <a:t>The guerrilla hook, day 2</a:t>
-            </a:r>
-          </a:p>
-        </p:txBody>
-      </p:sp>
-      <p:sp>
-        <p:nvSpPr>
-          <p:cNvPr id="3" name="TextBox 2"/>
-          <p:cNvSpPr txBox="1"/>
+              <a:t>DEMO</a:t>
+            </a:r>
+          </a:p>
+        </p:txBody>
+      </p:sp>
+      <p:sp>
+        <p:nvSpPr>
+          <p:cNvPr id="4" name="TextBox 3">
+            <a:extLst>
+              <a:ext uri="{FF2B5EF4-FFF2-40B4-BE49-F238E27FC236}">
+                <a16:creationId xmlns:a16="http://schemas.microsoft.com/office/drawing/2014/main" id="{FAB62B29-0BFE-4223-AC34-87D34667E166}"/>
+              </a:ext>
+            </a:extLst>
+          </p:cNvPr>
+          <p:cNvSpPr>
+            <a:spLocks noGrp="1"/>
+          </p:cNvSpPr>
           <p:nvPr/>
         </p:nvSpPr>
         <p:spPr>
           <a:xfrm>
-            <a:off x="640080" y="1783080"/>
-            <a:ext cx="10881360" cy="4846320"/>
+            <a:off x="548640" y="411480"/>
+            <a:ext cx="8229600" cy="1097280"/>
           </a:xfrm>
           <a:prstGeom prst="rect">
             <a:avLst/>
@@ -4485,138 +5276,473 @@
           <a:noFill/>
         </p:spPr>
         <p:txBody>
-          <a:bodyPr wrap="square" lIns="0" rIns="0" tIns="0" bIns="0">
+          <a:bodyPr wrap="square" lIns="0" tIns="0" rIns="0" bIns="0">
             <a:spAutoFit/>
           </a:bodyPr>
           <a:lstStyle/>
           <a:p>
+            <a:r>
+              <a:rPr sz="2500" b="1" i="0">
+                <a:solidFill>
+                  <a:srgbClr val="CF3338"/>
+                </a:solidFill>
+                <a:latin typeface="Arial Black"/>
+                <a:ea typeface="Arial Black"/>
+                <a:cs typeface="Arial Black"/>
+              </a:rPr>
+              <a:t>Live demo: Ctrl+T and a real name</a:t>
+            </a:r>
+          </a:p>
+          <a:p>
             <a:pPr>
+              <a:spcBef>
+                <a:spcPts val="300"/>
+              </a:spcBef>
+              <a:buNone/>
+            </a:pPr>
+            <a:r>
+              <a:rPr sz="1450" b="0" i="1">
+                <a:solidFill>
+                  <a:srgbClr val="707070"/>
+                </a:solidFill>
+                <a:latin typeface="Arial"/>
+                <a:ea typeface="Arial"/>
+                <a:cs typeface="Arial"/>
+              </a:rPr>
+              <a:t>Junk rows out, one shortcut, one name that means something.</a:t>
+            </a:r>
+          </a:p>
+        </p:txBody>
+      </p:sp>
+      <p:sp>
+        <p:nvSpPr>
+          <p:cNvPr id="5" name="Rounded Rectangle 4">
+            <a:extLst>
+              <a:ext uri="{FF2B5EF4-FFF2-40B4-BE49-F238E27FC236}">
+                <a16:creationId xmlns:a16="http://schemas.microsoft.com/office/drawing/2014/main" id="{D2522860-D8EA-4DB2-BAF0-BE9369258EE6}"/>
+              </a:ext>
+            </a:extLst>
+          </p:cNvPr>
+          <p:cNvSpPr>
+            <a:spLocks noGrp="1"/>
+          </p:cNvSpPr>
+          <p:nvPr/>
+        </p:nvSpPr>
+        <p:spPr>
+          <a:xfrm>
+            <a:off x="548640" y="1600200"/>
+            <a:ext cx="8229600" cy="4023360"/>
+          </a:xfrm>
+          <a:prstGeom prst="roundRect">
+            <a:avLst/>
+          </a:prstGeom>
+          <a:solidFill>
+            <a:srgbClr val="2B2B2B"/>
+          </a:solidFill>
+          <a:ln>
+            <a:noFill/>
+          </a:ln>
+        </p:spPr>
+        <p:style>
+          <a:lnRef idx="1">
+            <a:schemeClr val="accent1"/>
+          </a:lnRef>
+          <a:fillRef idx="3">
+            <a:schemeClr val="accent1"/>
+          </a:fillRef>
+          <a:effectRef idx="2">
+            <a:schemeClr val="accent1"/>
+          </a:effectRef>
+          <a:fontRef idx="minor">
+            <a:schemeClr val="lt1"/>
+          </a:fontRef>
+        </p:style>
+        <p:txBody>
+          <a:bodyPr wrap="square" lIns="256032" tIns="182880" rIns="182880" bIns="109728" anchor="t"/>
+          <a:lstStyle/>
+          <a:p>
+            <a:pPr algn="l">
               <a:spcAft>
-                <a:spcPts val="700"/>
+                <a:spcPts val="100"/>
               </a:spcAft>
-            </a:pPr>
-            <a:r>
-              <a:rPr sz="1200" b="1" i="0">
+              <a:buNone/>
+            </a:pPr>
+            <a:r>
+              <a:rPr sz="1300" b="0" i="0">
+                <a:solidFill>
+                  <a:srgbClr val="9EC57A"/>
+                </a:solidFill>
+                <a:latin typeface="Consolas"/>
+                <a:ea typeface="Consolas"/>
+                <a:cs typeface="Consolas"/>
+              </a:rPr>
+              <a:t># Convert the range to a named table</a:t>
+            </a:r>
+          </a:p>
+          <a:p>
+            <a:pPr algn="l">
+              <a:spcAft>
+                <a:spcPts val="100"/>
+              </a:spcAft>
+              <a:buNone/>
+            </a:pPr>
+            <a:r>
+              <a:rPr sz="1300" b="0" i="0">
+                <a:solidFill>
+                  <a:srgbClr val="F5F5F5"/>
+                </a:solidFill>
+                <a:latin typeface="Consolas"/>
+                <a:ea typeface="Consolas"/>
+                <a:cs typeface="Consolas"/>
+              </a:rPr>
+              <a:t>1. Delete the two TOTAL rows and the blank row</a:t>
+            </a:r>
+          </a:p>
+          <a:p>
+            <a:pPr algn="l">
+              <a:spcAft>
+                <a:spcPts val="100"/>
+              </a:spcAft>
+              <a:buNone/>
+            </a:pPr>
+            <a:r>
+              <a:rPr sz="1300" b="0" i="0">
+                <a:solidFill>
+                  <a:srgbClr val="F5F5F5"/>
+                </a:solidFill>
+                <a:latin typeface="Consolas"/>
+                <a:ea typeface="Consolas"/>
+                <a:cs typeface="Consolas"/>
+              </a:rPr>
+              <a:t>2. Click in the data, press Ctrl+T, confirm headers</a:t>
+            </a:r>
+          </a:p>
+          <a:p>
+            <a:pPr algn="l">
+              <a:spcAft>
+                <a:spcPts val="100"/>
+              </a:spcAft>
+              <a:buNone/>
+            </a:pPr>
+            <a:r>
+              <a:rPr sz="1300" b="0" i="0">
+                <a:solidFill>
+                  <a:srgbClr val="F5F5F5"/>
+                </a:solidFill>
+                <a:latin typeface="Consolas"/>
+                <a:ea typeface="Consolas"/>
+                <a:cs typeface="Consolas"/>
+              </a:rPr>
+              <a:t>3. Table Design &gt; Table Name: type SalesData</a:t>
+            </a:r>
+          </a:p>
+          <a:p>
+            <a:pPr algn="l">
+              <a:spcAft>
+                <a:spcPts val="100"/>
+              </a:spcAft>
+              <a:buNone/>
+            </a:pPr>
+            <a:r>
+              <a:rPr sz="1300" b="0" i="0">
+                <a:solidFill>
+                  <a:srgbClr val="F5F5F5"/>
+                </a:solidFill>
+                <a:latin typeface="Consolas"/>
+                <a:ea typeface="Consolas"/>
+                <a:cs typeface="Consolas"/>
+              </a:rPr>
+              <a:t>4. In a spare cell type: =SUM(SalesData[Amount])</a:t>
+            </a:r>
+          </a:p>
+          <a:p>
+            <a:pPr algn="l">
+              <a:spcAft>
+                <a:spcPts val="100"/>
+              </a:spcAft>
+              <a:buNone/>
+            </a:pPr>
+            <a:r>
+              <a:rPr sz="1300" b="0" i="0">
+                <a:solidFill>
+                  <a:srgbClr val="F5F5F5"/>
+                </a:solidFill>
+                <a:latin typeface="Consolas"/>
+                <a:ea typeface="Consolas"/>
+                <a:cs typeface="Consolas"/>
+              </a:rPr>
+              <a:t>5. Read the formula out loud. It documents itself.</a:t>
+            </a:r>
+          </a:p>
+        </p:txBody>
+      </p:sp>
+      <p:sp>
+        <p:nvSpPr>
+          <p:cNvPr id="6" name="TextBox 5">
+            <a:extLst>
+              <a:ext uri="{FF2B5EF4-FFF2-40B4-BE49-F238E27FC236}">
+                <a16:creationId xmlns:a16="http://schemas.microsoft.com/office/drawing/2014/main" id="{4161F023-BEFC-4B1B-A57F-FD0627223355}"/>
+              </a:ext>
+            </a:extLst>
+          </p:cNvPr>
+          <p:cNvSpPr>
+            <a:spLocks noGrp="1"/>
+          </p:cNvSpPr>
+          <p:nvPr/>
+        </p:nvSpPr>
+        <p:spPr>
+          <a:xfrm>
+            <a:off x="548640" y="5806440"/>
+            <a:ext cx="8229600" cy="777240"/>
+          </a:xfrm>
+          <a:prstGeom prst="rect">
+            <a:avLst/>
+          </a:prstGeom>
+          <a:noFill/>
+        </p:spPr>
+        <p:txBody>
+          <a:bodyPr wrap="square" lIns="0" tIns="0" rIns="0" bIns="0">
+            <a:spAutoFit/>
+          </a:bodyPr>
+          <a:lstStyle/>
+          <a:p>
+            <a:r>
+              <a:rPr sz="1300" b="1" i="0">
                 <a:solidFill>
                   <a:srgbClr val="CF3338"/>
                 </a:solidFill>
                 <a:latin typeface="Arial"/>
+                <a:ea typeface="Arial"/>
+                <a:cs typeface="Arial"/>
               </a:rPr>
-              <a:t>▶  </a:t>
-            </a:r>
-            <a:r>
-              <a:rPr sz="1600" b="0" i="0">
-                <a:solidFill>
-                  <a:srgbClr val="1F2120"/>
+              <a:t>• A formula that reads like a sentence is AI-readable</a:t>
+            </a:r>
+          </a:p>
+        </p:txBody>
+      </p:sp>
+      <p:sp>
+        <p:nvSpPr>
+          <p:cNvPr id="7" name="Chat question">
+            <a:extLst>
+              <a:ext uri="{FF2B5EF4-FFF2-40B4-BE49-F238E27FC236}">
+                <a16:creationId xmlns:a16="http://schemas.microsoft.com/office/drawing/2014/main" id="{A51580B2-E24F-4611-A955-D611E5C5CF5E}"/>
+              </a:ext>
+            </a:extLst>
+          </p:cNvPr>
+          <p:cNvSpPr>
+            <a:spLocks noGrp="1"/>
+          </p:cNvSpPr>
+          <p:nvPr/>
+        </p:nvSpPr>
+        <p:spPr>
+          <a:xfrm>
+            <a:off x="9353550" y="2790825"/>
+            <a:ext cx="2428875" cy="1362075"/>
+          </a:xfrm>
+          <a:prstGeom prst="rect">
+            <a:avLst/>
+          </a:prstGeom>
+          <a:noFill/>
+          <a:ln w="0">
+            <a:noFill/>
+          </a:ln>
+        </p:spPr>
+        <p:txBody>
+          <a:bodyPr wrap="square" lIns="0" tIns="0" rIns="0" bIns="0">
+            <a:noAutofit/>
+          </a:bodyPr>
+          <a:lstStyle/>
+          <a:p>
+            <a:pPr>
+              <a:defRPr sz="2175" b="1">
+                <a:solidFill>
+                  <a:srgbClr val="FFFFFF"/>
                 </a:solidFill>
                 <a:latin typeface="Arial"/>
+                <a:ea typeface="Arial"/>
+                <a:cs typeface="Arial"/>
+              </a:defRPr>
+            </a:pPr>
+            <a:r>
+              <a:rPr sz="2175" b="1">
+                <a:solidFill>
+                  <a:srgbClr val="FFFFFF"/>
+                </a:solidFill>
+                <a:latin typeface="Arial"/>
+                <a:ea typeface="Arial"/>
+                <a:cs typeface="Arial"/>
               </a:rPr>
-              <a:t>Every AI tool performs dramatically better on tables than on raw ranges.</a:t>
-            </a:r>
-          </a:p>
+              <a:t>Easier to recognize?</a:t>
+            </a:r>
+          </a:p>
+        </p:txBody>
+      </p:sp>
+      <p:sp>
+        <p:nvSpPr>
+          <p:cNvPr id="8" name="Chat choices">
+            <a:extLst>
+              <a:ext uri="{FF2B5EF4-FFF2-40B4-BE49-F238E27FC236}">
+                <a16:creationId xmlns:a16="http://schemas.microsoft.com/office/drawing/2014/main" id="{8EFF79B5-4966-40B1-AE36-CFCA20121F66}"/>
+              </a:ext>
+            </a:extLst>
+          </p:cNvPr>
+          <p:cNvSpPr>
+            <a:spLocks noGrp="1"/>
+          </p:cNvSpPr>
+          <p:nvPr/>
+        </p:nvSpPr>
+        <p:spPr>
+          <a:xfrm>
+            <a:off x="9353550" y="4362450"/>
+            <a:ext cx="2428875" cy="1009650"/>
+          </a:xfrm>
+          <a:prstGeom prst="rect">
+            <a:avLst/>
+          </a:prstGeom>
+          <a:noFill/>
+          <a:ln w="0">
+            <a:noFill/>
+          </a:ln>
+        </p:spPr>
+        <p:txBody>
+          <a:bodyPr wrap="square" lIns="0" tIns="0" rIns="0" bIns="0">
+            <a:noAutofit/>
+          </a:bodyPr>
+          <a:lstStyle/>
           <a:p>
             <a:pPr>
-              <a:spcAft>
-                <a:spcPts val="700"/>
-              </a:spcAft>
-            </a:pPr>
-            <a:r>
-              <a:rPr sz="1200" b="1" i="0">
-                <a:solidFill>
-                  <a:srgbClr val="CF3338"/>
+              <a:defRPr sz="1950" b="1">
+                <a:solidFill>
+                  <a:srgbClr val="FFFFFF"/>
                 </a:solidFill>
                 <a:latin typeface="Arial"/>
+                <a:ea typeface="Arial"/>
+                <a:cs typeface="Arial"/>
+              </a:defRPr>
+            </a:pPr>
+            <a:r>
+              <a:rPr sz="1950" b="1">
+                <a:solidFill>
+                  <a:srgbClr val="FFFFFF"/>
+                </a:solidFill>
+                <a:latin typeface="Arial"/>
+                <a:ea typeface="Arial"/>
+                <a:cs typeface="Arial"/>
               </a:rPr>
-              <a:t>▶  </a:t>
-            </a:r>
-            <a:r>
-              <a:rPr sz="1600" b="0" i="0">
-                <a:solidFill>
-                  <a:srgbClr val="1F2120"/>
+              <a:t>A = Table1</a:t>
+            </a:r>
+          </a:p>
+          <a:p>
+            <a:pPr>
+              <a:defRPr sz="1950" b="1">
+                <a:solidFill>
+                  <a:srgbClr val="FFFFFF"/>
                 </a:solidFill>
                 <a:latin typeface="Arial"/>
+                <a:ea typeface="Arial"/>
+                <a:cs typeface="Arial"/>
+              </a:defRPr>
+            </a:pPr>
+            <a:r>
+              <a:rPr sz="1950" b="1">
+                <a:solidFill>
+                  <a:srgbClr val="FFFFFF"/>
+                </a:solidFill>
+                <a:latin typeface="Arial"/>
+                <a:ea typeface="Arial"/>
+                <a:cs typeface="Arial"/>
               </a:rPr>
-              <a:t>That applies to Analyze Data today, and to Copilot and Python later this week.</a:t>
-            </a:r>
-          </a:p>
+              <a:t>B = SalesData</a:t>
+            </a:r>
+          </a:p>
+        </p:txBody>
+      </p:sp>
+      <p:sp>
+        <p:nvSpPr>
+          <p:cNvPr id="9" name="Chat instruction">
+            <a:extLst>
+              <a:ext uri="{FF2B5EF4-FFF2-40B4-BE49-F238E27FC236}">
+                <a16:creationId xmlns:a16="http://schemas.microsoft.com/office/drawing/2014/main" id="{36D710A5-A85B-4C11-BCDA-7CE7A0A23523}"/>
+              </a:ext>
+            </a:extLst>
+          </p:cNvPr>
+          <p:cNvSpPr>
+            <a:spLocks noGrp="1"/>
+          </p:cNvSpPr>
+          <p:nvPr/>
+        </p:nvSpPr>
+        <p:spPr>
+          <a:xfrm>
+            <a:off x="9353550" y="5715000"/>
+            <a:ext cx="2428875" cy="609600"/>
+          </a:xfrm>
+          <a:prstGeom prst="rect">
+            <a:avLst/>
+          </a:prstGeom>
+          <a:noFill/>
+          <a:ln w="0">
+            <a:noFill/>
+          </a:ln>
+        </p:spPr>
+        <p:txBody>
+          <a:bodyPr wrap="square" lIns="0" tIns="0" rIns="0" bIns="0">
+            <a:noAutofit/>
+          </a:bodyPr>
+          <a:lstStyle/>
           <a:p>
             <a:pPr>
-              <a:spcAft>
-                <a:spcPts val="700"/>
-              </a:spcAft>
-            </a:pPr>
-            <a:r>
-              <a:rPr sz="1200" b="1" i="0">
-                <a:solidFill>
-                  <a:srgbClr val="CF3338"/>
+              <a:defRPr sz="1500" b="0">
+                <a:solidFill>
+                  <a:srgbClr val="FFFFFF"/>
                 </a:solidFill>
                 <a:latin typeface="Arial"/>
+                <a:ea typeface="Arial"/>
+                <a:cs typeface="Arial"/>
+              </a:defRPr>
+            </a:pPr>
+            <a:r>
+              <a:rPr sz="1500" b="0">
+                <a:solidFill>
+                  <a:srgbClr val="FFFFFF"/>
+                </a:solidFill>
+                <a:latin typeface="Arial"/>
+                <a:ea typeface="Arial"/>
+                <a:cs typeface="Arial"/>
               </a:rPr>
-              <a:t>▶  </a:t>
-            </a:r>
-            <a:r>
-              <a:rPr sz="1600" b="0" i="0">
-                <a:solidFill>
-                  <a:srgbClr val="1F2120"/>
+              <a:t>Type one word</a:t>
+            </a:r>
+          </a:p>
+          <a:p>
+            <a:pPr>
+              <a:defRPr sz="1500" b="0">
+                <a:solidFill>
+                  <a:srgbClr val="FFFFFF"/>
                 </a:solidFill>
                 <a:latin typeface="Arial"/>
+                <a:ea typeface="Arial"/>
+                <a:cs typeface="Arial"/>
+              </a:defRPr>
+            </a:pPr>
+            <a:r>
+              <a:rPr sz="1500" b="0">
+                <a:solidFill>
+                  <a:srgbClr val="FFFFFF"/>
+                </a:solidFill>
+                <a:latin typeface="Arial"/>
+                <a:ea typeface="Arial"/>
+                <a:cs typeface="Arial"/>
               </a:rPr>
-              <a:t>Structured references make formulas self-documenting, readable by AI and by humans.</a:t>
-            </a:r>
-          </a:p>
-          <a:p>
-            <a:pPr>
-              <a:spcAft>
-                <a:spcPts val="700"/>
-              </a:spcAft>
-            </a:pPr>
-            <a:r>
-              <a:rPr sz="1200" b="1" i="0">
-                <a:solidFill>
-                  <a:srgbClr val="CF3338"/>
-                </a:solidFill>
-                <a:latin typeface="Arial"/>
-              </a:rPr>
-              <a:t>▶  </a:t>
-            </a:r>
-            <a:r>
-              <a:rPr sz="1600" b="0" i="0">
-                <a:solidFill>
-                  <a:srgbClr val="1F2120"/>
-                </a:solidFill>
-                <a:latin typeface="Arial"/>
-              </a:rPr>
-              <a:t>Machine-readable data is the highest-leverage prep move while everyone else waits for licenses.</a:t>
-            </a:r>
-          </a:p>
-          <a:p>
-            <a:pPr>
-              <a:spcAft>
-                <a:spcPts val="700"/>
-              </a:spcAft>
-            </a:pPr>
-            <a:r>
-              <a:rPr sz="1200" b="1" i="0">
-                <a:solidFill>
-                  <a:srgbClr val="CF3338"/>
-                </a:solidFill>
-                <a:latin typeface="Arial"/>
-              </a:rPr>
-              <a:t>▶  </a:t>
-            </a:r>
-            <a:r>
-              <a:rPr sz="1600" b="0" i="0">
-                <a:solidFill>
-                  <a:srgbClr val="1F2120"/>
-                </a:solidFill>
-                <a:latin typeface="Arial"/>
-              </a:rPr>
-              <a:t>The AI-ready workbook is a craft skill, not a purchase.</a:t>
+              <a:t>or a letter in chat.</a:t>
             </a:r>
           </a:p>
         </p:txBody>
       </p:sp>
     </p:spTree>
+    <p:extLst>
+      <p:ext uri="{BB962C8B-B14F-4D97-AF65-F5344CB8AC3E}">
+        <p14:creationId xmlns:p14="http://schemas.microsoft.com/office/powerpoint/2010/main" val="1029493806"/>
+      </p:ext>
+    </p:extLst>
   </p:cSld>
   <p:clrMapOvr>
     <a:masterClrMapping/>
@@ -4625,7 +5751,7 @@
 </file>
 
 <file path=ppt/slides/slide4.xml><?xml version="1.0" encoding="utf-8"?>
-<p:sld xmlns:a="http://schemas.openxmlformats.org/drawingml/2006/main" xmlns:p="http://schemas.openxmlformats.org/presentationml/2006/main" xmlns:r="http://schemas.openxmlformats.org/officeDocument/2006/relationships">
+<p:sld xmlns:a="http://schemas.openxmlformats.org/drawingml/2006/main" xmlns:r="http://schemas.openxmlformats.org/officeDocument/2006/relationships" xmlns:p="http://schemas.openxmlformats.org/presentationml/2006/main">
   <p:cSld>
     <p:bg>
       <p:bgPr>
@@ -4641,11 +5767,26 @@
         <p:cNvGrpSpPr/>
         <p:nvPr/>
       </p:nvGrpSpPr>
-      <p:grpSpPr/>
-      <p:sp>
-        <p:nvSpPr>
-          <p:cNvPr id="2" name="TextBox 1"/>
-          <p:cNvSpPr txBox="1"/>
+      <p:grpSpPr>
+        <a:xfrm>
+          <a:off x="0" y="0"/>
+          <a:ext cx="0" cy="0"/>
+          <a:chOff x="0" y="0"/>
+          <a:chExt cx="0" cy="0"/>
+        </a:xfrm>
+      </p:grpSpPr>
+      <p:sp>
+        <p:nvSpPr>
+          <p:cNvPr id="2" name="TextBox 1">
+            <a:extLst>
+              <a:ext uri="{FF2B5EF4-FFF2-40B4-BE49-F238E27FC236}">
+                <a16:creationId xmlns:a16="http://schemas.microsoft.com/office/drawing/2014/main" id="{A7F3A1C4-8391-4BBD-BB0F-D5CBFE8922D6}"/>
+              </a:ext>
+            </a:extLst>
+          </p:cNvPr>
+          <p:cNvSpPr>
+            <a:spLocks noGrp="1"/>
+          </p:cNvSpPr>
           <p:nvPr/>
         </p:nvSpPr>
         <p:spPr>
@@ -4659,7 +5800,7 @@
           <a:noFill/>
         </p:spPr>
         <p:txBody>
-          <a:bodyPr wrap="square" lIns="0" rIns="0" tIns="0" bIns="0">
+          <a:bodyPr wrap="square" lIns="0" tIns="0" rIns="0" bIns="0">
             <a:spAutoFit/>
           </a:bodyPr>
           <a:lstStyle/>
@@ -4670,8 +5811,10 @@
                   <a:srgbClr val="1F2120"/>
                 </a:solidFill>
                 <a:latin typeface="Arial Black"/>
+                <a:ea typeface="Arial Black"/>
+                <a:cs typeface="Arial Black"/>
               </a:rPr>
-              <a:t>What Ctrl+T actually changes</a:t>
+              <a:t>Why this counts as AI</a:t>
             </a:r>
           </a:p>
           <a:p>
@@ -4679,6 +5822,7 @@
               <a:spcBef>
                 <a:spcPts val="400"/>
               </a:spcBef>
+              <a:buNone/>
             </a:pPr>
             <a:r>
               <a:rPr sz="1500" b="0" i="1">
@@ -4686,16 +5830,26 @@
                   <a:srgbClr val="CF3338"/>
                 </a:solidFill>
                 <a:latin typeface="Arial"/>
+                <a:ea typeface="Arial"/>
+                <a:cs typeface="Arial"/>
               </a:rPr>
-              <a:t>The 13-minute demo, in two parts</a:t>
-            </a:r>
-          </a:p>
-        </p:txBody>
-      </p:sp>
-      <p:sp>
-        <p:nvSpPr>
-          <p:cNvPr id="3" name="TextBox 2"/>
-          <p:cNvSpPr txBox="1"/>
+              <a:t>The guerrilla hook, day 2</a:t>
+            </a:r>
+          </a:p>
+        </p:txBody>
+      </p:sp>
+      <p:sp>
+        <p:nvSpPr>
+          <p:cNvPr id="3" name="TextBox 2">
+            <a:extLst>
+              <a:ext uri="{FF2B5EF4-FFF2-40B4-BE49-F238E27FC236}">
+                <a16:creationId xmlns:a16="http://schemas.microsoft.com/office/drawing/2014/main" id="{0D32DF53-A8C3-4E89-BF97-BF1EE9735579}"/>
+              </a:ext>
+            </a:extLst>
+          </p:cNvPr>
+          <p:cNvSpPr>
+            <a:spLocks noGrp="1"/>
+          </p:cNvSpPr>
           <p:nvPr/>
         </p:nvSpPr>
         <p:spPr>
@@ -4709,7 +5863,7 @@
           <a:noFill/>
         </p:spPr>
         <p:txBody>
-          <a:bodyPr wrap="square" lIns="0" rIns="0" tIns="0" bIns="0">
+          <a:bodyPr wrap="square" lIns="0" tIns="0" rIns="0" bIns="0">
             <a:spAutoFit/>
           </a:bodyPr>
           <a:lstStyle/>
@@ -4718,6 +5872,7 @@
               <a:spcAft>
                 <a:spcPts val="700"/>
               </a:spcAft>
+              <a:buNone/>
             </a:pPr>
             <a:r>
               <a:rPr sz="1200" b="1" i="0">
@@ -4725,8 +5880,10 @@
                   <a:srgbClr val="CF3338"/>
                 </a:solidFill>
                 <a:latin typeface="Arial"/>
+                <a:ea typeface="Arial"/>
+                <a:cs typeface="Arial"/>
               </a:rPr>
-              <a:t>▶  </a:t>
+              <a:t>• </a:t>
             </a:r>
             <a:r>
               <a:rPr sz="1600" b="0" i="0">
@@ -4734,8 +5891,10 @@
                   <a:srgbClr val="1F2120"/>
                 </a:solidFill>
                 <a:latin typeface="Arial"/>
+                <a:ea typeface="Arial"/>
+                <a:cs typeface="Arial"/>
               </a:rPr>
-              <a:t>Named columns the machine can point at, instead of guessing where data ends.</a:t>
+              <a:t>Named tables give analysis tools clear column names and data boundaries.</a:t>
             </a:r>
           </a:p>
           <a:p>
@@ -4743,6 +5902,7 @@
               <a:spcAft>
                 <a:spcPts val="700"/>
               </a:spcAft>
+              <a:buNone/>
             </a:pPr>
             <a:r>
               <a:rPr sz="1200" b="1" i="0">
@@ -4750,8 +5910,10 @@
                   <a:srgbClr val="CF3338"/>
                 </a:solidFill>
                 <a:latin typeface="Arial"/>
+                <a:ea typeface="Arial"/>
+                <a:cs typeface="Arial"/>
               </a:rPr>
-              <a:t>▶  </a:t>
+              <a:t>• </a:t>
             </a:r>
             <a:r>
               <a:rPr sz="1600" b="0" i="0">
@@ -4759,8 +5921,10 @@
                   <a:srgbClr val="1F2120"/>
                 </a:solidFill>
                 <a:latin typeface="Arial"/>
+                <a:ea typeface="Arial"/>
+                <a:cs typeface="Arial"/>
               </a:rPr>
-              <a:t>One data type per column, which is how models expect data to arrive.</a:t>
+              <a:t>That applies to Analyze Data today, and to Copilot and Python later this week.</a:t>
             </a:r>
           </a:p>
           <a:p>
@@ -4768,6 +5932,7 @@
               <a:spcAft>
                 <a:spcPts val="700"/>
               </a:spcAft>
+              <a:buNone/>
             </a:pPr>
             <a:r>
               <a:rPr sz="1200" b="1" i="0">
@@ -4775,8 +5940,10 @@
                   <a:srgbClr val="CF3338"/>
                 </a:solidFill>
                 <a:latin typeface="Arial"/>
+                <a:ea typeface="Arial"/>
+                <a:cs typeface="Arial"/>
               </a:rPr>
-              <a:t>▶  </a:t>
+              <a:t>• </a:t>
             </a:r>
             <a:r>
               <a:rPr sz="1600" b="0" i="0">
@@ -4784,8 +5951,10 @@
                   <a:srgbClr val="1F2120"/>
                 </a:solidFill>
                 <a:latin typeface="Arial"/>
+                <a:ea typeface="Arial"/>
+                <a:cs typeface="Arial"/>
               </a:rPr>
-              <a:t>Formulas that self-document: =SUM(SalesData[Amount]) needs no explanation.</a:t>
+              <a:t>Structured references make formulas self-documenting, readable by AI and by humans.</a:t>
             </a:r>
           </a:p>
           <a:p>
@@ -4793,6 +5962,7 @@
               <a:spcAft>
                 <a:spcPts val="700"/>
               </a:spcAft>
+              <a:buNone/>
             </a:pPr>
             <a:r>
               <a:rPr sz="1200" b="1" i="0">
@@ -4800,8 +5970,10 @@
                   <a:srgbClr val="CF3338"/>
                 </a:solidFill>
                 <a:latin typeface="Arial"/>
+                <a:ea typeface="Arial"/>
+                <a:cs typeface="Arial"/>
               </a:rPr>
-              <a:t>▶  </a:t>
+              <a:t>• </a:t>
             </a:r>
             <a:r>
               <a:rPr sz="1600" b="0" i="0">
@@ -4809,8 +5981,10 @@
                   <a:srgbClr val="1F2120"/>
                 </a:solidFill>
                 <a:latin typeface="Arial"/>
+                <a:ea typeface="Arial"/>
+                <a:cs typeface="Arial"/>
               </a:rPr>
-              <a:t>New rows join the table automatically, so answers stay current.</a:t>
+              <a:t>Machine-readable data is the highest-leverage prep move while everyone else waits for licenses.</a:t>
             </a:r>
           </a:p>
           <a:p>
@@ -4818,6 +5992,7 @@
               <a:spcAft>
                 <a:spcPts val="700"/>
               </a:spcAft>
+              <a:buNone/>
             </a:pPr>
             <a:r>
               <a:rPr sz="1200" b="1" i="0">
@@ -4825,8 +6000,10 @@
                   <a:srgbClr val="CF3338"/>
                 </a:solidFill>
                 <a:latin typeface="Arial"/>
+                <a:ea typeface="Arial"/>
+                <a:cs typeface="Arial"/>
               </a:rPr>
-              <a:t>▶  </a:t>
+              <a:t>• </a:t>
             </a:r>
             <a:r>
               <a:rPr sz="1600" b="0" i="0">
@@ -4834,13 +6011,20 @@
                   <a:srgbClr val="1F2120"/>
                 </a:solidFill>
                 <a:latin typeface="Arial"/>
+                <a:ea typeface="Arial"/>
+                <a:cs typeface="Arial"/>
               </a:rPr>
-              <a:t>Your colleagues get the same benefit the AI does. Readability compounds.</a:t>
+              <a:t>The AI-ready workbook is a craft skill, not a purchase.</a:t>
             </a:r>
           </a:p>
         </p:txBody>
       </p:sp>
     </p:spTree>
+    <p:extLst>
+      <p:ext uri="{BB962C8B-B14F-4D97-AF65-F5344CB8AC3E}">
+        <p14:creationId xmlns:p14="http://schemas.microsoft.com/office/powerpoint/2010/main" val="371189079"/>
+      </p:ext>
+    </p:extLst>
   </p:cSld>
   <p:clrMapOvr>
     <a:masterClrMapping/>
@@ -4849,7 +6033,7 @@
 </file>
 
 <file path=ppt/slides/slide5.xml><?xml version="1.0" encoding="utf-8"?>
-<p:sld xmlns:a="http://schemas.openxmlformats.org/drawingml/2006/main" xmlns:p="http://schemas.openxmlformats.org/presentationml/2006/main" xmlns:r="http://schemas.openxmlformats.org/officeDocument/2006/relationships">
+<p:sld xmlns:a="http://schemas.openxmlformats.org/drawingml/2006/main" xmlns:r="http://schemas.openxmlformats.org/officeDocument/2006/relationships" xmlns:p="http://schemas.openxmlformats.org/presentationml/2006/main">
   <p:cSld>
     <p:bg>
       <p:bgPr>
@@ -4865,11 +6049,26 @@
         <p:cNvGrpSpPr/>
         <p:nvPr/>
       </p:nvGrpSpPr>
-      <p:grpSpPr/>
-      <p:sp>
-        <p:nvSpPr>
-          <p:cNvPr id="2" name="Rectangle 1"/>
-          <p:cNvSpPr/>
+      <p:grpSpPr>
+        <a:xfrm>
+          <a:off x="0" y="0"/>
+          <a:ext cx="0" cy="0"/>
+          <a:chOff x="0" y="0"/>
+          <a:chExt cx="0" cy="0"/>
+        </a:xfrm>
+      </p:grpSpPr>
+      <p:sp>
+        <p:nvSpPr>
+          <p:cNvPr id="2" name="Rectangle 1">
+            <a:extLst>
+              <a:ext uri="{FF2B5EF4-FFF2-40B4-BE49-F238E27FC236}">
+                <a16:creationId xmlns:a16="http://schemas.microsoft.com/office/drawing/2014/main" id="{8CB89641-0C5D-4828-B5CF-8AC00BB59801}"/>
+              </a:ext>
+            </a:extLst>
+          </p:cNvPr>
+          <p:cNvSpPr>
+            <a:spLocks noGrp="1"/>
+          </p:cNvSpPr>
           <p:nvPr/>
         </p:nvSpPr>
         <p:spPr>
@@ -4886,7 +6085,6 @@
           <a:ln>
             <a:noFill/>
           </a:ln>
-          <a:effectLst/>
         </p:spPr>
         <p:style>
           <a:lnRef idx="1">
@@ -4903,17 +6101,28 @@
           </a:fontRef>
         </p:style>
         <p:txBody>
-          <a:bodyPr rtlCol="0" anchor="ctr"/>
-          <a:lstStyle/>
-          <a:p>
-            <a:pPr algn="ctr"/>
-          </a:p>
-        </p:txBody>
-      </p:sp>
-      <p:sp>
-        <p:nvSpPr>
-          <p:cNvPr id="3" name="TextBox 2"/>
-          <p:cNvSpPr txBox="1"/>
+          <a:bodyPr anchor="ctr"/>
+          <a:lstStyle/>
+          <a:p>
+            <a:pPr algn="ctr">
+              <a:buNone/>
+            </a:pPr>
+            <a:endParaRPr/>
+          </a:p>
+        </p:txBody>
+      </p:sp>
+      <p:sp>
+        <p:nvSpPr>
+          <p:cNvPr id="3" name="TextBox 2">
+            <a:extLst>
+              <a:ext uri="{FF2B5EF4-FFF2-40B4-BE49-F238E27FC236}">
+                <a16:creationId xmlns:a16="http://schemas.microsoft.com/office/drawing/2014/main" id="{724C5474-E254-4547-9996-4494CDB3DFFE}"/>
+              </a:ext>
+            </a:extLst>
+          </p:cNvPr>
+          <p:cNvSpPr>
+            <a:spLocks noGrp="1"/>
+          </p:cNvSpPr>
           <p:nvPr/>
         </p:nvSpPr>
         <p:spPr>
@@ -4927,7 +6136,7 @@
           <a:noFill/>
         </p:spPr>
         <p:txBody>
-          <a:bodyPr wrap="square" lIns="0" rIns="0" tIns="0" bIns="0">
+          <a:bodyPr wrap="square" lIns="0" tIns="0" rIns="0" bIns="0">
             <a:spAutoFit/>
           </a:bodyPr>
           <a:lstStyle/>
@@ -4938,6 +6147,8 @@
                   <a:srgbClr val="FFFFFF"/>
                 </a:solidFill>
                 <a:latin typeface="Arial Black"/>
+                <a:ea typeface="Arial Black"/>
+                <a:cs typeface="Arial Black"/>
               </a:rPr>
               <a:t>LIVE</a:t>
             </a:r>
@@ -4949,6 +6160,8 @@
                   <a:srgbClr val="FFFFFF"/>
                 </a:solidFill>
                 <a:latin typeface="Arial Black"/>
+                <a:ea typeface="Arial Black"/>
+                <a:cs typeface="Arial Black"/>
               </a:rPr>
               <a:t>DEMO</a:t>
             </a:r>
@@ -4957,8 +6170,16 @@
       </p:sp>
       <p:sp>
         <p:nvSpPr>
-          <p:cNvPr id="4" name="TextBox 3"/>
-          <p:cNvSpPr txBox="1"/>
+          <p:cNvPr id="4" name="TextBox 3">
+            <a:extLst>
+              <a:ext uri="{FF2B5EF4-FFF2-40B4-BE49-F238E27FC236}">
+                <a16:creationId xmlns:a16="http://schemas.microsoft.com/office/drawing/2014/main" id="{999BDAA5-B039-4114-9494-00FB13431BC4}"/>
+              </a:ext>
+            </a:extLst>
+          </p:cNvPr>
+          <p:cNvSpPr>
+            <a:spLocks noGrp="1"/>
+          </p:cNvSpPr>
           <p:nvPr/>
         </p:nvSpPr>
         <p:spPr>
@@ -4972,7 +6193,7 @@
           <a:noFill/>
         </p:spPr>
         <p:txBody>
-          <a:bodyPr wrap="square" lIns="0" rIns="0" tIns="0" bIns="0">
+          <a:bodyPr wrap="square" lIns="0" tIns="0" rIns="0" bIns="0">
             <a:spAutoFit/>
           </a:bodyPr>
           <a:lstStyle/>
@@ -4983,8 +6204,10 @@
                   <a:srgbClr val="CF3338"/>
                 </a:solidFill>
                 <a:latin typeface="Arial Black"/>
+                <a:ea typeface="Arial Black"/>
+                <a:cs typeface="Arial Black"/>
               </a:rPr>
-              <a:t>Live demo: Ctrl+T and a real name</a:t>
+              <a:t>Live demo: rerun Monday's question</a:t>
             </a:r>
           </a:p>
           <a:p>
@@ -4992,6 +6215,7 @@
               <a:spcBef>
                 <a:spcPts val="300"/>
               </a:spcBef>
+              <a:buNone/>
             </a:pPr>
             <a:r>
               <a:rPr sz="1450" b="0" i="1">
@@ -4999,16 +6223,26 @@
                   <a:srgbClr val="707070"/>
                 </a:solidFill>
                 <a:latin typeface="Arial"/>
+                <a:ea typeface="Arial"/>
+                <a:cs typeface="Arial"/>
               </a:rPr>
-              <a:t>Junk rows out, one shortcut, one name that means something.</a:t>
-            </a:r>
-          </a:p>
-        </p:txBody>
-      </p:sp>
-      <p:sp>
-        <p:nvSpPr>
-          <p:cNvPr id="5" name="Rounded Rectangle 4"/>
-          <p:cNvSpPr/>
+              <a:t>Same question as yesterday. Watch the quality jump.</a:t>
+            </a:r>
+          </a:p>
+        </p:txBody>
+      </p:sp>
+      <p:sp>
+        <p:nvSpPr>
+          <p:cNvPr id="5" name="Rounded Rectangle 4">
+            <a:extLst>
+              <a:ext uri="{FF2B5EF4-FFF2-40B4-BE49-F238E27FC236}">
+                <a16:creationId xmlns:a16="http://schemas.microsoft.com/office/drawing/2014/main" id="{7316317C-FACE-42F4-AB33-43843141F66B}"/>
+              </a:ext>
+            </a:extLst>
+          </p:cNvPr>
+          <p:cNvSpPr>
+            <a:spLocks noGrp="1"/>
+          </p:cNvSpPr>
           <p:nvPr/>
         </p:nvSpPr>
         <p:spPr>
@@ -5025,7 +6259,6 @@
           <a:ln>
             <a:noFill/>
           </a:ln>
-          <a:effectLst/>
         </p:spPr>
         <p:style>
           <a:lnRef idx="1">
@@ -5042,13 +6275,14 @@
           </a:fontRef>
         </p:style>
         <p:txBody>
-          <a:bodyPr rtlCol="0" anchor="t" wrap="square" lIns="256032" rIns="182880" tIns="182880" bIns="109728"/>
+          <a:bodyPr wrap="square" lIns="256032" tIns="182880" rIns="182880" bIns="109728" anchor="t"/>
           <a:lstStyle/>
           <a:p>
             <a:pPr algn="l">
               <a:spcAft>
                 <a:spcPts val="100"/>
               </a:spcAft>
+              <a:buNone/>
             </a:pPr>
             <a:r>
               <a:rPr sz="1300" b="0" i="0">
@@ -5056,8 +6290,10 @@
                   <a:srgbClr val="9EC57A"/>
                 </a:solidFill>
                 <a:latin typeface="Consolas"/>
+                <a:ea typeface="Consolas"/>
+                <a:cs typeface="Consolas"/>
               </a:rPr>
-              <a:t># Convert the range to a named table</a:t>
+              <a:t># Same question, better answer</a:t>
             </a:r>
           </a:p>
           <a:p>
@@ -5065,6 +6301,7 @@
               <a:spcAft>
                 <a:spcPts val="100"/>
               </a:spcAft>
+              <a:buNone/>
             </a:pPr>
             <a:r>
               <a:rPr sz="1300" b="0" i="0">
@@ -5072,8 +6309,10 @@
                   <a:srgbClr val="F5F5F5"/>
                 </a:solidFill>
                 <a:latin typeface="Consolas"/>
+                <a:ea typeface="Consolas"/>
+                <a:cs typeface="Consolas"/>
               </a:rPr>
-              <a:t>1. Delete the two TOTAL rows and the blank row</a:t>
+              <a:t>1. Click inside the SalesData table</a:t>
             </a:r>
           </a:p>
           <a:p>
@@ -5081,6 +6320,7 @@
               <a:spcAft>
                 <a:spcPts val="100"/>
               </a:spcAft>
+              <a:buNone/>
             </a:pPr>
             <a:r>
               <a:rPr sz="1300" b="0" i="0">
@@ -5088,8 +6328,10 @@
                   <a:srgbClr val="F5F5F5"/>
                 </a:solidFill>
                 <a:latin typeface="Consolas"/>
+                <a:ea typeface="Consolas"/>
+                <a:cs typeface="Consolas"/>
               </a:rPr>
-              <a:t>2. Click in the data, press Ctrl+T, confirm headers</a:t>
+              <a:t>2. Home tab &gt; Analyze Data</a:t>
             </a:r>
           </a:p>
           <a:p>
@@ -5097,6 +6339,7 @@
               <a:spcAft>
                 <a:spcPts val="100"/>
               </a:spcAft>
+              <a:buNone/>
             </a:pPr>
             <a:r>
               <a:rPr sz="1300" b="0" i="0">
@@ -5104,8 +6347,10 @@
                   <a:srgbClr val="F5F5F5"/>
                 </a:solidFill>
                 <a:latin typeface="Consolas"/>
+                <a:ea typeface="Consolas"/>
+                <a:cs typeface="Consolas"/>
               </a:rPr>
-              <a:t>3. Table Design &gt; Table Name: type SalesData</a:t>
+              <a:t>3. Ask again: total Amount by Region</a:t>
             </a:r>
           </a:p>
           <a:p>
@@ -5113,6 +6358,7 @@
               <a:spcAft>
                 <a:spcPts val="100"/>
               </a:spcAft>
+              <a:buNone/>
             </a:pPr>
             <a:r>
               <a:rPr sz="1300" b="0" i="0">
@@ -5120,8 +6366,10 @@
                   <a:srgbClr val="F5F5F5"/>
                 </a:solidFill>
                 <a:latin typeface="Consolas"/>
+                <a:ea typeface="Consolas"/>
+                <a:cs typeface="Consolas"/>
               </a:rPr>
-              <a:t>4. In a spare cell type: =SUM(SalesData[Amount])</a:t>
+              <a:t>4. Compare with Monday: no junk rows, named fields</a:t>
             </a:r>
           </a:p>
           <a:p>
@@ -5129,6 +6377,7 @@
               <a:spcAft>
                 <a:spcPts val="100"/>
               </a:spcAft>
+              <a:buNone/>
             </a:pPr>
             <a:r>
               <a:rPr sz="1300" b="0" i="0">
@@ -5136,16 +6385,26 @@
                   <a:srgbClr val="F5F5F5"/>
                 </a:solidFill>
                 <a:latin typeface="Consolas"/>
+                <a:ea typeface="Consolas"/>
+                <a:cs typeface="Consolas"/>
               </a:rPr>
-              <a:t>5. Read the formula out loud. It documents itself.</a:t>
-            </a:r>
-          </a:p>
-        </p:txBody>
-      </p:sp>
-      <p:sp>
-        <p:nvSpPr>
-          <p:cNvPr id="6" name="TextBox 5"/>
-          <p:cNvSpPr txBox="1"/>
+              <a:t>5. New rows added to the table join automatically</a:t>
+            </a:r>
+          </a:p>
+        </p:txBody>
+      </p:sp>
+      <p:sp>
+        <p:nvSpPr>
+          <p:cNvPr id="6" name="TextBox 5">
+            <a:extLst>
+              <a:ext uri="{FF2B5EF4-FFF2-40B4-BE49-F238E27FC236}">
+                <a16:creationId xmlns:a16="http://schemas.microsoft.com/office/drawing/2014/main" id="{058FAD7C-6A5F-41D0-A5E3-FD22CD80543A}"/>
+              </a:ext>
+            </a:extLst>
+          </p:cNvPr>
+          <p:cNvSpPr>
+            <a:spLocks noGrp="1"/>
+          </p:cNvSpPr>
           <p:nvPr/>
         </p:nvSpPr>
         <p:spPr>
@@ -5159,7 +6418,7 @@
           <a:noFill/>
         </p:spPr>
         <p:txBody>
-          <a:bodyPr wrap="square" lIns="0" rIns="0" tIns="0" bIns="0">
+          <a:bodyPr wrap="square" lIns="0" tIns="0" rIns="0" bIns="0">
             <a:spAutoFit/>
           </a:bodyPr>
           <a:lstStyle/>
@@ -5170,13 +6429,237 @@
                   <a:srgbClr val="CF3338"/>
                 </a:solidFill>
                 <a:latin typeface="Arial"/>
+                <a:ea typeface="Arial"/>
+                <a:cs typeface="Arial"/>
               </a:rPr>
-              <a:t>▶  A formula that reads like a sentence is AI-readable</a:t>
+              <a:t>• Same tool, same data, better structure, better answer</a:t>
+            </a:r>
+          </a:p>
+        </p:txBody>
+      </p:sp>
+      <p:sp>
+        <p:nvSpPr>
+          <p:cNvPr id="7" name="Chat question">
+            <a:extLst>
+              <a:ext uri="{FF2B5EF4-FFF2-40B4-BE49-F238E27FC236}">
+                <a16:creationId xmlns:a16="http://schemas.microsoft.com/office/drawing/2014/main" id="{90051836-842F-42D0-BD30-2B35378BA9D8}"/>
+              </a:ext>
+            </a:extLst>
+          </p:cNvPr>
+          <p:cNvSpPr>
+            <a:spLocks noGrp="1"/>
+          </p:cNvSpPr>
+          <p:nvPr/>
+        </p:nvSpPr>
+        <p:spPr>
+          <a:xfrm>
+            <a:off x="9353550" y="2790825"/>
+            <a:ext cx="2428875" cy="1362075"/>
+          </a:xfrm>
+          <a:prstGeom prst="rect">
+            <a:avLst/>
+          </a:prstGeom>
+          <a:noFill/>
+          <a:ln w="0">
+            <a:noFill/>
+          </a:ln>
+        </p:spPr>
+        <p:txBody>
+          <a:bodyPr wrap="square" lIns="0" tIns="0" rIns="0" bIns="0">
+            <a:noAutofit/>
+          </a:bodyPr>
+          <a:lstStyle/>
+          <a:p>
+            <a:pPr>
+              <a:defRPr sz="2175" b="1">
+                <a:solidFill>
+                  <a:srgbClr val="FFFFFF"/>
+                </a:solidFill>
+                <a:latin typeface="Arial"/>
+                <a:ea typeface="Arial"/>
+                <a:cs typeface="Arial"/>
+              </a:defRPr>
+            </a:pPr>
+            <a:r>
+              <a:rPr sz="2175" b="1">
+                <a:solidFill>
+                  <a:srgbClr val="FFFFFF"/>
+                </a:solidFill>
+                <a:latin typeface="Arial"/>
+                <a:ea typeface="Arial"/>
+                <a:cs typeface="Arial"/>
+              </a:rPr>
+              <a:t>Did Ctrl+T fix</a:t>
+            </a:r>
+          </a:p>
+          <a:p>
+            <a:pPr>
+              <a:defRPr sz="2175" b="1">
+                <a:solidFill>
+                  <a:srgbClr val="FFFFFF"/>
+                </a:solidFill>
+                <a:latin typeface="Arial"/>
+                <a:ea typeface="Arial"/>
+                <a:cs typeface="Arial"/>
+              </a:defRPr>
+            </a:pPr>
+            <a:r>
+              <a:rPr sz="2175" b="1">
+                <a:solidFill>
+                  <a:srgbClr val="FFFFFF"/>
+                </a:solidFill>
+                <a:latin typeface="Arial"/>
+                <a:ea typeface="Arial"/>
+                <a:cs typeface="Arial"/>
+              </a:rPr>
+              <a:t>the region typos?</a:t>
+            </a:r>
+          </a:p>
+        </p:txBody>
+      </p:sp>
+      <p:sp>
+        <p:nvSpPr>
+          <p:cNvPr id="8" name="Chat choices">
+            <a:extLst>
+              <a:ext uri="{FF2B5EF4-FFF2-40B4-BE49-F238E27FC236}">
+                <a16:creationId xmlns:a16="http://schemas.microsoft.com/office/drawing/2014/main" id="{5ACAAA90-ADFF-45DC-B1CD-F5FAF027FBDF}"/>
+              </a:ext>
+            </a:extLst>
+          </p:cNvPr>
+          <p:cNvSpPr>
+            <a:spLocks noGrp="1"/>
+          </p:cNvSpPr>
+          <p:nvPr/>
+        </p:nvSpPr>
+        <p:spPr>
+          <a:xfrm>
+            <a:off x="9353550" y="4362450"/>
+            <a:ext cx="2428875" cy="1009650"/>
+          </a:xfrm>
+          <a:prstGeom prst="rect">
+            <a:avLst/>
+          </a:prstGeom>
+          <a:noFill/>
+          <a:ln w="0">
+            <a:noFill/>
+          </a:ln>
+        </p:spPr>
+        <p:txBody>
+          <a:bodyPr wrap="square" lIns="0" tIns="0" rIns="0" bIns="0">
+            <a:noAutofit/>
+          </a:bodyPr>
+          <a:lstStyle/>
+          <a:p>
+            <a:pPr>
+              <a:defRPr sz="1950" b="1">
+                <a:solidFill>
+                  <a:srgbClr val="FFFFFF"/>
+                </a:solidFill>
+                <a:latin typeface="Arial"/>
+                <a:ea typeface="Arial"/>
+                <a:cs typeface="Arial"/>
+              </a:defRPr>
+            </a:pPr>
+            <a:r>
+              <a:rPr sz="1950" b="1">
+                <a:solidFill>
+                  <a:srgbClr val="FFFFFF"/>
+                </a:solidFill>
+                <a:latin typeface="Arial"/>
+                <a:ea typeface="Arial"/>
+                <a:cs typeface="Arial"/>
+              </a:rPr>
+              <a:t>YES / NO</a:t>
+            </a:r>
+          </a:p>
+        </p:txBody>
+      </p:sp>
+      <p:sp>
+        <p:nvSpPr>
+          <p:cNvPr id="9" name="Chat instruction">
+            <a:extLst>
+              <a:ext uri="{FF2B5EF4-FFF2-40B4-BE49-F238E27FC236}">
+                <a16:creationId xmlns:a16="http://schemas.microsoft.com/office/drawing/2014/main" id="{EA846EDA-201C-4620-95F3-E87EA00BCAA6}"/>
+              </a:ext>
+            </a:extLst>
+          </p:cNvPr>
+          <p:cNvSpPr>
+            <a:spLocks noGrp="1"/>
+          </p:cNvSpPr>
+          <p:nvPr/>
+        </p:nvSpPr>
+        <p:spPr>
+          <a:xfrm>
+            <a:off x="9353550" y="5715000"/>
+            <a:ext cx="2428875" cy="609600"/>
+          </a:xfrm>
+          <a:prstGeom prst="rect">
+            <a:avLst/>
+          </a:prstGeom>
+          <a:noFill/>
+          <a:ln w="0">
+            <a:noFill/>
+          </a:ln>
+        </p:spPr>
+        <p:txBody>
+          <a:bodyPr wrap="square" lIns="0" tIns="0" rIns="0" bIns="0">
+            <a:noAutofit/>
+          </a:bodyPr>
+          <a:lstStyle/>
+          <a:p>
+            <a:pPr>
+              <a:defRPr sz="1500" b="0">
+                <a:solidFill>
+                  <a:srgbClr val="FFFFFF"/>
+                </a:solidFill>
+                <a:latin typeface="Arial"/>
+                <a:ea typeface="Arial"/>
+                <a:cs typeface="Arial"/>
+              </a:defRPr>
+            </a:pPr>
+            <a:r>
+              <a:rPr sz="1500" b="0">
+                <a:solidFill>
+                  <a:srgbClr val="FFFFFF"/>
+                </a:solidFill>
+                <a:latin typeface="Arial"/>
+                <a:ea typeface="Arial"/>
+                <a:cs typeface="Arial"/>
+              </a:rPr>
+              <a:t>Type one word</a:t>
+            </a:r>
+          </a:p>
+          <a:p>
+            <a:pPr>
+              <a:defRPr sz="1500" b="0">
+                <a:solidFill>
+                  <a:srgbClr val="FFFFFF"/>
+                </a:solidFill>
+                <a:latin typeface="Arial"/>
+                <a:ea typeface="Arial"/>
+                <a:cs typeface="Arial"/>
+              </a:defRPr>
+            </a:pPr>
+            <a:r>
+              <a:rPr sz="1500" b="0">
+                <a:solidFill>
+                  <a:srgbClr val="FFFFFF"/>
+                </a:solidFill>
+                <a:latin typeface="Arial"/>
+                <a:ea typeface="Arial"/>
+                <a:cs typeface="Arial"/>
+              </a:rPr>
+              <a:t>or a letter in chat.</a:t>
             </a:r>
           </a:p>
         </p:txBody>
       </p:sp>
     </p:spTree>
+    <p:extLst>
+      <p:ext uri="{BB962C8B-B14F-4D97-AF65-F5344CB8AC3E}">
+        <p14:creationId xmlns:p14="http://schemas.microsoft.com/office/powerpoint/2010/main" val="371555514"/>
+      </p:ext>
+    </p:extLst>
   </p:cSld>
   <p:clrMapOvr>
     <a:masterClrMapping/>
@@ -5185,7 +6668,7 @@
 </file>
 
 <file path=ppt/slides/slide6.xml><?xml version="1.0" encoding="utf-8"?>
-<p:sld xmlns:a="http://schemas.openxmlformats.org/drawingml/2006/main" xmlns:p="http://schemas.openxmlformats.org/presentationml/2006/main" xmlns:r="http://schemas.openxmlformats.org/officeDocument/2006/relationships">
+<p:sld xmlns:a="http://schemas.openxmlformats.org/drawingml/2006/main" xmlns:r="http://schemas.openxmlformats.org/officeDocument/2006/relationships" xmlns:p="http://schemas.openxmlformats.org/presentationml/2006/main">
   <p:cSld>
     <p:bg>
       <p:bgPr>
@@ -5201,347 +6684,26 @@
         <p:cNvGrpSpPr/>
         <p:nvPr/>
       </p:nvGrpSpPr>
-      <p:grpSpPr/>
-      <p:sp>
-        <p:nvSpPr>
-          <p:cNvPr id="2" name="Rectangle 1"/>
-          <p:cNvSpPr/>
-          <p:nvPr/>
-        </p:nvSpPr>
-        <p:spPr>
-          <a:xfrm>
-            <a:off x="9082735" y="0"/>
-            <a:ext cx="3108960" cy="6858000"/>
-          </a:xfrm>
-          <a:prstGeom prst="rect">
-            <a:avLst/>
-          </a:prstGeom>
-          <a:solidFill>
-            <a:srgbClr val="CF3338"/>
-          </a:solidFill>
-          <a:ln>
-            <a:noFill/>
-          </a:ln>
-          <a:effectLst/>
-        </p:spPr>
-        <p:style>
-          <a:lnRef idx="1">
-            <a:schemeClr val="accent1"/>
-          </a:lnRef>
-          <a:fillRef idx="3">
-            <a:schemeClr val="accent1"/>
-          </a:fillRef>
-          <a:effectRef idx="2">
-            <a:schemeClr val="accent1"/>
-          </a:effectRef>
-          <a:fontRef idx="minor">
-            <a:schemeClr val="lt1"/>
-          </a:fontRef>
-        </p:style>
-        <p:txBody>
-          <a:bodyPr rtlCol="0" anchor="ctr"/>
-          <a:lstStyle/>
-          <a:p>
-            <a:pPr algn="ctr"/>
-          </a:p>
-        </p:txBody>
-      </p:sp>
-      <p:sp>
-        <p:nvSpPr>
-          <p:cNvPr id="3" name="TextBox 2"/>
-          <p:cNvSpPr txBox="1"/>
-          <p:nvPr/>
-        </p:nvSpPr>
-        <p:spPr>
-          <a:xfrm>
-            <a:off x="9311335" y="640080"/>
-            <a:ext cx="2468880" cy="1828800"/>
-          </a:xfrm>
-          <a:prstGeom prst="rect">
-            <a:avLst/>
-          </a:prstGeom>
-          <a:noFill/>
-        </p:spPr>
-        <p:txBody>
-          <a:bodyPr wrap="square" lIns="0" rIns="0" tIns="0" bIns="0">
-            <a:spAutoFit/>
-          </a:bodyPr>
-          <a:lstStyle/>
-          <a:p>
-            <a:r>
-              <a:rPr sz="2600" b="1" i="0">
-                <a:solidFill>
-                  <a:srgbClr val="FFFFFF"/>
-                </a:solidFill>
-                <a:latin typeface="Arial Black"/>
-              </a:rPr>
-              <a:t>LIVE</a:t>
-            </a:r>
-          </a:p>
-          <a:p>
-            <a:r>
-              <a:rPr sz="2600" b="1" i="0">
-                <a:solidFill>
-                  <a:srgbClr val="FFFFFF"/>
-                </a:solidFill>
-                <a:latin typeface="Arial Black"/>
-              </a:rPr>
-              <a:t>DEMO</a:t>
-            </a:r>
-          </a:p>
-        </p:txBody>
-      </p:sp>
-      <p:sp>
-        <p:nvSpPr>
-          <p:cNvPr id="4" name="TextBox 3"/>
-          <p:cNvSpPr txBox="1"/>
-          <p:nvPr/>
-        </p:nvSpPr>
-        <p:spPr>
-          <a:xfrm>
-            <a:off x="548640" y="411480"/>
-            <a:ext cx="8229600" cy="1097280"/>
-          </a:xfrm>
-          <a:prstGeom prst="rect">
-            <a:avLst/>
-          </a:prstGeom>
-          <a:noFill/>
-        </p:spPr>
-        <p:txBody>
-          <a:bodyPr wrap="square" lIns="0" rIns="0" tIns="0" bIns="0">
-            <a:spAutoFit/>
-          </a:bodyPr>
-          <a:lstStyle/>
-          <a:p>
-            <a:r>
-              <a:rPr sz="2500" b="1" i="0">
-                <a:solidFill>
-                  <a:srgbClr val="CF3338"/>
-                </a:solidFill>
-                <a:latin typeface="Arial Black"/>
-              </a:rPr>
-              <a:t>Live demo: rerun Monday's question</a:t>
-            </a:r>
-          </a:p>
-          <a:p>
-            <a:pPr>
-              <a:spcBef>
-                <a:spcPts val="300"/>
-              </a:spcBef>
-            </a:pPr>
-            <a:r>
-              <a:rPr sz="1450" b="0" i="1">
-                <a:solidFill>
-                  <a:srgbClr val="707070"/>
-                </a:solidFill>
-                <a:latin typeface="Arial"/>
-              </a:rPr>
-              <a:t>Same question as yesterday. Watch the quality jump.</a:t>
-            </a:r>
-          </a:p>
-        </p:txBody>
-      </p:sp>
-      <p:sp>
-        <p:nvSpPr>
-          <p:cNvPr id="5" name="Rounded Rectangle 4"/>
-          <p:cNvSpPr/>
-          <p:nvPr/>
-        </p:nvSpPr>
-        <p:spPr>
-          <a:xfrm>
-            <a:off x="548640" y="1600200"/>
-            <a:ext cx="8229600" cy="4023360"/>
-          </a:xfrm>
-          <a:prstGeom prst="roundRect">
-            <a:avLst/>
-          </a:prstGeom>
-          <a:solidFill>
-            <a:srgbClr val="2B2B2B"/>
-          </a:solidFill>
-          <a:ln>
-            <a:noFill/>
-          </a:ln>
-          <a:effectLst/>
-        </p:spPr>
-        <p:style>
-          <a:lnRef idx="1">
-            <a:schemeClr val="accent1"/>
-          </a:lnRef>
-          <a:fillRef idx="3">
-            <a:schemeClr val="accent1"/>
-          </a:fillRef>
-          <a:effectRef idx="2">
-            <a:schemeClr val="accent1"/>
-          </a:effectRef>
-          <a:fontRef idx="minor">
-            <a:schemeClr val="lt1"/>
-          </a:fontRef>
-        </p:style>
-        <p:txBody>
-          <a:bodyPr rtlCol="0" anchor="t" wrap="square" lIns="256032" rIns="182880" tIns="182880" bIns="109728"/>
-          <a:lstStyle/>
-          <a:p>
-            <a:pPr algn="l">
-              <a:spcAft>
-                <a:spcPts val="100"/>
-              </a:spcAft>
-            </a:pPr>
-            <a:r>
-              <a:rPr sz="1300" b="0" i="0">
-                <a:solidFill>
-                  <a:srgbClr val="9EC57A"/>
-                </a:solidFill>
-                <a:latin typeface="Consolas"/>
-              </a:rPr>
-              <a:t># Same question, better answer</a:t>
-            </a:r>
-          </a:p>
-          <a:p>
-            <a:pPr algn="l">
-              <a:spcAft>
-                <a:spcPts val="100"/>
-              </a:spcAft>
-            </a:pPr>
-            <a:r>
-              <a:rPr sz="1300" b="0" i="0">
-                <a:solidFill>
-                  <a:srgbClr val="F5F5F5"/>
-                </a:solidFill>
-                <a:latin typeface="Consolas"/>
-              </a:rPr>
-              <a:t>1. Click inside the SalesData table</a:t>
-            </a:r>
-          </a:p>
-          <a:p>
-            <a:pPr algn="l">
-              <a:spcAft>
-                <a:spcPts val="100"/>
-              </a:spcAft>
-            </a:pPr>
-            <a:r>
-              <a:rPr sz="1300" b="0" i="0">
-                <a:solidFill>
-                  <a:srgbClr val="F5F5F5"/>
-                </a:solidFill>
-                <a:latin typeface="Consolas"/>
-              </a:rPr>
-              <a:t>2. Home tab &gt; Analyze Data</a:t>
-            </a:r>
-          </a:p>
-          <a:p>
-            <a:pPr algn="l">
-              <a:spcAft>
-                <a:spcPts val="100"/>
-              </a:spcAft>
-            </a:pPr>
-            <a:r>
-              <a:rPr sz="1300" b="0" i="0">
-                <a:solidFill>
-                  <a:srgbClr val="F5F5F5"/>
-                </a:solidFill>
-                <a:latin typeface="Consolas"/>
-              </a:rPr>
-              <a:t>3. Ask again: total Amount by Region</a:t>
-            </a:r>
-          </a:p>
-          <a:p>
-            <a:pPr algn="l">
-              <a:spcAft>
-                <a:spcPts val="100"/>
-              </a:spcAft>
-            </a:pPr>
-            <a:r>
-              <a:rPr sz="1300" b="0" i="0">
-                <a:solidFill>
-                  <a:srgbClr val="F5F5F5"/>
-                </a:solidFill>
-                <a:latin typeface="Consolas"/>
-              </a:rPr>
-              <a:t>4. Compare with Monday: no junk rows, named fields</a:t>
-            </a:r>
-          </a:p>
-          <a:p>
-            <a:pPr algn="l">
-              <a:spcAft>
-                <a:spcPts val="100"/>
-              </a:spcAft>
-            </a:pPr>
-            <a:r>
-              <a:rPr sz="1300" b="0" i="0">
-                <a:solidFill>
-                  <a:srgbClr val="F5F5F5"/>
-                </a:solidFill>
-                <a:latin typeface="Consolas"/>
-              </a:rPr>
-              <a:t>5. New rows added to the table join automatically</a:t>
-            </a:r>
-          </a:p>
-        </p:txBody>
-      </p:sp>
-      <p:sp>
-        <p:nvSpPr>
-          <p:cNvPr id="6" name="TextBox 5"/>
-          <p:cNvSpPr txBox="1"/>
-          <p:nvPr/>
-        </p:nvSpPr>
-        <p:spPr>
-          <a:xfrm>
-            <a:off x="548640" y="5806440"/>
-            <a:ext cx="8229600" cy="777240"/>
-          </a:xfrm>
-          <a:prstGeom prst="rect">
-            <a:avLst/>
-          </a:prstGeom>
-          <a:noFill/>
-        </p:spPr>
-        <p:txBody>
-          <a:bodyPr wrap="square" lIns="0" rIns="0" tIns="0" bIns="0">
-            <a:spAutoFit/>
-          </a:bodyPr>
-          <a:lstStyle/>
-          <a:p>
-            <a:r>
-              <a:rPr sz="1300" b="1" i="0">
-                <a:solidFill>
-                  <a:srgbClr val="CF3338"/>
-                </a:solidFill>
-                <a:latin typeface="Arial"/>
-              </a:rPr>
-              <a:t>▶  Same tool, same data, better structure, better answer</a:t>
-            </a:r>
-          </a:p>
-        </p:txBody>
-      </p:sp>
-    </p:spTree>
-  </p:cSld>
-  <p:clrMapOvr>
-    <a:masterClrMapping/>
-  </p:clrMapOvr>
-</p:sld>
-</file>
-
-<file path=ppt/slides/slide7.xml><?xml version="1.0" encoding="utf-8"?>
-<p:sld xmlns:a="http://schemas.openxmlformats.org/drawingml/2006/main" xmlns:p="http://schemas.openxmlformats.org/presentationml/2006/main" xmlns:r="http://schemas.openxmlformats.org/officeDocument/2006/relationships">
-  <p:cSld>
-    <p:bg>
-      <p:bgPr>
-        <a:solidFill>
-          <a:srgbClr val="EEECE1"/>
-        </a:solidFill>
-        <a:effectLst/>
-      </p:bgPr>
-    </p:bg>
-    <p:spTree>
-      <p:nvGrpSpPr>
-        <p:cNvPr id="1" name=""/>
-        <p:cNvGrpSpPr/>
-        <p:nvPr/>
-      </p:nvGrpSpPr>
-      <p:grpSpPr/>
-      <p:sp>
-        <p:nvSpPr>
-          <p:cNvPr id="2" name="TextBox 1"/>
-          <p:cNvSpPr txBox="1"/>
+      <p:grpSpPr>
+        <a:xfrm>
+          <a:off x="0" y="0"/>
+          <a:ext cx="0" cy="0"/>
+          <a:chOff x="0" y="0"/>
+          <a:chExt cx="0" cy="0"/>
+        </a:xfrm>
+      </p:grpSpPr>
+      <p:sp>
+        <p:nvSpPr>
+          <p:cNvPr id="2" name="TextBox 1">
+            <a:extLst>
+              <a:ext uri="{FF2B5EF4-FFF2-40B4-BE49-F238E27FC236}">
+                <a16:creationId xmlns:a16="http://schemas.microsoft.com/office/drawing/2014/main" id="{E11E7FB2-B4AB-418E-9825-3F3E207A1B4D}"/>
+              </a:ext>
+            </a:extLst>
+          </p:cNvPr>
+          <p:cNvSpPr>
+            <a:spLocks noGrp="1"/>
+          </p:cNvSpPr>
           <p:nvPr/>
         </p:nvSpPr>
         <p:spPr>
@@ -5555,7 +6717,7 @@
           <a:noFill/>
         </p:spPr>
         <p:txBody>
-          <a:bodyPr wrap="square" lIns="0" rIns="0" tIns="0" bIns="0">
+          <a:bodyPr wrap="square" lIns="0" tIns="0" rIns="0" bIns="0">
             <a:spAutoFit/>
           </a:bodyPr>
           <a:lstStyle/>
@@ -5566,6 +6728,8 @@
                   <a:srgbClr val="1F2120"/>
                 </a:solidFill>
                 <a:latin typeface="Arial Black"/>
+                <a:ea typeface="Arial Black"/>
+                <a:cs typeface="Arial Black"/>
               </a:rPr>
               <a:t>Do this at your desk today</a:t>
             </a:r>
@@ -5575,6 +6739,7 @@
               <a:spcBef>
                 <a:spcPts val="400"/>
               </a:spcBef>
+              <a:buNone/>
             </a:pPr>
             <a:r>
               <a:rPr sz="1500" b="0" i="1">
@@ -5582,22 +6747,32 @@
                   <a:srgbClr val="CF3338"/>
                 </a:solidFill>
                 <a:latin typeface="Arial"/>
+                <a:ea typeface="Arial"/>
+                <a:cs typeface="Arial"/>
               </a:rPr>
-              <a:t>The highest-leverage ten minutes of your week</a:t>
-            </a:r>
-          </a:p>
-        </p:txBody>
-      </p:sp>
-      <p:sp>
-        <p:nvSpPr>
-          <p:cNvPr id="3" name="TextBox 2"/>
-          <p:cNvSpPr txBox="1"/>
+              <a:t>Choose one small win</a:t>
+            </a:r>
+          </a:p>
+        </p:txBody>
+      </p:sp>
+      <p:sp>
+        <p:nvSpPr>
+          <p:cNvPr id="3" name="TextBox 2">
+            <a:extLst>
+              <a:ext uri="{FF2B5EF4-FFF2-40B4-BE49-F238E27FC236}">
+                <a16:creationId xmlns:a16="http://schemas.microsoft.com/office/drawing/2014/main" id="{459901B7-0086-4286-8DC1-907270A01F2E}"/>
+              </a:ext>
+            </a:extLst>
+          </p:cNvPr>
+          <p:cNvSpPr>
+            <a:spLocks noGrp="1"/>
+          </p:cNvSpPr>
           <p:nvPr/>
         </p:nvSpPr>
         <p:spPr>
           <a:xfrm>
             <a:off x="640080" y="1783080"/>
-            <a:ext cx="10881360" cy="4846320"/>
+            <a:ext cx="10881360" cy="2409825"/>
           </a:xfrm>
           <a:prstGeom prst="rect">
             <a:avLst/>
@@ -5605,7 +6780,7 @@
           <a:noFill/>
         </p:spPr>
         <p:txBody>
-          <a:bodyPr wrap="square" lIns="0" rIns="0" tIns="0" bIns="0">
+          <a:bodyPr wrap="square" lIns="0" tIns="0" rIns="0" bIns="0">
             <a:spAutoFit/>
           </a:bodyPr>
           <a:lstStyle/>
@@ -5614,6 +6789,7 @@
               <a:spcAft>
                 <a:spcPts val="700"/>
               </a:spcAft>
+              <a:buNone/>
             </a:pPr>
             <a:r>
               <a:rPr sz="1200" b="1" i="0">
@@ -5621,8 +6797,10 @@
                   <a:srgbClr val="CF3338"/>
                 </a:solidFill>
                 <a:latin typeface="Arial"/>
+                <a:ea typeface="Arial"/>
+                <a:cs typeface="Arial"/>
               </a:rPr>
-              <a:t>▶  </a:t>
+              <a:t>• </a:t>
             </a:r>
             <a:r>
               <a:rPr sz="1600" b="0" i="0">
@@ -5630,8 +6808,10 @@
                   <a:srgbClr val="1F2120"/>
                 </a:solidFill>
                 <a:latin typeface="Arial"/>
+                <a:ea typeface="Arial"/>
+                <a:cs typeface="Arial"/>
               </a:rPr>
-              <a:t>Pick your most-used workbook and press Ctrl+T on the main range. Give the table a real name.</a:t>
+              <a:t>Pick one range you use often. Remove subtotal rows and blanks.</a:t>
             </a:r>
           </a:p>
           <a:p>
@@ -5639,6 +6819,7 @@
               <a:spcAft>
                 <a:spcPts val="700"/>
               </a:spcAft>
+              <a:buNone/>
             </a:pPr>
             <a:r>
               <a:rPr sz="1200" b="1" i="0">
@@ -5646,8 +6827,10 @@
                   <a:srgbClr val="CF3338"/>
                 </a:solidFill>
                 <a:latin typeface="Arial"/>
+                <a:ea typeface="Arial"/>
+                <a:cs typeface="Arial"/>
               </a:rPr>
-              <a:t>▶  </a:t>
+              <a:t>• </a:t>
             </a:r>
             <a:r>
               <a:rPr sz="1600" b="0" i="0">
@@ -5655,8 +6838,10 @@
                   <a:srgbClr val="1F2120"/>
                 </a:solidFill>
                 <a:latin typeface="Arial"/>
+                <a:ea typeface="Arial"/>
+                <a:cs typeface="Arial"/>
               </a:rPr>
-              <a:t>Rewrite one fragile formula with structured references and read it out loud.</a:t>
+              <a:t>Press Ctrl+T, confirm headers, and give the table a useful name.</a:t>
             </a:r>
           </a:p>
           <a:p>
@@ -5664,6 +6849,7 @@
               <a:spcAft>
                 <a:spcPts val="700"/>
               </a:spcAft>
+              <a:buNone/>
             </a:pPr>
             <a:r>
               <a:rPr sz="1200" b="1" i="0">
@@ -5671,8 +6857,10 @@
                   <a:srgbClr val="CF3338"/>
                 </a:solidFill>
                 <a:latin typeface="Arial"/>
+                <a:ea typeface="Arial"/>
+                <a:cs typeface="Arial"/>
               </a:rPr>
-              <a:t>▶  </a:t>
+              <a:t>• </a:t>
             </a:r>
             <a:r>
               <a:rPr sz="1600" b="0" i="0">
@@ -5680,13 +6868,230 @@
                   <a:srgbClr val="1F2120"/>
                 </a:solidFill>
                 <a:latin typeface="Arial"/>
+                <a:ea typeface="Arial"/>
+                <a:cs typeface="Arial"/>
               </a:rPr>
-              <a:t>Rerun an Analyze Data question you tried Monday and compare the answers.</a:t>
+              <a:t>Optional: try =SUM(YourTable[Amount]) with your own table and column names.</a:t>
+            </a:r>
+          </a:p>
+        </p:txBody>
+      </p:sp>
+      <p:sp>
+        <p:nvSpPr>
+          <p:cNvPr id="4" name="Chat prompt panel">
+            <a:extLst>
+              <a:ext uri="{FF2B5EF4-FFF2-40B4-BE49-F238E27FC236}">
+                <a16:creationId xmlns:a16="http://schemas.microsoft.com/office/drawing/2014/main" id="{9D31FC1A-A75D-4B10-BCF2-3305A7B21435}"/>
+              </a:ext>
+            </a:extLst>
+          </p:cNvPr>
+          <p:cNvSpPr>
+            <a:spLocks noGrp="1"/>
+          </p:cNvSpPr>
+          <p:nvPr/>
+        </p:nvSpPr>
+        <p:spPr>
+          <a:xfrm>
+            <a:off x="638175" y="4476750"/>
+            <a:ext cx="10896600" cy="1352550"/>
+          </a:xfrm>
+          <a:prstGeom prst="rect">
+            <a:avLst/>
+          </a:prstGeom>
+          <a:solidFill>
+            <a:srgbClr val="1F2120"/>
+          </a:solidFill>
+          <a:ln w="0">
+            <a:noFill/>
+          </a:ln>
+        </p:spPr>
+        <p:txBody>
+          <a:bodyPr wrap="square" lIns="0" tIns="0" rIns="0" bIns="0">
+            <a:noAutofit/>
+          </a:bodyPr>
+          <a:lstStyle/>
+          <a:p>
+            <a:endParaRPr/>
+          </a:p>
+        </p:txBody>
+      </p:sp>
+      <p:sp>
+        <p:nvSpPr>
+          <p:cNvPr id="5" name="Chat question">
+            <a:extLst>
+              <a:ext uri="{FF2B5EF4-FFF2-40B4-BE49-F238E27FC236}">
+                <a16:creationId xmlns:a16="http://schemas.microsoft.com/office/drawing/2014/main" id="{60C36156-A82B-4B58-9592-CE179AB73E42}"/>
+              </a:ext>
+            </a:extLst>
+          </p:cNvPr>
+          <p:cNvSpPr>
+            <a:spLocks noGrp="1"/>
+          </p:cNvSpPr>
+          <p:nvPr/>
+        </p:nvSpPr>
+        <p:spPr>
+          <a:xfrm>
+            <a:off x="857250" y="4619625"/>
+            <a:ext cx="10429875" cy="381000"/>
+          </a:xfrm>
+          <a:prstGeom prst="rect">
+            <a:avLst/>
+          </a:prstGeom>
+          <a:noFill/>
+          <a:ln w="0">
+            <a:noFill/>
+          </a:ln>
+        </p:spPr>
+        <p:txBody>
+          <a:bodyPr wrap="square" lIns="0" tIns="0" rIns="0" bIns="0">
+            <a:noAutofit/>
+          </a:bodyPr>
+          <a:lstStyle/>
+          <a:p>
+            <a:pPr>
+              <a:defRPr sz="2100" b="1">
+                <a:solidFill>
+                  <a:srgbClr val="FFFFFF"/>
+                </a:solidFill>
+                <a:latin typeface="Arial"/>
+                <a:ea typeface="Arial"/>
+                <a:cs typeface="Arial"/>
+              </a:defRPr>
+            </a:pPr>
+            <a:r>
+              <a:rPr sz="2100" b="1">
+                <a:solidFill>
+                  <a:srgbClr val="FFFFFF"/>
+                </a:solidFill>
+                <a:latin typeface="Arial"/>
+                <a:ea typeface="Arial"/>
+                <a:cs typeface="Arial"/>
+              </a:rPr>
+              <a:t>A name for your first table?</a:t>
+            </a:r>
+          </a:p>
+        </p:txBody>
+      </p:sp>
+      <p:sp>
+        <p:nvSpPr>
+          <p:cNvPr id="6" name="Chat choices">
+            <a:extLst>
+              <a:ext uri="{FF2B5EF4-FFF2-40B4-BE49-F238E27FC236}">
+                <a16:creationId xmlns:a16="http://schemas.microsoft.com/office/drawing/2014/main" id="{951AE13E-811F-494E-91DC-5DC4F3B84635}"/>
+              </a:ext>
+            </a:extLst>
+          </p:cNvPr>
+          <p:cNvSpPr>
+            <a:spLocks noGrp="1"/>
+          </p:cNvSpPr>
+          <p:nvPr/>
+        </p:nvSpPr>
+        <p:spPr>
+          <a:xfrm>
+            <a:off x="857250" y="5086350"/>
+            <a:ext cx="6858000" cy="419100"/>
+          </a:xfrm>
+          <a:prstGeom prst="rect">
+            <a:avLst/>
+          </a:prstGeom>
+          <a:noFill/>
+          <a:ln w="0">
+            <a:noFill/>
+          </a:ln>
+        </p:spPr>
+        <p:txBody>
+          <a:bodyPr wrap="square" lIns="0" tIns="0" rIns="0" bIns="0">
+            <a:noAutofit/>
+          </a:bodyPr>
+          <a:lstStyle/>
+          <a:p>
+            <a:pPr>
+              <a:defRPr sz="2400" b="1">
+                <a:solidFill>
+                  <a:srgbClr val="FFFFFF"/>
+                </a:solidFill>
+                <a:latin typeface="Arial"/>
+                <a:ea typeface="Arial"/>
+                <a:cs typeface="Arial"/>
+              </a:defRPr>
+            </a:pPr>
+            <a:r>
+              <a:rPr sz="2400" b="1">
+                <a:solidFill>
+                  <a:srgbClr val="FFFFFF"/>
+                </a:solidFill>
+                <a:latin typeface="Arial"/>
+                <a:ea typeface="Arial"/>
+                <a:cs typeface="Arial"/>
+              </a:rPr>
+              <a:t>SALES / EXPENSES / OTHER</a:t>
+            </a:r>
+          </a:p>
+        </p:txBody>
+      </p:sp>
+      <p:sp>
+        <p:nvSpPr>
+          <p:cNvPr id="7" name="Chat instruction">
+            <a:extLst>
+              <a:ext uri="{FF2B5EF4-FFF2-40B4-BE49-F238E27FC236}">
+                <a16:creationId xmlns:a16="http://schemas.microsoft.com/office/drawing/2014/main" id="{C521146E-A40D-49A8-85F3-B8EB0A024D29}"/>
+              </a:ext>
+            </a:extLst>
+          </p:cNvPr>
+          <p:cNvSpPr>
+            <a:spLocks noGrp="1"/>
+          </p:cNvSpPr>
+          <p:nvPr/>
+        </p:nvSpPr>
+        <p:spPr>
+          <a:xfrm>
+            <a:off x="8143875" y="5219700"/>
+            <a:ext cx="3048000" cy="400050"/>
+          </a:xfrm>
+          <a:prstGeom prst="rect">
+            <a:avLst/>
+          </a:prstGeom>
+          <a:noFill/>
+          <a:ln w="0">
+            <a:noFill/>
+          </a:ln>
+        </p:spPr>
+        <p:txBody>
+          <a:bodyPr wrap="square" lIns="0" tIns="0" rIns="0" bIns="0">
+            <a:noAutofit/>
+          </a:bodyPr>
+          <a:lstStyle/>
+          <a:p>
+            <a:pPr>
+              <a:defRPr sz="1425" b="0">
+                <a:solidFill>
+                  <a:srgbClr val="FFFFFF"/>
+                </a:solidFill>
+                <a:latin typeface="Arial"/>
+                <a:ea typeface="Arial"/>
+                <a:cs typeface="Arial"/>
+              </a:defRPr>
+            </a:pPr>
+            <a:r>
+              <a:rPr sz="1425" b="0">
+                <a:solidFill>
+                  <a:srgbClr val="FFFFFF"/>
+                </a:solidFill>
+                <a:latin typeface="Arial"/>
+                <a:ea typeface="Arial"/>
+                <a:cs typeface="Arial"/>
+              </a:rPr>
+              <a:t>Type one word in chat.</a:t>
             </a:r>
           </a:p>
         </p:txBody>
       </p:sp>
     </p:spTree>
+    <p:extLst>
+      <p:ext uri="{BB962C8B-B14F-4D97-AF65-F5344CB8AC3E}">
+        <p14:creationId xmlns:p14="http://schemas.microsoft.com/office/powerpoint/2010/main" val="3476957"/>
+      </p:ext>
+    </p:extLst>
   </p:cSld>
   <p:clrMapOvr>
     <a:masterClrMapping/>
@@ -5694,8 +7099,8 @@
 </p:sld>
 </file>
 
-<file path=ppt/slides/slide8.xml><?xml version="1.0" encoding="utf-8"?>
-<p:sld xmlns:a="http://schemas.openxmlformats.org/drawingml/2006/main" xmlns:p="http://schemas.openxmlformats.org/presentationml/2006/main" xmlns:r="http://schemas.openxmlformats.org/officeDocument/2006/relationships">
+<file path=ppt/slides/slide7.xml><?xml version="1.0" encoding="utf-8"?>
+<p:sld xmlns:a="http://schemas.openxmlformats.org/drawingml/2006/main" xmlns:r="http://schemas.openxmlformats.org/officeDocument/2006/relationships" xmlns:p="http://schemas.openxmlformats.org/presentationml/2006/main">
   <p:cSld>
     <p:bg>
       <p:bgPr>
@@ -5711,11 +7116,26 @@
         <p:cNvGrpSpPr/>
         <p:nvPr/>
       </p:nvGrpSpPr>
-      <p:grpSpPr/>
-      <p:sp>
-        <p:nvSpPr>
-          <p:cNvPr id="2" name="TextBox 1"/>
-          <p:cNvSpPr txBox="1"/>
+      <p:grpSpPr>
+        <a:xfrm>
+          <a:off x="0" y="0"/>
+          <a:ext cx="0" cy="0"/>
+          <a:chOff x="0" y="0"/>
+          <a:chExt cx="0" cy="0"/>
+        </a:xfrm>
+      </p:grpSpPr>
+      <p:sp>
+        <p:nvSpPr>
+          <p:cNvPr id="2" name="TextBox 1">
+            <a:extLst>
+              <a:ext uri="{FF2B5EF4-FFF2-40B4-BE49-F238E27FC236}">
+                <a16:creationId xmlns:a16="http://schemas.microsoft.com/office/drawing/2014/main" id="{82BE268E-836B-486C-8193-F92D7F98D486}"/>
+              </a:ext>
+            </a:extLst>
+          </p:cNvPr>
+          <p:cNvSpPr>
+            <a:spLocks noGrp="1"/>
+          </p:cNvSpPr>
           <p:nvPr/>
         </p:nvSpPr>
         <p:spPr>
@@ -5729,7 +7149,7 @@
           <a:noFill/>
         </p:spPr>
         <p:txBody>
-          <a:bodyPr wrap="square" lIns="0" rIns="0" tIns="0" bIns="0">
+          <a:bodyPr wrap="square" lIns="0" tIns="0" rIns="0" bIns="0">
             <a:spAutoFit/>
           </a:bodyPr>
           <a:lstStyle/>
@@ -5740,6 +7160,8 @@
                   <a:srgbClr val="FFFFFF"/>
                 </a:solidFill>
                 <a:latin typeface="Arial Black"/>
+                <a:ea typeface="Arial Black"/>
+                <a:cs typeface="Arial Black"/>
               </a:rPr>
               <a:t>TOMORROW</a:t>
             </a:r>
@@ -5749,6 +7171,7 @@
               <a:spcBef>
                 <a:spcPts val="800"/>
               </a:spcBef>
+              <a:buNone/>
             </a:pPr>
             <a:r>
               <a:rPr sz="3600" b="1" i="0">
@@ -5756,6 +7179,8 @@
                   <a:srgbClr val="FFFFFF"/>
                 </a:solidFill>
                 <a:latin typeface="Arial Black"/>
+                <a:ea typeface="Arial Black"/>
+                <a:cs typeface="Arial Black"/>
               </a:rPr>
               <a:t>Clean data so AI doesn't lie to you</a:t>
             </a:r>
@@ -5765,6 +7190,7 @@
               <a:spcBef>
                 <a:spcPts val="1400"/>
               </a:spcBef>
+              <a:buNone/>
             </a:pPr>
             <a:r>
               <a:rPr sz="1800" b="0" i="0">
@@ -5772,13 +7198,20 @@
                   <a:srgbClr val="FFFFFF"/>
                 </a:solidFill>
                 <a:latin typeface="Arial"/>
+                <a:ea typeface="Arial"/>
+                <a:cs typeface="Arial"/>
               </a:rPr>
-              <a:t>Power Query: the automation people think they need AI for, plus the fix for the seven-region lie.</a:t>
+              <a:t>Power Query: the automation people think they need AI for, plus the fix for the region-label problem.</a:t>
             </a:r>
           </a:p>
         </p:txBody>
       </p:sp>
     </p:spTree>
+    <p:extLst>
+      <p:ext uri="{BB962C8B-B14F-4D97-AF65-F5344CB8AC3E}">
+        <p14:creationId xmlns:p14="http://schemas.microsoft.com/office/powerpoint/2010/main" val="1620834284"/>
+      </p:ext>
+    </p:extLst>
   </p:cSld>
   <p:clrMapOvr>
     <a:masterClrMapping/>
@@ -5786,8 +7219,8 @@
 </p:sld>
 </file>
 
-<file path=ppt/slides/slide9.xml><?xml version="1.0" encoding="utf-8"?>
-<p:sld xmlns:a="http://schemas.openxmlformats.org/drawingml/2006/main" xmlns:p="http://schemas.openxmlformats.org/presentationml/2006/main" xmlns:r="http://schemas.openxmlformats.org/officeDocument/2006/relationships">
+<file path=ppt/slides/slide8.xml><?xml version="1.0" encoding="utf-8"?>
+<p:sld xmlns:a="http://schemas.openxmlformats.org/drawingml/2006/main" xmlns:r="http://schemas.openxmlformats.org/officeDocument/2006/relationships" xmlns:p="http://schemas.openxmlformats.org/presentationml/2006/main">
   <p:cSld>
     <p:bg>
       <p:bgPr>
@@ -5803,17 +7236,32 @@
         <p:cNvGrpSpPr/>
         <p:nvPr/>
       </p:nvGrpSpPr>
-      <p:grpSpPr/>
-      <p:sp>
-        <p:nvSpPr>
-          <p:cNvPr id="2" name="TextBox 1"/>
-          <p:cNvSpPr txBox="1"/>
+      <p:grpSpPr>
+        <a:xfrm>
+          <a:off x="0" y="0"/>
+          <a:ext cx="0" cy="0"/>
+          <a:chOff x="0" y="0"/>
+          <a:chExt cx="0" cy="0"/>
+        </a:xfrm>
+      </p:grpSpPr>
+      <p:sp>
+        <p:nvSpPr>
+          <p:cNvPr id="2" name="TextBox 1">
+            <a:extLst>
+              <a:ext uri="{FF2B5EF4-FFF2-40B4-BE49-F238E27FC236}">
+                <a16:creationId xmlns:a16="http://schemas.microsoft.com/office/drawing/2014/main" id="{A40F9BF3-94FF-496D-A3A7-46EC70DC0ACF}"/>
+              </a:ext>
+            </a:extLst>
+          </p:cNvPr>
+          <p:cNvSpPr>
+            <a:spLocks noGrp="1"/>
+          </p:cNvSpPr>
           <p:nvPr/>
         </p:nvSpPr>
         <p:spPr>
           <a:xfrm>
-            <a:off x="822960" y="2286000"/>
-            <a:ext cx="10332720" cy="2743200"/>
+            <a:off x="822960" y="2103120"/>
+            <a:ext cx="10515600" cy="2114550"/>
           </a:xfrm>
           <a:prstGeom prst="rect">
             <a:avLst/>
@@ -5821,7 +7269,7 @@
           <a:noFill/>
         </p:spPr>
         <p:txBody>
-          <a:bodyPr wrap="square" lIns="0" rIns="0" tIns="0" bIns="0">
+          <a:bodyPr wrap="square" lIns="0" tIns="0" rIns="0" bIns="0">
             <a:spAutoFit/>
           </a:bodyPr>
           <a:lstStyle/>
@@ -5832,6 +7280,8 @@
                   <a:srgbClr val="FFFFFF"/>
                 </a:solidFill>
                 <a:latin typeface="Arial Black"/>
+                <a:ea typeface="Arial Black"/>
+                <a:cs typeface="Arial Black"/>
               </a:rPr>
               <a:t>THANK YOU</a:t>
             </a:r>
@@ -5841,6 +7291,7 @@
               <a:spcBef>
                 <a:spcPts val="800"/>
               </a:spcBef>
+              <a:buNone/>
             </a:pPr>
             <a:r>
               <a:rPr sz="3600" b="1" i="0">
@@ -5848,6 +7299,8 @@
                   <a:srgbClr val="FFFFFF"/>
                 </a:solidFill>
                 <a:latin typeface="Arial Black"/>
+                <a:ea typeface="Arial Black"/>
+                <a:cs typeface="Arial Black"/>
               </a:rPr>
               <a:t>See you tomorrow at noon Eastern</a:t>
             </a:r>
@@ -5857,6 +7310,7 @@
               <a:spcBef>
                 <a:spcPts val="1400"/>
               </a:spcBef>
+              <a:buNone/>
             </a:pPr>
             <a:r>
               <a:rPr sz="1800" b="0" i="0">
@@ -5864,6 +7318,8 @@
                   <a:srgbClr val="FFFFFF"/>
                 </a:solidFill>
                 <a:latin typeface="Arial"/>
+                <a:ea typeface="Arial"/>
+                <a:cs typeface="Arial"/>
               </a:rPr>
               <a:t>Replays live in the Stringfest membership vault.</a:t>
             </a:r>
@@ -5871,6 +7327,11 @@
         </p:txBody>
       </p:sp>
     </p:spTree>
+    <p:extLst>
+      <p:ext uri="{BB962C8B-B14F-4D97-AF65-F5344CB8AC3E}">
+        <p14:creationId xmlns:p14="http://schemas.microsoft.com/office/powerpoint/2010/main" val="50353351"/>
+      </p:ext>
+    </p:extLst>
   </p:cSld>
   <p:clrMapOvr>
     <a:masterClrMapping/>
@@ -6040,7 +7501,7 @@
         </a:gradFill>
       </a:fillStyleLst>
       <a:lnStyleLst>
-        <a:ln w="9525" cap="flat" cmpd="sng" algn="ctr">
+        <a:ln w="9525">
           <a:solidFill>
             <a:schemeClr val="phClr">
               <a:shade val="95000"/>
@@ -6049,13 +7510,13 @@
           </a:solidFill>
           <a:prstDash val="solid"/>
         </a:ln>
-        <a:ln w="25400" cap="flat" cmpd="sng" algn="ctr">
+        <a:ln w="25400">
           <a:solidFill>
             <a:schemeClr val="phClr"/>
           </a:solidFill>
           <a:prstDash val="solid"/>
         </a:ln>
-        <a:ln w="38100" cap="flat" cmpd="sng" algn="ctr">
+        <a:ln w="38100">
           <a:solidFill>
             <a:schemeClr val="phClr"/>
           </a:solidFill>
@@ -6089,17 +7550,6 @@
               </a:srgbClr>
             </a:outerShdw>
           </a:effectLst>
-          <a:scene3d>
-            <a:camera prst="orthographicFront">
-              <a:rot lat="0" lon="0" rev="0"/>
-            </a:camera>
-            <a:lightRig rig="threePt" dir="t">
-              <a:rot lat="0" lon="0" rev="1200000"/>
-            </a:lightRig>
-          </a:scene3d>
-          <a:sp3d>
-            <a:bevelT w="63500" h="25400"/>
-          </a:sp3d>
         </a:effectStyle>
       </a:effectStyleLst>
       <a:bgFillStyleLst>
@@ -6154,46 +7604,7 @@
       </a:bgFillStyleLst>
     </a:fmtScheme>
   </a:themeElements>
-  <a:objectDefaults>
-    <a:spDef>
-      <a:spPr/>
-      <a:bodyPr/>
-      <a:lstStyle/>
-      <a:style>
-        <a:lnRef idx="1">
-          <a:schemeClr val="accent1"/>
-        </a:lnRef>
-        <a:fillRef idx="3">
-          <a:schemeClr val="accent1"/>
-        </a:fillRef>
-        <a:effectRef idx="2">
-          <a:schemeClr val="accent1"/>
-        </a:effectRef>
-        <a:fontRef idx="minor">
-          <a:schemeClr val="lt1"/>
-        </a:fontRef>
-      </a:style>
-    </a:spDef>
-    <a:lnDef>
-      <a:spPr/>
-      <a:bodyPr/>
-      <a:lstStyle/>
-      <a:style>
-        <a:lnRef idx="2">
-          <a:schemeClr val="accent1"/>
-        </a:lnRef>
-        <a:fillRef idx="0">
-          <a:schemeClr val="accent1"/>
-        </a:fillRef>
-        <a:effectRef idx="1">
-          <a:schemeClr val="accent1"/>
-        </a:effectRef>
-        <a:fontRef idx="minor">
-          <a:schemeClr val="tx1"/>
-        </a:fontRef>
-      </a:style>
-    </a:lnDef>
-  </a:objectDefaults>
+  <a:objectDefaults/>
   <a:extraClrSchemeLst/>
 </a:theme>
 </file>
@@ -6360,7 +7771,7 @@
         </a:gradFill>
       </a:fillStyleLst>
       <a:lnStyleLst>
-        <a:ln w="9525" cap="flat" cmpd="sng" algn="ctr">
+        <a:ln w="9525">
           <a:solidFill>
             <a:schemeClr val="phClr">
               <a:shade val="95000"/>
@@ -6369,13 +7780,13 @@
           </a:solidFill>
           <a:prstDash val="solid"/>
         </a:ln>
-        <a:ln w="25400" cap="flat" cmpd="sng" algn="ctr">
+        <a:ln w="25400">
           <a:solidFill>
             <a:schemeClr val="phClr"/>
           </a:solidFill>
           <a:prstDash val="solid"/>
         </a:ln>
-        <a:ln w="38100" cap="flat" cmpd="sng" algn="ctr">
+        <a:ln w="38100">
           <a:solidFill>
             <a:schemeClr val="phClr"/>
           </a:solidFill>
@@ -6409,17 +7820,6 @@
               </a:srgbClr>
             </a:outerShdw>
           </a:effectLst>
-          <a:scene3d>
-            <a:camera prst="orthographicFront">
-              <a:rot lat="0" lon="0" rev="0"/>
-            </a:camera>
-            <a:lightRig rig="threePt" dir="t">
-              <a:rot lat="0" lon="0" rev="1200000"/>
-            </a:lightRig>
-          </a:scene3d>
-          <a:sp3d>
-            <a:bevelT w="63500" h="25400"/>
-          </a:sp3d>
         </a:effectStyle>
       </a:effectStyleLst>
       <a:bgFillStyleLst>
@@ -6474,46 +7874,7 @@
       </a:bgFillStyleLst>
     </a:fmtScheme>
   </a:themeElements>
-  <a:objectDefaults>
-    <a:spDef>
-      <a:spPr/>
-      <a:bodyPr/>
-      <a:lstStyle/>
-      <a:style>
-        <a:lnRef idx="1">
-          <a:schemeClr val="accent1"/>
-        </a:lnRef>
-        <a:fillRef idx="3">
-          <a:schemeClr val="accent1"/>
-        </a:fillRef>
-        <a:effectRef idx="2">
-          <a:schemeClr val="accent1"/>
-        </a:effectRef>
-        <a:fontRef idx="minor">
-          <a:schemeClr val="lt1"/>
-        </a:fontRef>
-      </a:style>
-    </a:spDef>
-    <a:lnDef>
-      <a:spPr/>
-      <a:bodyPr/>
-      <a:lstStyle/>
-      <a:style>
-        <a:lnRef idx="2">
-          <a:schemeClr val="accent1"/>
-        </a:lnRef>
-        <a:fillRef idx="0">
-          <a:schemeClr val="accent1"/>
-        </a:fillRef>
-        <a:effectRef idx="1">
-          <a:schemeClr val="accent1"/>
-        </a:effectRef>
-        <a:fontRef idx="minor">
-          <a:schemeClr val="tx1"/>
-        </a:fontRef>
-      </a:style>
-    </a:lnDef>
-  </a:objectDefaults>
+  <a:objectDefaults/>
   <a:extraClrSchemeLst/>
 </a:theme>
 </file>
--- a/Day 2/Guerrilla AI - Day 2 - Slides.pptx
+++ b/Day 2/Guerrilla AI - Day 2 - Slides.pptx
@@ -5,17 +5,16 @@
     <p:sldMasterId id="2147483648" r:id="rId1"/>
   </p:sldMasterIdLst>
   <p:notesMasterIdLst>
-    <p:notesMasterId r:id="rId10"/>
+    <p:notesMasterId r:id="rId9"/>
   </p:notesMasterIdLst>
   <p:sldIdLst>
     <p:sldId id="256" r:id="rId2"/>
     <p:sldId id="257" r:id="rId3"/>
     <p:sldId id="260" r:id="rId4"/>
     <p:sldId id="258" r:id="rId5"/>
-    <p:sldId id="261" r:id="rId6"/>
-    <p:sldId id="262" r:id="rId7"/>
-    <p:sldId id="263" r:id="rId8"/>
-    <p:sldId id="264" r:id="rId9"/>
+    <p:sldId id="262" r:id="rId6"/>
+    <p:sldId id="263" r:id="rId7"/>
+    <p:sldId id="264" r:id="rId8"/>
   </p:sldIdLst>
   <p:sldSz cx="12192000" cy="6858000"/>
   <p:notesSz cx="6858000" cy="9144000"/>
@@ -733,12 +732,12 @@
           <a:lstStyle/>
           <a:p>
             <a:r>
-              <a:t>CHAT CUE (about 11:00; budget 15 seconds total)</a:t>
-            </a:r>
-          </a:p>
-          <a:p>
-            <a:r>
-              <a:t>SAY: We made a table. Did that fix the region typos, YES or NO? You can read the labels on my screen.</a:t>
+              <a:t>CHAT CUE (about 16:30; budget 15 seconds total)</a:t>
+            </a:r>
+          </a:p>
+          <a:p>
+            <a:r>
+              <a:t>SAY: For your own workbook, which table name would fit: SALES, EXPENSES, or OTHER? One word is enough.</a:t>
             </a:r>
           </a:p>
           <a:p>
@@ -748,12 +747,12 @@
           </a:p>
           <a:p>
             <a:r>
-              <a:t>IF SOMEONE REPLIES: NO. Ctrl+T adds table structure, not data cleanup. Point to a remaining inconsistent Region label. Tomorrow's Power Query steps address that.</a:t>
-            </a:r>
-          </a:p>
-          <a:p>
-            <a:r>
-              <a:t>IF CHAT IS QUIET: Say, "The answer is NO. The table still contains the labels we put into it." Then continue. Never imply that somebody replied.</a:t>
+              <a:t>IF SOMEONE REPLIES: Acknowledge an actual choice. Give the main range a table name that describes its contents. This is the one desk action to prioritize.</a:t>
+            </a:r>
+          </a:p>
+          <a:p>
+            <a:r>
+              <a:t>IF CHAT IS QUIET: Say, "I'll use SalesData for this example. You can choose a name from your own work." Then continue. Never imply that somebody replied.</a:t>
             </a:r>
           </a:p>
           <a:p>
@@ -766,7 +765,7 @@
           </a:p>
           <a:p>
             <a:r>
-              <a:t>Use this cue at the indicated demo pause. Keep the Excel window visible when the prompt refers to its result.</a:t>
+              <a:t>Use this cue before reading the remaining notes.</a:t>
             </a:r>
           </a:p>
           <a:p>
@@ -774,12 +773,13 @@
           </a:p>
           <a:p>
             <a:r>
-              <a:t>ORIGINAL TEACHING SCRIPT</a:t>
-            </a:r>
-          </a:p>
-          <a:p>
-            <a:r>
-              <a:t>Part two, and this is the before-and-after that makes the whole day. Click inside SalesData, Home tab, Analyze Data, and I ask the exact question from Monday: total Amount by Region. Compare. No junk rows polluting the totals, because the TOTAL rows are gone. The suggestions reference SalesData and its column names instead of vague ranges. The pane is faster to useful answers because it is no longer guessing where the data starts and stops. The region typos are still there, we fix those tomorrow, but the structural confusion is gone. Same tool, same twenty seconds of effort, dramatically better output. That is what machine-readable buys, and it cost you one keyboard shortcut and a name.</a:t>
+              <a:t>TEACHING SCRIPT
+Pick one small next action. You do not need to complete every option. Pick one range you use often. Remove subtotal rows and blanks. Press Ctrl+T, confirm headers, and give the table a useful name. Optional: try =SUM(YourTable[Amount]) with your own table and column names.</a:t>
+            </a:r>
+          </a:p>
+          <a:p>
+            <a:r>
+              <a:t>Desk actions, three again. One: open the workbook you live in and press Control T on its main range, then give the table a real name, not Table1. Two: take one fragile formula, the kind with dollar signs and mystery ranges, rewrite it with structured references, and read it out loud. If it reads like a sentence, you did it right. Three: rerun the Analyze Data question you tried Monday and compare the answers side by side. That comparison is the proof you can show a skeptical coworker.</a:t>
             </a:r>
           </a:p>
         </p:txBody>
@@ -856,54 +856,7 @@
           <a:lstStyle/>
           <a:p>
             <a:r>
-              <a:t>CHAT CUE (about 16:30; budget 15 seconds total)</a:t>
-            </a:r>
-          </a:p>
-          <a:p>
-            <a:r>
-              <a:t>SAY: For your own workbook, which table name would fit: SALES, EXPENSES, or OTHER? One word is enough.</a:t>
-            </a:r>
-          </a:p>
-          <a:p>
-            <a:r>
-              <a:t>PAUSE: Wait silently for 8 seconds. Do not repeat the request.</a:t>
-            </a:r>
-          </a:p>
-          <a:p>
-            <a:r>
-              <a:t>IF SOMEONE REPLIES: Acknowledge an actual choice. Give the main range a table name that describes its contents. This is the one desk action to prioritize.</a:t>
-            </a:r>
-          </a:p>
-          <a:p>
-            <a:r>
-              <a:t>IF CHAT IS QUIET: Say, "I'll use SalesData for this example. You can choose a name from your own work." Then continue. Never imply that somebody replied.</a:t>
-            </a:r>
-          </a:p>
-          <a:p>
-            <a:r>
-              <a:t>FACILITATION: Acknowledge at most two actual replies, without calling on anyone by name. Accept a letter, a word, or a longer question. If a reply arrives later, acknowledge it at the next natural pause.</a:t>
-            </a:r>
-          </a:p>
-          <a:p>
-            <a:endParaRPr/>
-          </a:p>
-          <a:p>
-            <a:r>
-              <a:t>Use this cue before reading the remaining notes.</a:t>
-            </a:r>
-          </a:p>
-          <a:p>
-            <a:endParaRPr/>
-          </a:p>
-          <a:p>
-            <a:r>
-              <a:t>TEACHING SCRIPT
-Pick one small next action. You do not need to complete every option. Pick one range you use often. Remove subtotal rows and blanks. Press Ctrl+T, confirm headers, and give the table a useful name. Optional: try =SUM(YourTable[Amount]) with your own table and column names.</a:t>
-            </a:r>
-          </a:p>
-          <a:p>
-            <a:r>
-              <a:t>Desk actions, three again. One: open the workbook you live in and press Control T on its main range, then give the table a real name, not Table1. Two: take one fragile formula, the kind with dollar signs and mystery ranges, rewrite it with structured references, and read it out loud. If it reads like a sentence, you did it right. Three: rerun the Analyze Data question you tried Monday and compare the answers side by side. That comparison is the proof you can show a skeptical coworker.</a:t>
+              <a:t>Tomorrow is the day the region-label problem dies. Power Query records a cleanup once and replays it forever, which is the automated data prep people assume requires AI, delivered with zero AI. We will check the refreshed result on screen. Noon Eastern, twenty minutes, bring the export you hate cleaning.</a:t>
             </a:r>
           </a:p>
         </p:txBody>
@@ -980,83 +933,6 @@
           <a:lstStyle/>
           <a:p>
             <a:r>
-              <a:t>Tomorrow is the day the region-label problem dies. Power Query records a cleanup once and replays it forever, which is the automated data prep people assume requires AI, delivered with zero AI. We will check the refreshed result on screen. Noon Eastern, twenty minutes, bring the export you hate cleaning.</a:t>
-            </a:r>
-          </a:p>
-        </p:txBody>
-      </p:sp>
-      <p:sp>
-        <p:nvSpPr>
-          <p:cNvPr id="4" name="Slide Number Placeholder 3"/>
-          <p:cNvSpPr>
-            <a:spLocks noGrp="1"/>
-          </p:cNvSpPr>
-          <p:nvPr>
-            <p:ph type="sldNum" idx="5"/>
-          </p:nvPr>
-        </p:nvSpPr>
-        <p:spPr/>
-        <p:txBody>
-          <a:bodyPr/>
-          <a:lstStyle/>
-          <a:p>
-            <a:endParaRPr/>
-          </a:p>
-        </p:txBody>
-      </p:sp>
-    </p:spTree>
-  </p:cSld>
-  <p:clrMapOvr>
-    <a:masterClrMapping/>
-  </p:clrMapOvr>
-</p:notes>
-</file>
-
-<file path=ppt/notesSlides/notesSlide8.xml><?xml version="1.0" encoding="utf-8"?>
-<p:notes xmlns:a="http://schemas.openxmlformats.org/drawingml/2006/main" xmlns:r="http://schemas.openxmlformats.org/officeDocument/2006/relationships" xmlns:p="http://schemas.openxmlformats.org/presentationml/2006/main">
-  <p:cSld>
-    <p:spTree>
-      <p:nvGrpSpPr>
-        <p:cNvPr id="1" name=""/>
-        <p:cNvGrpSpPr/>
-        <p:nvPr/>
-      </p:nvGrpSpPr>
-      <p:grpSpPr>
-        <a:xfrm>
-          <a:off x="0" y="0"/>
-          <a:ext cx="0" cy="0"/>
-          <a:chOff x="0" y="0"/>
-          <a:chExt cx="0" cy="0"/>
-        </a:xfrm>
-      </p:grpSpPr>
-      <p:sp>
-        <p:nvSpPr>
-          <p:cNvPr id="2" name="Slide Image Placeholder 1"/>
-          <p:cNvSpPr>
-            <a:spLocks noGrp="1" noRot="1" noChangeAspect="1"/>
-          </p:cNvSpPr>
-          <p:nvPr>
-            <p:ph type="sldImg"/>
-          </p:nvPr>
-        </p:nvSpPr>
-        <p:spPr/>
-      </p:sp>
-      <p:sp>
-        <p:nvSpPr>
-          <p:cNvPr id="3" name="Notes Placeholder 2"/>
-          <p:cNvSpPr>
-            <a:spLocks noGrp="1"/>
-          </p:cNvSpPr>
-          <p:nvPr>
-            <p:ph type="body" idx="1"/>
-          </p:nvPr>
-        </p:nvSpPr>
-        <p:spPr/>
-        <p:txBody>
-          <a:bodyPr/>
-          <a:lstStyle/>
-          <a:p>
-            <a:r>
               <a:t>CHAT CUE (about 18:30; budget 15 seconds total)</a:t>
             </a:r>
           </a:p>
@@ -1329,7 +1205,7 @@
           <a:lstStyle/>
           <a:p>
             <a:fld id="{5BCAD085-E8A6-8845-BD4E-CB4CCA059FC4}" type="datetimeFigureOut">
-              <a:t>9/27/2026</a:t>
+              <a:t>9/29/2026</a:t>
             </a:fld>
             <a:endParaRPr/>
           </a:p>
@@ -1524,7 +1400,7 @@
           <a:lstStyle/>
           <a:p>
             <a:fld id="{5BCAD085-E8A6-8845-BD4E-CB4CCA059FC4}" type="datetimeFigureOut">
-              <a:t>9/27/2026</a:t>
+              <a:t>9/29/2026</a:t>
             </a:fld>
             <a:endParaRPr/>
           </a:p>
@@ -1729,7 +1605,7 @@
           <a:lstStyle/>
           <a:p>
             <a:fld id="{5BCAD085-E8A6-8845-BD4E-CB4CCA059FC4}" type="datetimeFigureOut">
-              <a:t>9/27/2026</a:t>
+              <a:t>9/29/2026</a:t>
             </a:fld>
             <a:endParaRPr/>
           </a:p>
@@ -1924,7 +1800,7 @@
           <a:lstStyle/>
           <a:p>
             <a:fld id="{5BCAD085-E8A6-8845-BD4E-CB4CCA059FC4}" type="datetimeFigureOut">
-              <a:t>9/27/2026</a:t>
+              <a:t>9/29/2026</a:t>
             </a:fld>
             <a:endParaRPr/>
           </a:p>
@@ -2193,7 +2069,7 @@
           <a:lstStyle/>
           <a:p>
             <a:fld id="{5BCAD085-E8A6-8845-BD4E-CB4CCA059FC4}" type="datetimeFigureOut">
-              <a:t>9/27/2026</a:t>
+              <a:t>9/29/2026</a:t>
             </a:fld>
             <a:endParaRPr/>
           </a:p>
@@ -2534,7 +2410,7 @@
           <a:lstStyle/>
           <a:p>
             <a:fld id="{5BCAD085-E8A6-8845-BD4E-CB4CCA059FC4}" type="datetimeFigureOut">
-              <a:t>9/27/2026</a:t>
+              <a:t>9/29/2026</a:t>
             </a:fld>
             <a:endParaRPr/>
           </a:p>
@@ -3024,7 +2900,7 @@
           <a:lstStyle/>
           <a:p>
             <a:fld id="{5BCAD085-E8A6-8845-BD4E-CB4CCA059FC4}" type="datetimeFigureOut">
-              <a:t>9/27/2026</a:t>
+              <a:t>9/29/2026</a:t>
             </a:fld>
             <a:endParaRPr/>
           </a:p>
@@ -3157,7 +3033,7 @@
           <a:lstStyle/>
           <a:p>
             <a:fld id="{5BCAD085-E8A6-8845-BD4E-CB4CCA059FC4}" type="datetimeFigureOut">
-              <a:t>9/27/2026</a:t>
+              <a:t>9/29/2026</a:t>
             </a:fld>
             <a:endParaRPr/>
           </a:p>
@@ -3263,7 +3139,7 @@
           <a:lstStyle/>
           <a:p>
             <a:fld id="{5BCAD085-E8A6-8845-BD4E-CB4CCA059FC4}" type="datetimeFigureOut">
-              <a:t>9/27/2026</a:t>
+              <a:t>9/29/2026</a:t>
             </a:fld>
             <a:endParaRPr/>
           </a:p>
@@ -3582,7 +3458,7 @@
           <a:lstStyle/>
           <a:p>
             <a:fld id="{5BCAD085-E8A6-8845-BD4E-CB4CCA059FC4}" type="datetimeFigureOut">
-              <a:t>9/27/2026</a:t>
+              <a:t>9/29/2026</a:t>
             </a:fld>
             <a:endParaRPr/>
           </a:p>
@@ -3864,7 +3740,7 @@
           <a:lstStyle/>
           <a:p>
             <a:fld id="{5BCAD085-E8A6-8845-BD4E-CB4CCA059FC4}" type="datetimeFigureOut">
-              <a:t>9/27/2026</a:t>
+              <a:t>9/29/2026</a:t>
             </a:fld>
             <a:endParaRPr/>
           </a:p>
@@ -4103,7 +3979,7 @@
           </a:lstStyle>
           <a:p>
             <a:fld id="{5BCAD085-E8A6-8845-BD4E-CB4CCA059FC4}" type="datetimeFigureOut">
-              <a:t>9/27/2026</a:t>
+              <a:t>9/29/2026</a:t>
             </a:fld>
             <a:endParaRPr/>
           </a:p>
@@ -6059,641 +5935,6 @@
       </p:grpSpPr>
       <p:sp>
         <p:nvSpPr>
-          <p:cNvPr id="2" name="Rectangle 1">
-            <a:extLst>
-              <a:ext uri="{FF2B5EF4-FFF2-40B4-BE49-F238E27FC236}">
-                <a16:creationId xmlns:a16="http://schemas.microsoft.com/office/drawing/2014/main" id="{8CB89641-0C5D-4828-B5CF-8AC00BB59801}"/>
-              </a:ext>
-            </a:extLst>
-          </p:cNvPr>
-          <p:cNvSpPr>
-            <a:spLocks noGrp="1"/>
-          </p:cNvSpPr>
-          <p:nvPr/>
-        </p:nvSpPr>
-        <p:spPr>
-          <a:xfrm>
-            <a:off x="9082735" y="0"/>
-            <a:ext cx="3108960" cy="6858000"/>
-          </a:xfrm>
-          <a:prstGeom prst="rect">
-            <a:avLst/>
-          </a:prstGeom>
-          <a:solidFill>
-            <a:srgbClr val="CF3338"/>
-          </a:solidFill>
-          <a:ln>
-            <a:noFill/>
-          </a:ln>
-        </p:spPr>
-        <p:style>
-          <a:lnRef idx="1">
-            <a:schemeClr val="accent1"/>
-          </a:lnRef>
-          <a:fillRef idx="3">
-            <a:schemeClr val="accent1"/>
-          </a:fillRef>
-          <a:effectRef idx="2">
-            <a:schemeClr val="accent1"/>
-          </a:effectRef>
-          <a:fontRef idx="minor">
-            <a:schemeClr val="lt1"/>
-          </a:fontRef>
-        </p:style>
-        <p:txBody>
-          <a:bodyPr anchor="ctr"/>
-          <a:lstStyle/>
-          <a:p>
-            <a:pPr algn="ctr">
-              <a:buNone/>
-            </a:pPr>
-            <a:endParaRPr/>
-          </a:p>
-        </p:txBody>
-      </p:sp>
-      <p:sp>
-        <p:nvSpPr>
-          <p:cNvPr id="3" name="TextBox 2">
-            <a:extLst>
-              <a:ext uri="{FF2B5EF4-FFF2-40B4-BE49-F238E27FC236}">
-                <a16:creationId xmlns:a16="http://schemas.microsoft.com/office/drawing/2014/main" id="{724C5474-E254-4547-9996-4494CDB3DFFE}"/>
-              </a:ext>
-            </a:extLst>
-          </p:cNvPr>
-          <p:cNvSpPr>
-            <a:spLocks noGrp="1"/>
-          </p:cNvSpPr>
-          <p:nvPr/>
-        </p:nvSpPr>
-        <p:spPr>
-          <a:xfrm>
-            <a:off x="9311335" y="640080"/>
-            <a:ext cx="2468880" cy="1828800"/>
-          </a:xfrm>
-          <a:prstGeom prst="rect">
-            <a:avLst/>
-          </a:prstGeom>
-          <a:noFill/>
-        </p:spPr>
-        <p:txBody>
-          <a:bodyPr wrap="square" lIns="0" tIns="0" rIns="0" bIns="0">
-            <a:spAutoFit/>
-          </a:bodyPr>
-          <a:lstStyle/>
-          <a:p>
-            <a:r>
-              <a:rPr sz="2600" b="1" i="0">
-                <a:solidFill>
-                  <a:srgbClr val="FFFFFF"/>
-                </a:solidFill>
-                <a:latin typeface="Arial Black"/>
-                <a:ea typeface="Arial Black"/>
-                <a:cs typeface="Arial Black"/>
-              </a:rPr>
-              <a:t>LIVE</a:t>
-            </a:r>
-          </a:p>
-          <a:p>
-            <a:r>
-              <a:rPr sz="2600" b="1" i="0">
-                <a:solidFill>
-                  <a:srgbClr val="FFFFFF"/>
-                </a:solidFill>
-                <a:latin typeface="Arial Black"/>
-                <a:ea typeface="Arial Black"/>
-                <a:cs typeface="Arial Black"/>
-              </a:rPr>
-              <a:t>DEMO</a:t>
-            </a:r>
-          </a:p>
-        </p:txBody>
-      </p:sp>
-      <p:sp>
-        <p:nvSpPr>
-          <p:cNvPr id="4" name="TextBox 3">
-            <a:extLst>
-              <a:ext uri="{FF2B5EF4-FFF2-40B4-BE49-F238E27FC236}">
-                <a16:creationId xmlns:a16="http://schemas.microsoft.com/office/drawing/2014/main" id="{999BDAA5-B039-4114-9494-00FB13431BC4}"/>
-              </a:ext>
-            </a:extLst>
-          </p:cNvPr>
-          <p:cNvSpPr>
-            <a:spLocks noGrp="1"/>
-          </p:cNvSpPr>
-          <p:nvPr/>
-        </p:nvSpPr>
-        <p:spPr>
-          <a:xfrm>
-            <a:off x="548640" y="411480"/>
-            <a:ext cx="8229600" cy="1097280"/>
-          </a:xfrm>
-          <a:prstGeom prst="rect">
-            <a:avLst/>
-          </a:prstGeom>
-          <a:noFill/>
-        </p:spPr>
-        <p:txBody>
-          <a:bodyPr wrap="square" lIns="0" tIns="0" rIns="0" bIns="0">
-            <a:spAutoFit/>
-          </a:bodyPr>
-          <a:lstStyle/>
-          <a:p>
-            <a:r>
-              <a:rPr sz="2500" b="1" i="0">
-                <a:solidFill>
-                  <a:srgbClr val="CF3338"/>
-                </a:solidFill>
-                <a:latin typeface="Arial Black"/>
-                <a:ea typeface="Arial Black"/>
-                <a:cs typeface="Arial Black"/>
-              </a:rPr>
-              <a:t>Live demo: rerun Monday's question</a:t>
-            </a:r>
-          </a:p>
-          <a:p>
-            <a:pPr>
-              <a:spcBef>
-                <a:spcPts val="300"/>
-              </a:spcBef>
-              <a:buNone/>
-            </a:pPr>
-            <a:r>
-              <a:rPr sz="1450" b="0" i="1">
-                <a:solidFill>
-                  <a:srgbClr val="707070"/>
-                </a:solidFill>
-                <a:latin typeface="Arial"/>
-                <a:ea typeface="Arial"/>
-                <a:cs typeface="Arial"/>
-              </a:rPr>
-              <a:t>Same question as yesterday. Watch the quality jump.</a:t>
-            </a:r>
-          </a:p>
-        </p:txBody>
-      </p:sp>
-      <p:sp>
-        <p:nvSpPr>
-          <p:cNvPr id="5" name="Rounded Rectangle 4">
-            <a:extLst>
-              <a:ext uri="{FF2B5EF4-FFF2-40B4-BE49-F238E27FC236}">
-                <a16:creationId xmlns:a16="http://schemas.microsoft.com/office/drawing/2014/main" id="{7316317C-FACE-42F4-AB33-43843141F66B}"/>
-              </a:ext>
-            </a:extLst>
-          </p:cNvPr>
-          <p:cNvSpPr>
-            <a:spLocks noGrp="1"/>
-          </p:cNvSpPr>
-          <p:nvPr/>
-        </p:nvSpPr>
-        <p:spPr>
-          <a:xfrm>
-            <a:off x="548640" y="1600200"/>
-            <a:ext cx="8229600" cy="4023360"/>
-          </a:xfrm>
-          <a:prstGeom prst="roundRect">
-            <a:avLst/>
-          </a:prstGeom>
-          <a:solidFill>
-            <a:srgbClr val="2B2B2B"/>
-          </a:solidFill>
-          <a:ln>
-            <a:noFill/>
-          </a:ln>
-        </p:spPr>
-        <p:style>
-          <a:lnRef idx="1">
-            <a:schemeClr val="accent1"/>
-          </a:lnRef>
-          <a:fillRef idx="3">
-            <a:schemeClr val="accent1"/>
-          </a:fillRef>
-          <a:effectRef idx="2">
-            <a:schemeClr val="accent1"/>
-          </a:effectRef>
-          <a:fontRef idx="minor">
-            <a:schemeClr val="lt1"/>
-          </a:fontRef>
-        </p:style>
-        <p:txBody>
-          <a:bodyPr wrap="square" lIns="256032" tIns="182880" rIns="182880" bIns="109728" anchor="t"/>
-          <a:lstStyle/>
-          <a:p>
-            <a:pPr algn="l">
-              <a:spcAft>
-                <a:spcPts val="100"/>
-              </a:spcAft>
-              <a:buNone/>
-            </a:pPr>
-            <a:r>
-              <a:rPr sz="1300" b="0" i="0">
-                <a:solidFill>
-                  <a:srgbClr val="9EC57A"/>
-                </a:solidFill>
-                <a:latin typeface="Consolas"/>
-                <a:ea typeface="Consolas"/>
-                <a:cs typeface="Consolas"/>
-              </a:rPr>
-              <a:t># Same question, better answer</a:t>
-            </a:r>
-          </a:p>
-          <a:p>
-            <a:pPr algn="l">
-              <a:spcAft>
-                <a:spcPts val="100"/>
-              </a:spcAft>
-              <a:buNone/>
-            </a:pPr>
-            <a:r>
-              <a:rPr sz="1300" b="0" i="0">
-                <a:solidFill>
-                  <a:srgbClr val="F5F5F5"/>
-                </a:solidFill>
-                <a:latin typeface="Consolas"/>
-                <a:ea typeface="Consolas"/>
-                <a:cs typeface="Consolas"/>
-              </a:rPr>
-              <a:t>1. Click inside the SalesData table</a:t>
-            </a:r>
-          </a:p>
-          <a:p>
-            <a:pPr algn="l">
-              <a:spcAft>
-                <a:spcPts val="100"/>
-              </a:spcAft>
-              <a:buNone/>
-            </a:pPr>
-            <a:r>
-              <a:rPr sz="1300" b="0" i="0">
-                <a:solidFill>
-                  <a:srgbClr val="F5F5F5"/>
-                </a:solidFill>
-                <a:latin typeface="Consolas"/>
-                <a:ea typeface="Consolas"/>
-                <a:cs typeface="Consolas"/>
-              </a:rPr>
-              <a:t>2. Home tab &gt; Analyze Data</a:t>
-            </a:r>
-          </a:p>
-          <a:p>
-            <a:pPr algn="l">
-              <a:spcAft>
-                <a:spcPts val="100"/>
-              </a:spcAft>
-              <a:buNone/>
-            </a:pPr>
-            <a:r>
-              <a:rPr sz="1300" b="0" i="0">
-                <a:solidFill>
-                  <a:srgbClr val="F5F5F5"/>
-                </a:solidFill>
-                <a:latin typeface="Consolas"/>
-                <a:ea typeface="Consolas"/>
-                <a:cs typeface="Consolas"/>
-              </a:rPr>
-              <a:t>3. Ask again: total Amount by Region</a:t>
-            </a:r>
-          </a:p>
-          <a:p>
-            <a:pPr algn="l">
-              <a:spcAft>
-                <a:spcPts val="100"/>
-              </a:spcAft>
-              <a:buNone/>
-            </a:pPr>
-            <a:r>
-              <a:rPr sz="1300" b="0" i="0">
-                <a:solidFill>
-                  <a:srgbClr val="F5F5F5"/>
-                </a:solidFill>
-                <a:latin typeface="Consolas"/>
-                <a:ea typeface="Consolas"/>
-                <a:cs typeface="Consolas"/>
-              </a:rPr>
-              <a:t>4. Compare with Monday: no junk rows, named fields</a:t>
-            </a:r>
-          </a:p>
-          <a:p>
-            <a:pPr algn="l">
-              <a:spcAft>
-                <a:spcPts val="100"/>
-              </a:spcAft>
-              <a:buNone/>
-            </a:pPr>
-            <a:r>
-              <a:rPr sz="1300" b="0" i="0">
-                <a:solidFill>
-                  <a:srgbClr val="F5F5F5"/>
-                </a:solidFill>
-                <a:latin typeface="Consolas"/>
-                <a:ea typeface="Consolas"/>
-                <a:cs typeface="Consolas"/>
-              </a:rPr>
-              <a:t>5. New rows added to the table join automatically</a:t>
-            </a:r>
-          </a:p>
-        </p:txBody>
-      </p:sp>
-      <p:sp>
-        <p:nvSpPr>
-          <p:cNvPr id="6" name="TextBox 5">
-            <a:extLst>
-              <a:ext uri="{FF2B5EF4-FFF2-40B4-BE49-F238E27FC236}">
-                <a16:creationId xmlns:a16="http://schemas.microsoft.com/office/drawing/2014/main" id="{058FAD7C-6A5F-41D0-A5E3-FD22CD80543A}"/>
-              </a:ext>
-            </a:extLst>
-          </p:cNvPr>
-          <p:cNvSpPr>
-            <a:spLocks noGrp="1"/>
-          </p:cNvSpPr>
-          <p:nvPr/>
-        </p:nvSpPr>
-        <p:spPr>
-          <a:xfrm>
-            <a:off x="548640" y="5806440"/>
-            <a:ext cx="8229600" cy="777240"/>
-          </a:xfrm>
-          <a:prstGeom prst="rect">
-            <a:avLst/>
-          </a:prstGeom>
-          <a:noFill/>
-        </p:spPr>
-        <p:txBody>
-          <a:bodyPr wrap="square" lIns="0" tIns="0" rIns="0" bIns="0">
-            <a:spAutoFit/>
-          </a:bodyPr>
-          <a:lstStyle/>
-          <a:p>
-            <a:r>
-              <a:rPr sz="1300" b="1" i="0">
-                <a:solidFill>
-                  <a:srgbClr val="CF3338"/>
-                </a:solidFill>
-                <a:latin typeface="Arial"/>
-                <a:ea typeface="Arial"/>
-                <a:cs typeface="Arial"/>
-              </a:rPr>
-              <a:t>• Same tool, same data, better structure, better answer</a:t>
-            </a:r>
-          </a:p>
-        </p:txBody>
-      </p:sp>
-      <p:sp>
-        <p:nvSpPr>
-          <p:cNvPr id="7" name="Chat question">
-            <a:extLst>
-              <a:ext uri="{FF2B5EF4-FFF2-40B4-BE49-F238E27FC236}">
-                <a16:creationId xmlns:a16="http://schemas.microsoft.com/office/drawing/2014/main" id="{90051836-842F-42D0-BD30-2B35378BA9D8}"/>
-              </a:ext>
-            </a:extLst>
-          </p:cNvPr>
-          <p:cNvSpPr>
-            <a:spLocks noGrp="1"/>
-          </p:cNvSpPr>
-          <p:nvPr/>
-        </p:nvSpPr>
-        <p:spPr>
-          <a:xfrm>
-            <a:off x="9353550" y="2790825"/>
-            <a:ext cx="2428875" cy="1362075"/>
-          </a:xfrm>
-          <a:prstGeom prst="rect">
-            <a:avLst/>
-          </a:prstGeom>
-          <a:noFill/>
-          <a:ln w="0">
-            <a:noFill/>
-          </a:ln>
-        </p:spPr>
-        <p:txBody>
-          <a:bodyPr wrap="square" lIns="0" tIns="0" rIns="0" bIns="0">
-            <a:noAutofit/>
-          </a:bodyPr>
-          <a:lstStyle/>
-          <a:p>
-            <a:pPr>
-              <a:defRPr sz="2175" b="1">
-                <a:solidFill>
-                  <a:srgbClr val="FFFFFF"/>
-                </a:solidFill>
-                <a:latin typeface="Arial"/>
-                <a:ea typeface="Arial"/>
-                <a:cs typeface="Arial"/>
-              </a:defRPr>
-            </a:pPr>
-            <a:r>
-              <a:rPr sz="2175" b="1">
-                <a:solidFill>
-                  <a:srgbClr val="FFFFFF"/>
-                </a:solidFill>
-                <a:latin typeface="Arial"/>
-                <a:ea typeface="Arial"/>
-                <a:cs typeface="Arial"/>
-              </a:rPr>
-              <a:t>Did Ctrl+T fix</a:t>
-            </a:r>
-          </a:p>
-          <a:p>
-            <a:pPr>
-              <a:defRPr sz="2175" b="1">
-                <a:solidFill>
-                  <a:srgbClr val="FFFFFF"/>
-                </a:solidFill>
-                <a:latin typeface="Arial"/>
-                <a:ea typeface="Arial"/>
-                <a:cs typeface="Arial"/>
-              </a:defRPr>
-            </a:pPr>
-            <a:r>
-              <a:rPr sz="2175" b="1">
-                <a:solidFill>
-                  <a:srgbClr val="FFFFFF"/>
-                </a:solidFill>
-                <a:latin typeface="Arial"/>
-                <a:ea typeface="Arial"/>
-                <a:cs typeface="Arial"/>
-              </a:rPr>
-              <a:t>the region typos?</a:t>
-            </a:r>
-          </a:p>
-        </p:txBody>
-      </p:sp>
-      <p:sp>
-        <p:nvSpPr>
-          <p:cNvPr id="8" name="Chat choices">
-            <a:extLst>
-              <a:ext uri="{FF2B5EF4-FFF2-40B4-BE49-F238E27FC236}">
-                <a16:creationId xmlns:a16="http://schemas.microsoft.com/office/drawing/2014/main" id="{5ACAAA90-ADFF-45DC-B1CD-F5FAF027FBDF}"/>
-              </a:ext>
-            </a:extLst>
-          </p:cNvPr>
-          <p:cNvSpPr>
-            <a:spLocks noGrp="1"/>
-          </p:cNvSpPr>
-          <p:nvPr/>
-        </p:nvSpPr>
-        <p:spPr>
-          <a:xfrm>
-            <a:off x="9353550" y="4362450"/>
-            <a:ext cx="2428875" cy="1009650"/>
-          </a:xfrm>
-          <a:prstGeom prst="rect">
-            <a:avLst/>
-          </a:prstGeom>
-          <a:noFill/>
-          <a:ln w="0">
-            <a:noFill/>
-          </a:ln>
-        </p:spPr>
-        <p:txBody>
-          <a:bodyPr wrap="square" lIns="0" tIns="0" rIns="0" bIns="0">
-            <a:noAutofit/>
-          </a:bodyPr>
-          <a:lstStyle/>
-          <a:p>
-            <a:pPr>
-              <a:defRPr sz="1950" b="1">
-                <a:solidFill>
-                  <a:srgbClr val="FFFFFF"/>
-                </a:solidFill>
-                <a:latin typeface="Arial"/>
-                <a:ea typeface="Arial"/>
-                <a:cs typeface="Arial"/>
-              </a:defRPr>
-            </a:pPr>
-            <a:r>
-              <a:rPr sz="1950" b="1">
-                <a:solidFill>
-                  <a:srgbClr val="FFFFFF"/>
-                </a:solidFill>
-                <a:latin typeface="Arial"/>
-                <a:ea typeface="Arial"/>
-                <a:cs typeface="Arial"/>
-              </a:rPr>
-              <a:t>YES / NO</a:t>
-            </a:r>
-          </a:p>
-        </p:txBody>
-      </p:sp>
-      <p:sp>
-        <p:nvSpPr>
-          <p:cNvPr id="9" name="Chat instruction">
-            <a:extLst>
-              <a:ext uri="{FF2B5EF4-FFF2-40B4-BE49-F238E27FC236}">
-                <a16:creationId xmlns:a16="http://schemas.microsoft.com/office/drawing/2014/main" id="{EA846EDA-201C-4620-95F3-E87EA00BCAA6}"/>
-              </a:ext>
-            </a:extLst>
-          </p:cNvPr>
-          <p:cNvSpPr>
-            <a:spLocks noGrp="1"/>
-          </p:cNvSpPr>
-          <p:nvPr/>
-        </p:nvSpPr>
-        <p:spPr>
-          <a:xfrm>
-            <a:off x="9353550" y="5715000"/>
-            <a:ext cx="2428875" cy="609600"/>
-          </a:xfrm>
-          <a:prstGeom prst="rect">
-            <a:avLst/>
-          </a:prstGeom>
-          <a:noFill/>
-          <a:ln w="0">
-            <a:noFill/>
-          </a:ln>
-        </p:spPr>
-        <p:txBody>
-          <a:bodyPr wrap="square" lIns="0" tIns="0" rIns="0" bIns="0">
-            <a:noAutofit/>
-          </a:bodyPr>
-          <a:lstStyle/>
-          <a:p>
-            <a:pPr>
-              <a:defRPr sz="1500" b="0">
-                <a:solidFill>
-                  <a:srgbClr val="FFFFFF"/>
-                </a:solidFill>
-                <a:latin typeface="Arial"/>
-                <a:ea typeface="Arial"/>
-                <a:cs typeface="Arial"/>
-              </a:defRPr>
-            </a:pPr>
-            <a:r>
-              <a:rPr sz="1500" b="0">
-                <a:solidFill>
-                  <a:srgbClr val="FFFFFF"/>
-                </a:solidFill>
-                <a:latin typeface="Arial"/>
-                <a:ea typeface="Arial"/>
-                <a:cs typeface="Arial"/>
-              </a:rPr>
-              <a:t>Type one word</a:t>
-            </a:r>
-          </a:p>
-          <a:p>
-            <a:pPr>
-              <a:defRPr sz="1500" b="0">
-                <a:solidFill>
-                  <a:srgbClr val="FFFFFF"/>
-                </a:solidFill>
-                <a:latin typeface="Arial"/>
-                <a:ea typeface="Arial"/>
-                <a:cs typeface="Arial"/>
-              </a:defRPr>
-            </a:pPr>
-            <a:r>
-              <a:rPr sz="1500" b="0">
-                <a:solidFill>
-                  <a:srgbClr val="FFFFFF"/>
-                </a:solidFill>
-                <a:latin typeface="Arial"/>
-                <a:ea typeface="Arial"/>
-                <a:cs typeface="Arial"/>
-              </a:rPr>
-              <a:t>or a letter in chat.</a:t>
-            </a:r>
-          </a:p>
-        </p:txBody>
-      </p:sp>
-    </p:spTree>
-    <p:extLst>
-      <p:ext uri="{BB962C8B-B14F-4D97-AF65-F5344CB8AC3E}">
-        <p14:creationId xmlns:p14="http://schemas.microsoft.com/office/powerpoint/2010/main" val="371555514"/>
-      </p:ext>
-    </p:extLst>
-  </p:cSld>
-  <p:clrMapOvr>
-    <a:masterClrMapping/>
-  </p:clrMapOvr>
-</p:sld>
-</file>
-
-<file path=ppt/slides/slide6.xml><?xml version="1.0" encoding="utf-8"?>
-<p:sld xmlns:a="http://schemas.openxmlformats.org/drawingml/2006/main" xmlns:r="http://schemas.openxmlformats.org/officeDocument/2006/relationships" xmlns:p="http://schemas.openxmlformats.org/presentationml/2006/main">
-  <p:cSld>
-    <p:bg>
-      <p:bgPr>
-        <a:solidFill>
-          <a:srgbClr val="EEECE1"/>
-        </a:solidFill>
-        <a:effectLst/>
-      </p:bgPr>
-    </p:bg>
-    <p:spTree>
-      <p:nvGrpSpPr>
-        <p:cNvPr id="1" name=""/>
-        <p:cNvGrpSpPr/>
-        <p:nvPr/>
-      </p:nvGrpSpPr>
-      <p:grpSpPr>
-        <a:xfrm>
-          <a:off x="0" y="0"/>
-          <a:ext cx="0" cy="0"/>
-          <a:chOff x="0" y="0"/>
-          <a:chExt cx="0" cy="0"/>
-        </a:xfrm>
-      </p:grpSpPr>
-      <p:sp>
-        <p:nvSpPr>
           <p:cNvPr id="2" name="TextBox 1">
             <a:extLst>
               <a:ext uri="{FF2B5EF4-FFF2-40B4-BE49-F238E27FC236}">
@@ -7099,7 +6340,7 @@
 </p:sld>
 </file>
 
-<file path=ppt/slides/slide7.xml><?xml version="1.0" encoding="utf-8"?>
+<file path=ppt/slides/slide6.xml><?xml version="1.0" encoding="utf-8"?>
 <p:sld xmlns:a="http://schemas.openxmlformats.org/drawingml/2006/main" xmlns:r="http://schemas.openxmlformats.org/officeDocument/2006/relationships" xmlns:p="http://schemas.openxmlformats.org/presentationml/2006/main">
   <p:cSld>
     <p:bg>
@@ -7219,7 +6460,7 @@
 </p:sld>
 </file>
 
-<file path=ppt/slides/slide8.xml><?xml version="1.0" encoding="utf-8"?>
+<file path=ppt/slides/slide7.xml><?xml version="1.0" encoding="utf-8"?>
 <p:sld xmlns:a="http://schemas.openxmlformats.org/drawingml/2006/main" xmlns:r="http://schemas.openxmlformats.org/officeDocument/2006/relationships" xmlns:p="http://schemas.openxmlformats.org/presentationml/2006/main">
   <p:cSld>
     <p:bg>
